--- a/docs/content/pivoting/pivoting_lecture.pptx
+++ b/docs/content/pivoting/pivoting_lecture.pptx
@@ -3371,7 +3371,7 @@
             </a:pPr>
             <a:r>
               <a:rPr/>
-              <a:t>2026-09-04</a:t>
+              <a:t>2026-09-08</a:t>
             </a:r>
           </a:p>
         </p:txBody>

--- a/docs/content/pivoting/pivoting_lecture.pptx
+++ b/docs/content/pivoting/pivoting_lecture.pptx
@@ -3371,7 +3371,7 @@
             </a:pPr>
             <a:r>
               <a:rPr/>
-              <a:t>2026-09-08</a:t>
+              <a:t>2026-09-10</a:t>
             </a:r>
           </a:p>
         </p:txBody>

--- a/docs/content/pivoting/pivoting_lecture.pptx
+++ b/docs/content/pivoting/pivoting_lecture.pptx
@@ -3371,7 +3371,7 @@
             </a:pPr>
             <a:r>
               <a:rPr/>
-              <a:t>2026-09-10</a:t>
+              <a:t>2026-09-14</a:t>
             </a:r>
           </a:p>
         </p:txBody>

--- a/docs/content/pivoting/pivoting_lecture.pptx
+++ b/docs/content/pivoting/pivoting_lecture.pptx
@@ -3371,7 +3371,7 @@
             </a:pPr>
             <a:r>
               <a:rPr/>
-              <a:t>2026-09-14</a:t>
+              <a:t>2026-09-21</a:t>
             </a:r>
           </a:p>
         </p:txBody>

--- a/docs/content/pivoting/pivoting_lecture.pptx
+++ b/docs/content/pivoting/pivoting_lecture.pptx
@@ -3371,7 +3371,7 @@
             </a:pPr>
             <a:r>
               <a:rPr/>
-              <a:t>2026-09-21</a:t>
+              <a:t>2026-09-22</a:t>
             </a:r>
           </a:p>
         </p:txBody>

--- a/docs/content/pivoting/pivoting_lecture.pptx
+++ b/docs/content/pivoting/pivoting_lecture.pptx
@@ -3371,7 +3371,7 @@
             </a:pPr>
             <a:r>
               <a:rPr/>
-              <a:t>2026-09-22</a:t>
+              <a:t>2026-09-23</a:t>
             </a:r>
           </a:p>
         </p:txBody>

--- a/docs/content/pivoting/pivoting_lecture.pptx
+++ b/docs/content/pivoting/pivoting_lecture.pptx
@@ -10065,7 +10065,17 @@
                 </a:solidFill>
                 <a:latin typeface="Courier"/>
               </a:rPr>
-              <a:t>, current_yr, </a:t>
+              <a:t>, current_yr,</a:t>
+            </a:r>
+            <a:br/>
+            <a:r>
+              <a:rPr>
+                <a:solidFill>
+                  <a:srgbClr val="003B4F"/>
+                </a:solidFill>
+                <a:latin typeface="Courier"/>
+              </a:rPr>
+              <a:t>                     </a:t>
             </a:r>
             <a:r>
               <a:rPr>
@@ -13943,21 +13953,21 @@
                 <a:latin typeface="Courier"/>
               </a:rPr>
               <a:t># A tibble: 6 × 55
-  date   X1973 X1974 X1975 X1976 X1977 X1978 X1979 X1980 X1981 X1982 X1983 X1984
-  &lt;chr&gt;  &lt;dbl&gt; &lt;dbl&gt; &lt;dbl&gt; &lt;dbl&gt; &lt;dbl&gt; &lt;dbl&gt; &lt;dbl&gt; &lt;dbl&gt; &lt;dbl&gt; &lt;dbl&gt; &lt;dbl&gt; &lt;dbl&gt;
-1 Nov-10    NA    NA    NA    NA    NA    NA    NA    NA    NA    NA    NA    NA
-2 Nov-11    NA    NA    NA    NA    NA    NA    NA    NA    NA    NA    NA    NA
-3 Nov-12    NA    NA    NA    NA    NA    NA    NA    NA    NA    NA    NA    NA
-4 Nov-13    NA    NA    NA    NA    NA    NA    NA    NA    NA    NA    NA    NA
-5 Nov-14    NA    NA    NA    NA    NA    NA    NA    NA    NA    NA    NA    NA
-6 Nov-15    NA    NA    NA    NA    NA    NA    NA    NA    NA    NA    NA    NA
-# ℹ 42 more variables: X1985 &lt;dbl&gt;, X1986 &lt;dbl&gt;, X1987 &lt;dbl&gt;, X1988 &lt;dbl&gt;,
-#   X1989 &lt;dbl&gt;, X1990 &lt;dbl&gt;, X1991 &lt;dbl&gt;, X1992 &lt;dbl&gt;, X1993 &lt;dbl&gt;,
-#   X1994 &lt;dbl&gt;, X1995 &lt;dbl&gt;, X1996 &lt;dbl&gt;, X1997 &lt;dbl&gt;, X1998 &lt;dbl&gt;,
-#   X1999 &lt;dbl&gt;, X2000 &lt;dbl&gt;, X2001 &lt;dbl&gt;, X2002 &lt;dbl&gt;, X2003 &lt;dbl&gt;,
-#   X2004 &lt;dbl&gt;, X2005 &lt;dbl&gt;, X2006 &lt;dbl&gt;, X2007 &lt;dbl&gt;, X2008 &lt;dbl&gt;,
-#   X2009 &lt;dbl&gt;, X2010 &lt;dbl&gt;, X2011 &lt;dbl&gt;, X2012 &lt;dbl&gt;, X2013 &lt;dbl&gt;,
-#   X2014 &lt;dbl&gt;, X2015 &lt;dbl&gt;, X2016 &lt;dbl&gt;, X2017 &lt;dbl&gt;, X2018 &lt;dbl&gt;, …</a:t>
+  date   X1973 X1974 X1975 X1976 X1977 X1978 X1979 X1980 X1981
+  &lt;chr&gt;  &lt;dbl&gt; &lt;dbl&gt; &lt;dbl&gt; &lt;dbl&gt; &lt;dbl&gt; &lt;dbl&gt; &lt;dbl&gt; &lt;dbl&gt; &lt;dbl&gt;
+1 Nov-10    NA    NA    NA    NA    NA    NA    NA    NA    NA
+2 Nov-11    NA    NA    NA    NA    NA    NA    NA    NA    NA
+3 Nov-12    NA    NA    NA    NA    NA    NA    NA    NA    NA
+4 Nov-13    NA    NA    NA    NA    NA    NA    NA    NA    NA
+5 Nov-14    NA    NA    NA    NA    NA    NA    NA    NA    NA
+6 Nov-15    NA    NA    NA    NA    NA    NA    NA    NA    NA
+# ℹ 45 more variables: X1982 &lt;dbl&gt;, X1983 &lt;dbl&gt;, X1984 &lt;dbl&gt;,
+#   X1985 &lt;dbl&gt;, X1986 &lt;dbl&gt;, X1987 &lt;dbl&gt;, X1988 &lt;dbl&gt;,
+#   X1989 &lt;dbl&gt;, X1990 &lt;dbl&gt;, X1991 &lt;dbl&gt;, X1992 &lt;dbl&gt;,
+#   X1993 &lt;dbl&gt;, X1994 &lt;dbl&gt;, X1995 &lt;dbl&gt;, X1996 &lt;dbl&gt;,
+#   X1997 &lt;dbl&gt;, X1998 &lt;dbl&gt;, X1999 &lt;dbl&gt;, X2000 &lt;dbl&gt;,
+#   X2001 &lt;dbl&gt;, X2002 &lt;dbl&gt;, X2003 &lt;dbl&gt;, X2004 &lt;dbl&gt;,
+#   X2005 &lt;dbl&gt;, X2006 &lt;dbl&gt;, X2007 &lt;dbl&gt;, X2008 &lt;dbl&gt;, …</a:t>
             </a:r>
           </a:p>
         </p:txBody>

--- a/docs/content/pivoting/pivoting_lecture.pptx
+++ b/docs/content/pivoting/pivoting_lecture.pptx
@@ -3371,7 +3371,7 @@
             </a:pPr>
             <a:r>
               <a:rPr/>
-              <a:t>2026-09-23</a:t>
+              <a:t>2026-09-24</a:t>
             </a:r>
           </a:p>
         </p:txBody>

--- a/docs/content/pivoting/pivoting_lecture.pptx
+++ b/docs/content/pivoting/pivoting_lecture.pptx
@@ -3371,7 +3371,7 @@
             </a:pPr>
             <a:r>
               <a:rPr/>
-              <a:t>2026-09-24</a:t>
+              <a:t>2026-09-29</a:t>
             </a:r>
           </a:p>
         </p:txBody>

--- a/docs/content/pivoting/pivoting_lecture.pptx
+++ b/docs/content/pivoting/pivoting_lecture.pptx
@@ -3371,7 +3371,7 @@
             </a:pPr>
             <a:r>
               <a:rPr/>
-              <a:t>2026-09-29</a:t>
+              <a:t>2026-10-01</a:t>
             </a:r>
           </a:p>
         </p:txBody>

--- a/docs/content/pivoting/pivoting_lecture.pptx
+++ b/docs/content/pivoting/pivoting_lecture.pptx
@@ -37,6 +37,7 @@
     <p:sldId id="285" r:id="rId31"/>
     <p:sldId id="286" r:id="rId32"/>
     <p:sldId id="287" r:id="rId33"/>
+    <p:sldId id="288" r:id="rId34"/>
   </p:sldIdLst>
   <p:sldSz cx="9144000" cy="5143500" type="screen16x9"/>
   <p:notesSz cx="6858000" cy="9144000"/>
@@ -3371,7 +3372,7 @@
             </a:pPr>
             <a:r>
               <a:rPr/>
-              <a:t>2026-10-01</a:t>
+              <a:t>2026-10-05</a:t>
             </a:r>
           </a:p>
         </p:txBody>
@@ -3707,7 +3708,7 @@
             </a:r>
             <a:r>
               <a:rPr sz="2000"/>
-              <a:t> collapses every year column, how many </a:t>
+              <a:t>, how many </a:t>
             </a:r>
             <a:r>
               <a:rPr sz="2000" b="1"/>
@@ -3725,15 +3726,7 @@
             </a:r>
             <a:r>
               <a:rPr sz="2000"/>
-              <a:t> have, and roughly how many </a:t>
-            </a:r>
-            <a:r>
-              <a:rPr sz="2000" b="1"/>
-              <a:t>rows</a:t>
-            </a:r>
-            <a:r>
-              <a:rPr sz="2000"/>
-              <a:t>?</a:t>
+              <a:t> have?</a:t>
             </a:r>
           </a:p>
         </p:txBody>
@@ -5418,7 +5411,7 @@
             </a:r>
             <a:r>
               <a:rPr/>
-              <a:t> an ice season runs </a:t>
+              <a:t> a season runs </a:t>
             </a:r>
             <a:r>
               <a:rPr b="1"/>
@@ -5426,15 +5419,15 @@
             </a:r>
             <a:r>
               <a:rPr/>
-              <a:t>, but NOAA labels the whole season by the year </a:t>
+              <a:t>, but NOAA labels it by the year winter </a:t>
             </a:r>
             <a:r>
               <a:rPr b="1"/>
-              <a:t>winter ends in</a:t>
-            </a:r>
-            <a:r>
-              <a:rPr/>
-              <a:t>. So </a:t>
+              <a:t>ends</a:t>
+            </a:r>
+            <a:r>
+              <a:rPr/>
+              <a:t> in — so </a:t>
             </a:r>
             <a:r>
               <a:rPr>
@@ -5444,7 +5437,7 @@
             </a:r>
             <a:r>
               <a:rPr/>
-              <a:t> under column </a:t>
+              <a:t> under </a:t>
             </a:r>
             <a:r>
               <a:rPr>
@@ -5454,7 +5447,7 @@
             </a:r>
             <a:r>
               <a:rPr/>
-              <a:t> actually happened in </a:t>
+              <a:t> really happened in </a:t>
             </a:r>
             <a:r>
               <a:rPr b="1"/>
@@ -8057,7 +8050,7 @@
             </a:pPr>
             <a:r>
               <a:rPr/>
-              <a:t>NOAA publishes a live version of this exact plot every winter, comparing the </a:t>
+              <a:t>NOAA publishes this plot live every winter — </a:t>
             </a:r>
             <a:r>
               <a:rPr b="1"/>
@@ -8065,7 +8058,7 @@
             </a:r>
             <a:r>
               <a:rPr/>
-              <a:t> (black), the </a:t>
+              <a:t> (black), </a:t>
             </a:r>
             <a:r>
               <a:rPr b="1"/>
@@ -8073,7 +8066,7 @@
             </a:r>
             <a:r>
               <a:rPr/>
-              <a:t> (red), and </a:t>
+              <a:t> (red), </a:t>
             </a:r>
             <a:r>
               <a:rPr b="1"/>
@@ -8081,7 +8074,7 @@
             </a:r>
             <a:r>
               <a:rPr/>
-              <a:t> (thin blue lines):</a:t>
+              <a:t> (thin blue):</a:t>
             </a:r>
           </a:p>
         </p:txBody>
@@ -8168,7 +8161,7 @@
             </a:pPr>
             <a:r>
               <a:rPr/>
-              <a:t>Today, we’ll build </a:t>
+              <a:t>Today we build </a:t>
             </a:r>
             <a:r>
               <a:rPr b="1"/>
@@ -8176,7 +8169,7 @@
             </a:r>
             <a:r>
               <a:rPr/>
-              <a:t> of this plot from the raw data we just tidied.</a:t>
+              <a:t> from the data we just tidied.</a:t>
             </a:r>
           </a:p>
         </p:txBody>
@@ -8215,14 +8208,14 @@
             <a:pPr lvl="0"/>
             <a:r>
               <a:rPr/>
-              <a:t>Each line is one year’s entire ice season, Nov → May</a:t>
+              <a:t>Each line is one year’s whole ice season, Nov → May</a:t>
             </a:r>
           </a:p>
           <a:p>
             <a:pPr lvl="0"/>
             <a:r>
               <a:rPr/>
-              <a:t>The pattern that emerges — or doesn’t — tells the real climate story</a:t>
+              <a:t>The pattern that emerges — or doesn’t — is the climate story</a:t>
             </a:r>
           </a:p>
           <a:p>
@@ -8231,7 +8224,7 @@
             </a:pPr>
             <a:r>
               <a:rPr/>
-              <a:t>This is a great example of how the </a:t>
+              <a:t>A good example of the </a:t>
             </a:r>
             <a:r>
               <a:rPr b="1"/>
@@ -8239,7 +8232,7 @@
             </a:r>
             <a:r>
               <a:rPr/>
-              <a:t> appears in real published science.</a:t>
+              <a:t> showing up in published science.</a:t>
             </a:r>
           </a:p>
         </p:txBody>
@@ -10306,21 +10299,21 @@
             <a:pPr lvl="0"/>
             <a:r>
               <a:rPr/>
-              <a:t>Thin, transparent blue lines — every past year, faded so patterns (not individual years) stand out</a:t>
+              <a:t>Thin blue — every past year, faded so patterns stand out</a:t>
             </a:r>
           </a:p>
           <a:p>
             <a:pPr lvl="0"/>
             <a:r>
               <a:rPr/>
-              <a:t>Thick red line — the 50+ year historical average</a:t>
+              <a:t>Thick red — the 50+ year average</a:t>
             </a:r>
           </a:p>
           <a:p>
             <a:pPr lvl="0"/>
             <a:r>
               <a:rPr/>
-              <a:t>Thick black line — this year, drawn last so it’s on top</a:t>
+              <a:t>Thick black — this year, drawn last so it sits on top</a:t>
             </a:r>
           </a:p>
           <a:p>
@@ -10329,7 +10322,7 @@
             </a:pPr>
             <a:r>
               <a:rPr/>
-              <a:t>Compare your version to NOAA’s published plot — did we recreate it?</a:t>
+              <a:t>Compare it to NOAA’s published plot — did we recreate it?</a:t>
             </a:r>
           </a:p>
         </p:txBody>
@@ -10419,7 +10412,7 @@
             </a:r>
             <a:r>
               <a:rPr sz="2000"/>
-              <a:t> Commit now — over 50+ years, is Lake Superior’s </a:t>
+              <a:t> Over 50+ years, is Lake Superior’s </a:t>
             </a:r>
             <a:r>
               <a:rPr sz="2000" i="1"/>
@@ -10435,7 +10428,7 @@
             </a:r>
             <a:r>
               <a:rPr sz="2000"/>
-              <a:t>? Write your guess before the model runs.</a:t>
+              <a:t>?</a:t>
             </a:r>
           </a:p>
         </p:txBody>
@@ -10477,37 +10470,14 @@
           <a:bodyPr/>
           <a:lstStyle/>
           <a:p>
-            <a:pPr lvl="0" indent="0" marL="0">
-              <a:buNone/>
-            </a:pPr>
-            <a:r>
-              <a:rPr b="1"/>
-              <a:t>So far:</a:t>
-            </a:r>
-            <a:r>
-              <a:rPr/>
-              <a:t> we’ve visualized the </a:t>
-            </a:r>
-            <a:r>
-              <a:rPr i="1"/>
-              <a:t>shape</a:t>
-            </a:r>
-            <a:r>
-              <a:rPr/>
-              <a:t> of each ice season.</a:t>
-            </a:r>
-          </a:p>
-          <a:p>
-            <a:pPr lvl="0" indent="0" marL="0">
-              <a:buNone/>
-            </a:pPr>
+            <a:pPr lvl="0"/>
             <a:r>
               <a:rPr b="1"/>
               <a:t>New question:</a:t>
             </a:r>
             <a:r>
               <a:rPr/>
-              <a:t> has the </a:t>
+              <a:t> has each winter’s </a:t>
             </a:r>
             <a:r>
               <a:rPr b="1"/>
@@ -10515,7 +10485,7 @@
             </a:r>
             <a:r>
               <a:rPr/>
-              <a:t> (maximum) ice cover of each winter changed over the last 50 years?</a:t>
+              <a:t> ice cover changed over 50 years?</a:t>
             </a:r>
           </a:p>
           <a:p>
@@ -11271,12 +11241,12 @@
       </p:grpSpPr>
       <p:sp>
         <p:nvSpPr>
-          <p:cNvPr id="3" name="Text Placeholder 2"/>
+          <p:cNvPr id="3" name="Content Placeholder 2"/>
           <p:cNvSpPr>
             <a:spLocks noGrp="1"/>
           </p:cNvSpPr>
           <p:nvPr>
-            <p:ph idx="1" type="body"/>
+            <p:ph idx="1" sz="half"/>
           </p:nvPr>
         </p:nvSpPr>
         <p:spPr/>
@@ -11294,7 +11264,7 @@
                 </a:solidFill>
                 <a:latin typeface="Courier"/>
               </a:rPr>
-              <a:t># Fit a regression: max ice cover by year -----------------</a:t>
+              <a:t># Fit a regression: max ice cover by year ---------------</a:t>
             </a:r>
             <a:br/>
             <a:r>
@@ -11340,7 +11310,17 @@
                 </a:solidFill>
                 <a:latin typeface="Courier"/>
               </a:rPr>
-              <a:t> year, </a:t>
+              <a:t> year,</a:t>
+            </a:r>
+            <a:br/>
+            <a:r>
+              <a:rPr>
+                <a:solidFill>
+                  <a:srgbClr val="003B4F"/>
+                </a:solidFill>
+                <a:latin typeface="Courier"/>
+              </a:rPr>
+              <a:t>                    </a:t>
             </a:r>
             <a:r>
               <a:rPr>
@@ -11406,6 +11386,159 @@
 F-statistic: 7.539 on 1 and 52 DF,  p-value: 0.008274</a:t>
             </a:r>
           </a:p>
+        </p:txBody>
+      </p:sp>
+      <p:sp>
+        <p:nvSpPr>
+          <p:cNvPr id="4" name="Content Placeholder 3"/>
+          <p:cNvSpPr>
+            <a:spLocks noGrp="1"/>
+          </p:cNvSpPr>
+          <p:nvPr>
+            <p:ph idx="2" sz="half"/>
+          </p:nvPr>
+        </p:nvSpPr>
+        <p:spPr/>
+        <p:txBody>
+          <a:bodyPr/>
+          <a:lstStyle/>
+          <a:p>
+            <a:pPr lvl="0"/>
+            <a:r>
+              <a:rPr b="1"/>
+              <a:t>Same </a:t>
+            </a:r>
+            <a:r>
+              <a:rPr b="1">
+                <a:latin typeface="Courier"/>
+              </a:rPr>
+              <a:t>lm()</a:t>
+            </a:r>
+            <a:r>
+              <a:rPr b="1"/>
+              <a:t> as the Regression lecture</a:t>
+            </a:r>
+            <a:r>
+              <a:rPr/>
+              <a:t>, with </a:t>
+            </a:r>
+            <a:r>
+              <a:rPr>
+                <a:latin typeface="Courier"/>
+              </a:rPr>
+              <a:t>X = year</a:t>
+            </a:r>
+            <a:r>
+              <a:rPr/>
+              <a:t> and </a:t>
+            </a:r>
+            <a:r>
+              <a:rPr>
+                <a:latin typeface="Courier"/>
+              </a:rPr>
+              <a:t>Y = ice_cover</a:t>
+            </a:r>
+          </a:p>
+          <a:p>
+            <a:pPr lvl="0"/>
+            <a:r>
+              <a:rPr/>
+              <a:t>The </a:t>
+            </a:r>
+            <a:r>
+              <a:rPr b="1"/>
+              <a:t>slope</a:t>
+            </a:r>
+            <a:r>
+              <a:rPr/>
+              <a:t> = percentage points of max ice gained or lost per year</a:t>
+            </a:r>
+          </a:p>
+          <a:p>
+            <a:pPr lvl="0"/>
+            <a:r>
+              <a:rPr/>
+              <a:t>Read the slope’s </a:t>
+            </a:r>
+            <a:r>
+              <a:rPr>
+                <a:latin typeface="Courier"/>
+              </a:rPr>
+              <a:t>Pr(&gt;|t|)</a:t>
+            </a:r>
+            <a:r>
+              <a:rPr/>
+              <a:t> to decide if the trend is real</a:t>
+            </a:r>
+          </a:p>
+        </p:txBody>
+      </p:sp>
+    </p:spTree>
+  </p:cSld>
+</p:sld>
+</file>
+
+<file path=ppt/slides/slide31.xml><?xml version="1.0" encoding="utf-8"?>
+<p:sld xmlns:a="http://schemas.openxmlformats.org/drawingml/2006/main" xmlns:r="http://schemas.openxmlformats.org/officeDocument/2006/relationships" xmlns:p="http://schemas.openxmlformats.org/presentationml/2006/main">
+  <p:cSld>
+    <p:spTree>
+      <p:nvGrpSpPr>
+        <p:cNvPr id="1" name=""/>
+        <p:cNvGrpSpPr/>
+        <p:nvPr/>
+      </p:nvGrpSpPr>
+      <p:grpSpPr>
+        <a:xfrm>
+          <a:off x="0" y="0"/>
+          <a:ext cx="0" cy="0"/>
+          <a:chOff x="0" y="0"/>
+          <a:chExt cx="0" cy="0"/>
+        </a:xfrm>
+      </p:grpSpPr>
+      <p:sp>
+        <p:nvSpPr>
+          <p:cNvPr id="2" name="Title 1"/>
+          <p:cNvSpPr>
+            <a:spLocks noGrp="1"/>
+          </p:cNvSpPr>
+          <p:nvPr>
+            <p:ph type="title"/>
+          </p:nvPr>
+        </p:nvSpPr>
+        <p:spPr>
+          <a:xfrm>
+            <a:off x="139485" y="78119"/>
+            <a:ext cx="8229600" cy="607682"/>
+          </a:xfrm>
+        </p:spPr>
+        <p:txBody>
+          <a:bodyPr/>
+          <a:lstStyle/>
+          <a:p>
+            <a:pPr lvl="0" indent="0" marL="0">
+              <a:buNone/>
+            </a:pPr>
+            <a:r>
+              <a:rPr/>
+              <a:t>Plot the Trend</a:t>
+            </a:r>
+          </a:p>
+        </p:txBody>
+      </p:sp>
+      <p:sp>
+        <p:nvSpPr>
+          <p:cNvPr id="3" name="Text Placeholder 2"/>
+          <p:cNvSpPr>
+            <a:spLocks noGrp="1"/>
+          </p:cNvSpPr>
+          <p:nvPr>
+            <p:ph idx="1" type="body"/>
+          </p:nvPr>
+        </p:nvSpPr>
+        <p:spPr/>
+        <p:txBody>
+          <a:bodyPr/>
+          <a:lstStyle/>
           <a:p>
             <a:pPr lvl="0" indent="0">
               <a:buNone/>
@@ -11964,56 +12097,6 @@
           <a:bodyPr/>
           <a:lstStyle/>
           <a:p>
-            <a:pPr lvl="0" indent="0" marL="0">
-              <a:buNone/>
-            </a:pPr>
-            <a:r>
-              <a:rPr b="1"/>
-              <a:t>Same </a:t>
-            </a:r>
-            <a:r>
-              <a:rPr b="1">
-                <a:latin typeface="Courier"/>
-              </a:rPr>
-              <a:t>lm()</a:t>
-            </a:r>
-            <a:r>
-              <a:rPr b="1"/>
-              <a:t> syntax as Lecture 11/13</a:t>
-            </a:r>
-            <a:r>
-              <a:rPr/>
-              <a:t> — only now </a:t>
-            </a:r>
-            <a:r>
-              <a:rPr>
-                <a:latin typeface="Courier"/>
-              </a:rPr>
-              <a:t>X = year</a:t>
-            </a:r>
-            <a:r>
-              <a:rPr/>
-              <a:t> and </a:t>
-            </a:r>
-            <a:r>
-              <a:rPr>
-                <a:latin typeface="Courier"/>
-              </a:rPr>
-              <a:t>Y = ice_cover</a:t>
-            </a:r>
-            <a:r>
-              <a:rPr/>
-              <a:t> (the yearly peak, not a daily or monthly mean).</a:t>
-            </a:r>
-          </a:p>
-          <a:p>
-            <a:pPr lvl="0"/>
-            <a:r>
-              <a:rPr/>
-              <a:t>The slope tells us how many percentage points of max ice cover change per year</a:t>
-            </a:r>
-          </a:p>
-          <a:p>
             <a:pPr lvl="0"/>
             <a:r>
               <a:rPr/>
@@ -12023,18 +12106,40 @@
               <a:rPr b="1"/>
               <a:t>huge year-to-year scatter</a:t>
             </a:r>
-            <a:r>
-              <a:rPr/>
-              <a:t> — Great Lakes ice cover is famously variable, driven by short-term weather patterns like ENSO and the polar vortex, not just a steady climate trend</a:t>
-            </a:r>
-          </a:p>
-          <a:p>
-            <a:pPr lvl="0" indent="0" marL="0">
-              <a:buNone/>
-            </a:pPr>
-            <a:r>
-              <a:rPr/>
-              <a:t>This is real data — the story is messier (and more honest) than a clean line.</a:t>
+          </a:p>
+          <a:p>
+            <a:pPr lvl="1"/>
+            <a:r>
+              <a:rPr/>
+              <a:t>Great Lakes ice is famously variable</a:t>
+            </a:r>
+          </a:p>
+          <a:p>
+            <a:pPr lvl="1"/>
+            <a:r>
+              <a:rPr/>
+              <a:t>driven by short-term weather — ENSO, the polar vortex</a:t>
+            </a:r>
+          </a:p>
+          <a:p>
+            <a:pPr lvl="1"/>
+            <a:r>
+              <a:rPr/>
+              <a:t>not just a steady climate trend</a:t>
+            </a:r>
+          </a:p>
+          <a:p>
+            <a:pPr lvl="0"/>
+            <a:r>
+              <a:rPr/>
+              <a:t>This is real data</a:t>
+            </a:r>
+          </a:p>
+          <a:p>
+            <a:pPr lvl="1"/>
+            <a:r>
+              <a:rPr/>
+              <a:t>the story is messier, and more honest, than a clean line</a:t>
             </a:r>
           </a:p>
         </p:txBody>
@@ -12044,7 +12149,7 @@
 </p:sld>
 </file>
 
-<file path=ppt/slides/slide31.xml><?xml version="1.0" encoding="utf-8"?>
+<file path=ppt/slides/slide32.xml><?xml version="1.0" encoding="utf-8"?>
 <p:sld xmlns:a="http://schemas.openxmlformats.org/drawingml/2006/main" xmlns:r="http://schemas.openxmlformats.org/officeDocument/2006/relationships" xmlns:p="http://schemas.openxmlformats.org/presentationml/2006/main">
   <p:cSld>
     <p:spTree>
@@ -12141,7 +12246,7 @@
 </p:sld>
 </file>
 
-<file path=ppt/slides/slide32.xml><?xml version="1.0" encoding="utf-8"?>
+<file path=ppt/slides/slide33.xml><?xml version="1.0" encoding="utf-8"?>
 <p:sld xmlns:a="http://schemas.openxmlformats.org/drawingml/2006/main" xmlns:r="http://schemas.openxmlformats.org/officeDocument/2006/relationships" xmlns:p="http://schemas.openxmlformats.org/presentationml/2006/main">
   <p:cSld>
     <p:spTree>
@@ -12218,7 +12323,7 @@
             <a:pPr lvl="0"/>
             <a:r>
               <a:rPr/>
-              <a:t>Real-world data is often </a:t>
+              <a:t>Real data is often </a:t>
             </a:r>
             <a:r>
               <a:rPr b="1"/>
@@ -12239,7 +12344,7 @@
             </a:r>
             <a:r>
               <a:rPr/>
-              <a:t> collapses many columns into key-value pairs — unlocking </a:t>
+              <a:t> collapses many columns into key-value pairs, unlocking </a:t>
             </a:r>
             <a:r>
               <a:rPr>
@@ -12249,17 +12354,7 @@
             </a:r>
             <a:r>
               <a:rPr/>
-              <a:t>, </a:t>
-            </a:r>
-            <a:r>
-              <a:rPr>
-                <a:latin typeface="Courier"/>
-              </a:rPr>
-              <a:t>summarize()</a:t>
-            </a:r>
-            <a:r>
-              <a:rPr/>
-              <a:t>, and </a:t>
+              <a:t> and </a:t>
             </a:r>
             <a:r>
               <a:rPr>
@@ -12323,7 +12418,7 @@
             </a:r>
             <a:r>
               <a:rPr/>
-              <a:t> workflow from Lecture 12 applies to </a:t>
+              <a:t> workflow applies to </a:t>
             </a:r>
             <a:r>
               <a:rPr i="1"/>
@@ -12331,7 +12426,7 @@
             </a:r>
             <a:r>
               <a:rPr/>
-              <a:t> time-indexed variable, including a yearly maximum</a:t>
+              <a:t> time-indexed variable</a:t>
             </a:r>
           </a:p>
           <a:p>
@@ -12519,14 +12614,14 @@
             <a:pPr lvl="0"/>
             <a:r>
               <a:rPr/>
-              <a:t>Apply the same wide-to-long pivot workflow to a Great Lake of your choice</a:t>
+              <a:t>The same pivot workflow on a Great Lake of your choice</a:t>
             </a:r>
           </a:p>
           <a:p>
             <a:pPr lvl="0"/>
             <a:r>
               <a:rPr/>
-              <a:t>Compare your lake’s maximum ice trend to Lake Superior’s, predicting first by hand</a:t>
+              <a:t>Compare its maximum ice trend to Lake Superior’s</a:t>
             </a:r>
           </a:p>
         </p:txBody>
@@ -13932,16 +14027,25 @@
                 </a:solidFill>
                 <a:latin typeface="Courier"/>
               </a:rPr>
-              <a:t>head</a:t>
-            </a:r>
-            <a:r>
-              <a:rPr>
-                <a:solidFill>
-                  <a:srgbClr val="003B4F"/>
-                </a:solidFill>
-                <a:latin typeface="Courier"/>
-              </a:rPr>
-              <a:t>(ice_raw)</a:t>
+              <a:t>dim</a:t>
+            </a:r>
+            <a:r>
+              <a:rPr>
+                <a:solidFill>
+                  <a:srgbClr val="003B4F"/>
+                </a:solidFill>
+                <a:latin typeface="Courier"/>
+              </a:rPr>
+              <a:t>(ice_raw)       </a:t>
+            </a:r>
+            <a:r>
+              <a:rPr>
+                <a:solidFill>
+                  <a:srgbClr val="5E5E5E"/>
+                </a:solidFill>
+                <a:latin typeface="Courier"/>
+              </a:rPr>
+              <a:t># rows x columns - look how WIDE</a:t>
             </a:r>
           </a:p>
           <a:p>
@@ -13952,22 +14056,118 @@
               <a:rPr>
                 <a:latin typeface="Courier"/>
               </a:rPr>
-              <a:t># A tibble: 6 × 55
-  date   X1973 X1974 X1975 X1976 X1977 X1978 X1979 X1980 X1981
-  &lt;chr&gt;  &lt;dbl&gt; &lt;dbl&gt; &lt;dbl&gt; &lt;dbl&gt; &lt;dbl&gt; &lt;dbl&gt; &lt;dbl&gt; &lt;dbl&gt; &lt;dbl&gt;
-1 Nov-10    NA    NA    NA    NA    NA    NA    NA    NA    NA
-2 Nov-11    NA    NA    NA    NA    NA    NA    NA    NA    NA
-3 Nov-12    NA    NA    NA    NA    NA    NA    NA    NA    NA
-4 Nov-13    NA    NA    NA    NA    NA    NA    NA    NA    NA
-5 Nov-14    NA    NA    NA    NA    NA    NA    NA    NA    NA
-6 Nov-15    NA    NA    NA    NA    NA    NA    NA    NA    NA
-# ℹ 45 more variables: X1982 &lt;dbl&gt;, X1983 &lt;dbl&gt;, X1984 &lt;dbl&gt;,
-#   X1985 &lt;dbl&gt;, X1986 &lt;dbl&gt;, X1987 &lt;dbl&gt;, X1988 &lt;dbl&gt;,
-#   X1989 &lt;dbl&gt;, X1990 &lt;dbl&gt;, X1991 &lt;dbl&gt;, X1992 &lt;dbl&gt;,
-#   X1993 &lt;dbl&gt;, X1994 &lt;dbl&gt;, X1995 &lt;dbl&gt;, X1996 &lt;dbl&gt;,
-#   X1997 &lt;dbl&gt;, X1998 &lt;dbl&gt;, X1999 &lt;dbl&gt;, X2000 &lt;dbl&gt;,
-#   X2001 &lt;dbl&gt;, X2002 &lt;dbl&gt;, X2003 &lt;dbl&gt;, X2004 &lt;dbl&gt;,
-#   X2005 &lt;dbl&gt;, X2006 &lt;dbl&gt;, X2007 &lt;dbl&gt;, X2008 &lt;dbl&gt;, …</a:t>
+              <a:t>[1] 209  55</a:t>
+            </a:r>
+          </a:p>
+          <a:p>
+            <a:pPr lvl="0" indent="0">
+              <a:buNone/>
+            </a:pPr>
+            <a:r>
+              <a:rPr>
+                <a:solidFill>
+                  <a:srgbClr val="003B4F"/>
+                </a:solidFill>
+                <a:latin typeface="Courier"/>
+              </a:rPr>
+              <a:t>ice_raw[</a:t>
+            </a:r>
+            <a:r>
+              <a:rPr>
+                <a:solidFill>
+                  <a:srgbClr val="AD0000"/>
+                </a:solidFill>
+                <a:latin typeface="Courier"/>
+              </a:rPr>
+              <a:t>1</a:t>
+            </a:r>
+            <a:r>
+              <a:rPr>
+                <a:solidFill>
+                  <a:srgbClr val="5E5E5E"/>
+                </a:solidFill>
+                <a:latin typeface="Courier"/>
+              </a:rPr>
+              <a:t>:</a:t>
+            </a:r>
+            <a:r>
+              <a:rPr>
+                <a:solidFill>
+                  <a:srgbClr val="AD0000"/>
+                </a:solidFill>
+                <a:latin typeface="Courier"/>
+              </a:rPr>
+              <a:t>3</a:t>
+            </a:r>
+            <a:r>
+              <a:rPr>
+                <a:solidFill>
+                  <a:srgbClr val="003B4F"/>
+                </a:solidFill>
+                <a:latin typeface="Courier"/>
+              </a:rPr>
+              <a:t>, </a:t>
+            </a:r>
+            <a:r>
+              <a:rPr>
+                <a:solidFill>
+                  <a:srgbClr val="AD0000"/>
+                </a:solidFill>
+                <a:latin typeface="Courier"/>
+              </a:rPr>
+              <a:t>1</a:t>
+            </a:r>
+            <a:r>
+              <a:rPr>
+                <a:solidFill>
+                  <a:srgbClr val="5E5E5E"/>
+                </a:solidFill>
+                <a:latin typeface="Courier"/>
+              </a:rPr>
+              <a:t>:</a:t>
+            </a:r>
+            <a:r>
+              <a:rPr>
+                <a:solidFill>
+                  <a:srgbClr val="AD0000"/>
+                </a:solidFill>
+                <a:latin typeface="Courier"/>
+              </a:rPr>
+              <a:t>5</a:t>
+            </a:r>
+            <a:r>
+              <a:rPr>
+                <a:solidFill>
+                  <a:srgbClr val="003B4F"/>
+                </a:solidFill>
+                <a:latin typeface="Courier"/>
+              </a:rPr>
+              <a:t>]  </a:t>
+            </a:r>
+            <a:r>
+              <a:rPr>
+                <a:solidFill>
+                  <a:srgbClr val="5E5E5E"/>
+                </a:solidFill>
+                <a:latin typeface="Courier"/>
+              </a:rPr>
+              <a:t># just the first few columns</a:t>
+            </a:r>
+          </a:p>
+          <a:p>
+            <a:pPr lvl="0" indent="0">
+              <a:buNone/>
+            </a:pPr>
+            <a:r>
+              <a:rPr>
+                <a:latin typeface="Courier"/>
+              </a:rPr>
+              <a:t># A tibble: 3 × 5
+  date   X1973 X1974 X1975 X1976
+  &lt;chr&gt;  &lt;dbl&gt; &lt;dbl&gt; &lt;dbl&gt; &lt;dbl&gt;
+1 Nov-10    NA    NA    NA    NA
+2 Nov-11    NA    NA    NA    NA
+3 Nov-12    NA    NA    NA    NA</a:t>
             </a:r>
           </a:p>
         </p:txBody>
@@ -14005,7 +14205,7 @@
             </a:r>
             <a:r>
               <a:rPr/>
-              <a:t> (base R) handles this better than </a:t>
+              <a:t> beats </a:t>
             </a:r>
             <a:r>
               <a:rPr>
@@ -14015,7 +14215,7 @@
             </a:r>
             <a:r>
               <a:rPr/>
-              <a:t> since the file isn’t comma-separated</a:t>
+              <a:t> here — the file isn’t comma-separated</a:t>
             </a:r>
           </a:p>
           <a:p>
@@ -14028,14 +14228,14 @@
             </a:r>
             <a:r>
               <a:rPr/>
-              <a:t> tells R which placeholder values actually mean “missing”</a:t>
+              <a:t> says which placeholders really mean “missing”</a:t>
             </a:r>
           </a:p>
           <a:p>
             <a:pPr lvl="0"/>
             <a:r>
               <a:rPr/>
-              <a:t>The day-of-winter labels (</a:t>
+              <a:t>The day labels (</a:t>
             </a:r>
             <a:r>
               <a:rPr>
@@ -14045,17 +14245,15 @@
             </a:r>
             <a:r>
               <a:rPr/>
-              <a:t>, </a:t>
-            </a:r>
-            <a:r>
-              <a:rPr>
-                <a:latin typeface="Courier"/>
-              </a:rPr>
-              <a:t>Nov-11</a:t>
-            </a:r>
-            <a:r>
-              <a:rPr/>
-              <a:t>…) were row names, not a real column — </a:t>
+              <a:t>…) were </a:t>
+            </a:r>
+            <a:r>
+              <a:rPr b="1"/>
+              <a:t>row names</a:t>
+            </a:r>
+            <a:r>
+              <a:rPr/>
+              <a:t>, not a column — </a:t>
             </a:r>
             <a:r>
               <a:rPr>
@@ -14083,7 +14281,7 @@
             </a:pPr>
             <a:r>
               <a:rPr sz="2000"/>
-              <a:t>Look at the column names: </a:t>
+              <a:t>Column names </a:t>
             </a:r>
             <a:r>
               <a:rPr sz="2000">
@@ -14103,7 +14301,7 @@
             </a:r>
             <a:r>
               <a:rPr sz="2000"/>
-              <a:t>… R adds an </a:t>
+              <a:t>… — R adds an </a:t>
             </a:r>
             <a:r>
               <a:rPr sz="2000">
@@ -14113,7 +14311,7 @@
             </a:r>
             <a:r>
               <a:rPr sz="2000"/>
-              <a:t> because column names can’t start with a number!</a:t>
+              <a:t> because a name can’t start with a number!</a:t>
             </a:r>
           </a:p>
         </p:txBody>

--- a/docs/content/pivoting/pivoting_lecture.pptx
+++ b/docs/content/pivoting/pivoting_lecture.pptx
@@ -3372,7 +3372,7 @@
             </a:pPr>
             <a:r>
               <a:rPr/>
-              <a:t>2026-10-05</a:t>
+              <a:t>2026-10-08</a:t>
             </a:r>
           </a:p>
         </p:txBody>
@@ -10248,8 +10248,8 @@
         </p:blipFill>
         <p:spPr bwMode="auto">
           <a:xfrm>
-            <a:off x="127000" y="1562100"/>
-            <a:ext cx="4432300" cy="2730500"/>
+            <a:off x="127000" y="2032000"/>
+            <a:ext cx="4432300" cy="1778000"/>
           </a:xfrm>
           <a:prstGeom prst="rect">
             <a:avLst/>
@@ -12068,8 +12068,8 @@
         </p:blipFill>
         <p:spPr bwMode="auto">
           <a:xfrm>
-            <a:off x="127000" y="1562100"/>
-            <a:ext cx="4432300" cy="2730500"/>
+            <a:off x="127000" y="1765300"/>
+            <a:ext cx="4432300" cy="2324100"/>
           </a:xfrm>
           <a:prstGeom prst="rect">
             <a:avLst/>

--- a/docs/content/pivoting/pivoting_lecture.pptx
+++ b/docs/content/pivoting/pivoting_lecture.pptx
@@ -3372,7 +3372,7 @@
             </a:pPr>
             <a:r>
               <a:rPr/>
-              <a:t>2026-10-08</a:t>
+              <a:t>2026-10-09</a:t>
             </a:r>
           </a:p>
         </p:txBody>

--- a/docs/content/pivoting/pivoting_lecture.pptx
+++ b/docs/content/pivoting/pivoting_lecture.pptx
@@ -3372,7 +3372,7 @@
             </a:pPr>
             <a:r>
               <a:rPr/>
-              <a:t>2026-10-09</a:t>
+              <a:t>2026-10-19</a:t>
             </a:r>
           </a:p>
         </p:txBody>
@@ -11471,6 +11471,35 @@
               <a:t> to decide if the trend is real</a:t>
             </a:r>
           </a:p>
+          <a:p>
+            <a:pPr lvl="0"/>
+            <a:r>
+              <a:rPr/>
+              <a:t>Then read the </a:t>
+            </a:r>
+            <a:r>
+              <a:rPr b="1"/>
+              <a:t>R²</a:t>
+            </a:r>
+            <a:r>
+              <a:rPr/>
+              <a:t> — it is small here</a:t>
+            </a:r>
+          </a:p>
+          <a:p>
+            <a:pPr lvl="1"/>
+            <a:r>
+              <a:rPr/>
+              <a:t>the trend is real, and it explains only a slice of the variation</a:t>
+            </a:r>
+          </a:p>
+          <a:p>
+            <a:pPr lvl="1"/>
+            <a:r>
+              <a:rPr/>
+              <a:t>both numbers, or you have told half the story</a:t>
+            </a:r>
+          </a:p>
         </p:txBody>
       </p:sp>
     </p:spTree>
@@ -12607,21 +12636,25 @@
             </a:pPr>
             <a:r>
               <a:rPr b="1"/>
-              <a:t>Up next — Extension (out of class):</a:t>
+              <a:t>Up next — Lecture 16:</a:t>
             </a:r>
           </a:p>
           <a:p>
             <a:pPr lvl="0"/>
             <a:r>
-              <a:rPr/>
-              <a:t>The same pivot workflow on a Great Lake of your choice</a:t>
+              <a:rPr b="1"/>
+              <a:t>Joins</a:t>
+            </a:r>
+            <a:r>
+              <a:rPr/>
+              <a:t> — two tables that each hold half the story</a:t>
             </a:r>
           </a:p>
           <a:p>
             <a:pPr lvl="0"/>
             <a:r>
               <a:rPr/>
-              <a:t>Compare its maximum ice trend to Lake Superior’s</a:t>
+              <a:t>Homework: the same pivot workflow on a Great Lake of your choice</a:t>
             </a:r>
           </a:p>
         </p:txBody>

--- a/docs/content/pivoting/pivoting_lecture.pptx
+++ b/docs/content/pivoting/pivoting_lecture.pptx
@@ -36,8 +36,6 @@
     <p:sldId id="284" r:id="rId30"/>
     <p:sldId id="285" r:id="rId31"/>
     <p:sldId id="286" r:id="rId32"/>
-    <p:sldId id="287" r:id="rId33"/>
-    <p:sldId id="288" r:id="rId34"/>
   </p:sldIdLst>
   <p:sldSz cx="9144000" cy="5143500" type="screen16x9"/>
   <p:notesSz cx="6858000" cy="9144000"/>
@@ -3424,7 +3422,7 @@
             </a:pPr>
             <a:r>
               <a:rPr/>
-              <a:t>🛑 Pause — Do Activity Parts 1–2 Now</a:t>
+              <a:t>🧩 Chunk 2 of 4 · Reshape with pivot_longer &amp; Fix Dates</a:t>
             </a:r>
           </a:p>
         </p:txBody>
@@ -3448,38 +3446,44 @@
               <a:buNone/>
             </a:pPr>
             <a:r>
-              <a:rPr/>
-              <a:t>Read </a:t>
-            </a:r>
-            <a:r>
-              <a:rPr>
-                <a:latin typeface="Courier"/>
-              </a:rPr>
-              <a:t>sup.txt</a:t>
-            </a:r>
-            <a:r>
-              <a:rPr/>
-              <a:t> straight from the web with </a:t>
-            </a:r>
-            <a:r>
-              <a:rPr>
-                <a:latin typeface="Courier"/>
-              </a:rPr>
-              <a:t>read.table()</a:t>
-            </a:r>
-            <a:r>
-              <a:rPr/>
-              <a:t>, turn the row labels into a real </a:t>
-            </a:r>
-            <a:r>
-              <a:rPr>
-                <a:latin typeface="Courier"/>
-              </a:rPr>
-              <a:t>date</a:t>
-            </a:r>
-            <a:r>
-              <a:rPr/>
-              <a:t> column, and look at the wide shape. Predict how many columns it has before you run it.</a:t>
+              <a:rPr b="1"/>
+              <a:t>We will cover:</a:t>
+            </a:r>
+            <a:r>
+              <a:rPr/>
+              <a:t> </a:t>
+            </a:r>
+            <a:r>
+              <a:rPr>
+                <a:latin typeface="Courier"/>
+              </a:rPr>
+              <a:t>pivot_longer()</a:t>
+            </a:r>
+            <a:r>
+              <a:rPr/>
+              <a:t> to make the data tidy, the before/after shape, and the tricky winters-cross-the-new-year date fix.</a:t>
+            </a:r>
+          </a:p>
+          <a:p>
+            <a:pPr lvl="0" indent="0" marL="1270000">
+              <a:buNone/>
+            </a:pPr>
+            <a:r>
+              <a:rPr sz="2000" b="1"/>
+              <a:t>Tip</a:t>
+            </a:r>
+          </a:p>
+          <a:p>
+            <a:pPr lvl="0" indent="0" marL="1270000">
+              <a:buNone/>
+            </a:pPr>
+            <a:r>
+              <a:rPr sz="2000" b="1"/>
+              <a:t>🖐 After this chunk: Activity Parts 3–4</a:t>
+            </a:r>
+            <a:r>
+              <a:rPr sz="2000"/>
+              <a:t> (pivot to long, then fix the calendar-year wrinkle).</a:t>
             </a:r>
           </a:p>
         </p:txBody>
@@ -3530,8 +3534,14 @@
               <a:buNone/>
             </a:pPr>
             <a:r>
-              <a:rPr/>
-              <a:t>🧩 Chunk 2 of 4 · Reshape with pivot_longer &amp; Fix Dates</a:t>
+              <a:rPr>
+                <a:latin typeface="Courier"/>
+              </a:rPr>
+              <a:t>pivot_longer()</a:t>
+            </a:r>
+            <a:r>
+              <a:rPr/>
+              <a:t> — Collapsing Wide to Long</a:t>
             </a:r>
           </a:p>
         </p:txBody>
@@ -3551,48 +3561,63 @@
           <a:bodyPr/>
           <a:lstStyle/>
           <a:p>
-            <a:pPr lvl="0" indent="0" marL="0">
+            <a:pPr lvl="0" indent="0" marL="1270000">
               <a:buNone/>
             </a:pPr>
             <a:r>
-              <a:rPr b="1"/>
-              <a:t>We will cover:</a:t>
-            </a:r>
-            <a:r>
-              <a:rPr/>
+              <a:rPr sz="2000" b="1"/>
+              <a:t>Note</a:t>
+            </a:r>
+          </a:p>
+          <a:p>
+            <a:pPr lvl="0" indent="0" marL="1270000">
+              <a:buNone/>
+            </a:pPr>
+            <a:r>
+              <a:rPr sz="2000" b="1"/>
+              <a:t>🔮 Predict first:</a:t>
+            </a:r>
+            <a:r>
+              <a:rPr sz="2000"/>
               <a:t> </a:t>
             </a:r>
             <a:r>
-              <a:rPr>
+              <a:rPr sz="2000">
+                <a:latin typeface="Courier"/>
+              </a:rPr>
+              <a:t>ice_raw</a:t>
+            </a:r>
+            <a:r>
+              <a:rPr sz="2000"/>
+              <a:t> is ~190 rows × 53 columns. After </a:t>
+            </a:r>
+            <a:r>
+              <a:rPr sz="2000">
                 <a:latin typeface="Courier"/>
               </a:rPr>
               <a:t>pivot_longer()</a:t>
             </a:r>
             <a:r>
-              <a:rPr/>
-              <a:t> to make the data tidy, the before/after shape, and the tricky winters-cross-the-new-year date fix.</a:t>
-            </a:r>
-          </a:p>
-          <a:p>
-            <a:pPr lvl="0" indent="0" marL="1270000">
-              <a:buNone/>
-            </a:pPr>
+              <a:rPr sz="2000"/>
+              <a:t>, how many </a:t>
+            </a:r>
             <a:r>
               <a:rPr sz="2000" b="1"/>
-              <a:t>Tip</a:t>
-            </a:r>
-          </a:p>
-          <a:p>
-            <a:pPr lvl="0" indent="0" marL="1270000">
-              <a:buNone/>
-            </a:pPr>
-            <a:r>
-              <a:rPr sz="2000" b="1"/>
-              <a:t>🖐 After this chunk: Activity Parts 3–4</a:t>
+              <a:t>columns</a:t>
             </a:r>
             <a:r>
               <a:rPr sz="2000"/>
-              <a:t> (pivot to long, then fix the calendar-year wrinkle).</a:t>
+              <a:t> will </a:t>
+            </a:r>
+            <a:r>
+              <a:rPr sz="2000">
+                <a:latin typeface="Courier"/>
+              </a:rPr>
+              <a:t>ice_long</a:t>
+            </a:r>
+            <a:r>
+              <a:rPr sz="2000"/>
+              <a:t> have?</a:t>
             </a:r>
           </a:p>
         </p:txBody>
@@ -3621,140 +3646,6 @@
       </p:grpSpPr>
       <p:sp>
         <p:nvSpPr>
-          <p:cNvPr id="2" name="Title 1"/>
-          <p:cNvSpPr>
-            <a:spLocks noGrp="1"/>
-          </p:cNvSpPr>
-          <p:nvPr>
-            <p:ph type="title"/>
-          </p:nvPr>
-        </p:nvSpPr>
-        <p:spPr>
-          <a:xfrm>
-            <a:off x="0" y="0"/>
-            <a:ext cx="9144000" cy="582780"/>
-          </a:xfrm>
-        </p:spPr>
-        <p:txBody>
-          <a:bodyPr/>
-          <a:lstStyle/>
-          <a:p>
-            <a:pPr lvl="0" indent="0" marL="0">
-              <a:buNone/>
-            </a:pPr>
-            <a:r>
-              <a:rPr>
-                <a:latin typeface="Courier"/>
-              </a:rPr>
-              <a:t>pivot_longer()</a:t>
-            </a:r>
-            <a:r>
-              <a:rPr/>
-              <a:t> — Collapsing Wide to Long</a:t>
-            </a:r>
-          </a:p>
-        </p:txBody>
-      </p:sp>
-      <p:sp>
-        <p:nvSpPr>
-          <p:cNvPr id="3" name="Content Placeholder 2"/>
-          <p:cNvSpPr>
-            <a:spLocks noGrp="1"/>
-          </p:cNvSpPr>
-          <p:nvPr>
-            <p:ph idx="1"/>
-          </p:nvPr>
-        </p:nvSpPr>
-        <p:spPr/>
-        <p:txBody>
-          <a:bodyPr/>
-          <a:lstStyle/>
-          <a:p>
-            <a:pPr lvl="0" indent="0" marL="1270000">
-              <a:buNone/>
-            </a:pPr>
-            <a:r>
-              <a:rPr sz="2000" b="1"/>
-              <a:t>Note</a:t>
-            </a:r>
-          </a:p>
-          <a:p>
-            <a:pPr lvl="0" indent="0" marL="1270000">
-              <a:buNone/>
-            </a:pPr>
-            <a:r>
-              <a:rPr sz="2000" b="1"/>
-              <a:t>🔮 Predict first:</a:t>
-            </a:r>
-            <a:r>
-              <a:rPr sz="2000"/>
-              <a:t> </a:t>
-            </a:r>
-            <a:r>
-              <a:rPr sz="2000">
-                <a:latin typeface="Courier"/>
-              </a:rPr>
-              <a:t>ice_raw</a:t>
-            </a:r>
-            <a:r>
-              <a:rPr sz="2000"/>
-              <a:t> is ~190 rows × 53 columns. After </a:t>
-            </a:r>
-            <a:r>
-              <a:rPr sz="2000">
-                <a:latin typeface="Courier"/>
-              </a:rPr>
-              <a:t>pivot_longer()</a:t>
-            </a:r>
-            <a:r>
-              <a:rPr sz="2000"/>
-              <a:t>, how many </a:t>
-            </a:r>
-            <a:r>
-              <a:rPr sz="2000" b="1"/>
-              <a:t>columns</a:t>
-            </a:r>
-            <a:r>
-              <a:rPr sz="2000"/>
-              <a:t> will </a:t>
-            </a:r>
-            <a:r>
-              <a:rPr sz="2000">
-                <a:latin typeface="Courier"/>
-              </a:rPr>
-              <a:t>ice_long</a:t>
-            </a:r>
-            <a:r>
-              <a:rPr sz="2000"/>
-              <a:t> have?</a:t>
-            </a:r>
-          </a:p>
-        </p:txBody>
-      </p:sp>
-    </p:spTree>
-  </p:cSld>
-</p:sld>
-</file>
-
-<file path=ppt/slides/slide13.xml><?xml version="1.0" encoding="utf-8"?>
-<p:sld xmlns:a="http://schemas.openxmlformats.org/drawingml/2006/main" xmlns:r="http://schemas.openxmlformats.org/officeDocument/2006/relationships" xmlns:p="http://schemas.openxmlformats.org/presentationml/2006/main">
-  <p:cSld>
-    <p:spTree>
-      <p:nvGrpSpPr>
-        <p:cNvPr id="1" name=""/>
-        <p:cNvGrpSpPr/>
-        <p:nvPr/>
-      </p:nvGrpSpPr>
-      <p:grpSpPr>
-        <a:xfrm>
-          <a:off x="0" y="0"/>
-          <a:ext cx="0" cy="0"/>
-          <a:chOff x="0" y="0"/>
-          <a:chExt cx="0" cy="0"/>
-        </a:xfrm>
-      </p:grpSpPr>
-      <p:sp>
-        <p:nvSpPr>
           <p:cNvPr id="3" name="Content Placeholder 2"/>
           <p:cNvSpPr>
             <a:spLocks noGrp="1"/>
@@ -4263,417 +4154,7 @@
 </p:sld>
 </file>
 
-<file path=ppt/slides/slide14.xml><?xml version="1.0" encoding="utf-8"?>
-<p:sld xmlns:a="http://schemas.openxmlformats.org/drawingml/2006/main" xmlns:r="http://schemas.openxmlformats.org/officeDocument/2006/relationships" xmlns:p="http://schemas.openxmlformats.org/presentationml/2006/main">
-  <p:cSld>
-    <p:spTree>
-      <p:nvGrpSpPr>
-        <p:cNvPr id="1" name=""/>
-        <p:cNvGrpSpPr/>
-        <p:nvPr/>
-      </p:nvGrpSpPr>
-      <p:grpSpPr>
-        <a:xfrm>
-          <a:off x="0" y="0"/>
-          <a:ext cx="0" cy="0"/>
-          <a:chOff x="0" y="0"/>
-          <a:chExt cx="0" cy="0"/>
-        </a:xfrm>
-      </p:grpSpPr>
-      <p:sp>
-        <p:nvSpPr>
-          <p:cNvPr id="2" name="Title 1"/>
-          <p:cNvSpPr>
-            <a:spLocks noGrp="1"/>
-          </p:cNvSpPr>
-          <p:nvPr>
-            <p:ph type="title"/>
-          </p:nvPr>
-        </p:nvSpPr>
-        <p:spPr>
-          <a:xfrm>
-            <a:off x="0" y="0"/>
-            <a:ext cx="9144000" cy="602780"/>
-          </a:xfrm>
-          <a:solidFill>
-            <a:srgbClr val="1A1A2E"/>
-          </a:solidFill>
-        </p:spPr>
-        <p:txBody>
-          <a:bodyPr/>
-          <a:lstStyle/>
-          <a:p>
-            <a:pPr lvl="0" indent="0" marL="0">
-              <a:buNone/>
-            </a:pPr>
-            <a:r>
-              <a:rPr/>
-              <a:t>Live Demo — Watch It Break (on purpose)</a:t>
-            </a:r>
-          </a:p>
-        </p:txBody>
-      </p:sp>
-      <p:sp>
-        <p:nvSpPr>
-          <p:cNvPr id="3" name="Content Placeholder 2"/>
-          <p:cNvSpPr>
-            <a:spLocks noGrp="1"/>
-          </p:cNvSpPr>
-          <p:nvPr>
-            <p:ph idx="1" sz="half"/>
-          </p:nvPr>
-        </p:nvSpPr>
-        <p:spPr/>
-        <p:txBody>
-          <a:bodyPr/>
-          <a:lstStyle/>
-          <a:p>
-            <a:pPr lvl="0" indent="0" marL="0">
-              <a:buNone/>
-            </a:pPr>
-            <a:r>
-              <a:rPr/>
-              <a:t>Suppose I forgot </a:t>
-            </a:r>
-            <a:r>
-              <a:rPr>
-                <a:latin typeface="Courier"/>
-              </a:rPr>
-              <a:t>rownames_to_column()</a:t>
-            </a:r>
-            <a:r>
-              <a:rPr/>
-              <a:t>, so there is no </a:t>
-            </a:r>
-            <a:r>
-              <a:rPr>
-                <a:latin typeface="Courier"/>
-              </a:rPr>
-              <a:t>date</a:t>
-            </a:r>
-            <a:r>
-              <a:rPr/>
-              <a:t> column yet:</a:t>
-            </a:r>
-          </a:p>
-          <a:p>
-            <a:pPr lvl="0" indent="0">
-              <a:buNone/>
-            </a:pPr>
-            <a:r>
-              <a:rPr>
-                <a:solidFill>
-                  <a:srgbClr val="5E5E5E"/>
-                </a:solidFill>
-                <a:latin typeface="Courier"/>
-              </a:rPr>
-              <a:t># Try to pivot every column except date...</a:t>
-            </a:r>
-            <a:br/>
-            <a:r>
-              <a:rPr>
-                <a:solidFill>
-                  <a:srgbClr val="003B4F"/>
-                </a:solidFill>
-                <a:latin typeface="Courier"/>
-              </a:rPr>
-              <a:t>ice_raw </a:t>
-            </a:r>
-            <a:r>
-              <a:rPr>
-                <a:solidFill>
-                  <a:srgbClr val="5E5E5E"/>
-                </a:solidFill>
-                <a:latin typeface="Courier"/>
-              </a:rPr>
-              <a:t>%&gt;%</a:t>
-            </a:r>
-            <a:r>
-              <a:rPr>
-                <a:solidFill>
-                  <a:srgbClr val="003B4F"/>
-                </a:solidFill>
-                <a:latin typeface="Courier"/>
-              </a:rPr>
-              <a:t> </a:t>
-            </a:r>
-            <a:r>
-              <a:rPr>
-                <a:solidFill>
-                  <a:srgbClr val="4758AB"/>
-                </a:solidFill>
-                <a:latin typeface="Courier"/>
-              </a:rPr>
-              <a:t>pivot_longer</a:t>
-            </a:r>
-            <a:r>
-              <a:rPr>
-                <a:solidFill>
-                  <a:srgbClr val="003B4F"/>
-                </a:solidFill>
-                <a:latin typeface="Courier"/>
-              </a:rPr>
-              <a:t>(</a:t>
-            </a:r>
-            <a:r>
-              <a:rPr>
-                <a:solidFill>
-                  <a:srgbClr val="657422"/>
-                </a:solidFill>
-                <a:latin typeface="Courier"/>
-              </a:rPr>
-              <a:t>cols =</a:t>
-            </a:r>
-            <a:r>
-              <a:rPr>
-                <a:solidFill>
-                  <a:srgbClr val="003B4F"/>
-                </a:solidFill>
-                <a:latin typeface="Courier"/>
-              </a:rPr>
-              <a:t> </a:t>
-            </a:r>
-            <a:r>
-              <a:rPr>
-                <a:solidFill>
-                  <a:srgbClr val="5E5E5E"/>
-                </a:solidFill>
-                <a:latin typeface="Courier"/>
-              </a:rPr>
-              <a:t>-</a:t>
-            </a:r>
-            <a:r>
-              <a:rPr>
-                <a:solidFill>
-                  <a:srgbClr val="003B4F"/>
-                </a:solidFill>
-                <a:latin typeface="Courier"/>
-              </a:rPr>
-              <a:t>date, </a:t>
-            </a:r>
-            <a:r>
-              <a:rPr>
-                <a:solidFill>
-                  <a:srgbClr val="657422"/>
-                </a:solidFill>
-                <a:latin typeface="Courier"/>
-              </a:rPr>
-              <a:t>names_to =</a:t>
-            </a:r>
-            <a:r>
-              <a:rPr>
-                <a:solidFill>
-                  <a:srgbClr val="003B4F"/>
-                </a:solidFill>
-                <a:latin typeface="Courier"/>
-              </a:rPr>
-              <a:t> </a:t>
-            </a:r>
-            <a:r>
-              <a:rPr>
-                <a:solidFill>
-                  <a:srgbClr val="20794D"/>
-                </a:solidFill>
-                <a:latin typeface="Courier"/>
-              </a:rPr>
-              <a:t>"year"</a:t>
-            </a:r>
-            <a:r>
-              <a:rPr>
-                <a:solidFill>
-                  <a:srgbClr val="003B4F"/>
-                </a:solidFill>
-                <a:latin typeface="Courier"/>
-              </a:rPr>
-              <a:t>)</a:t>
-            </a:r>
-          </a:p>
-          <a:p>
-            <a:pPr lvl="0" indent="0" marL="0">
-              <a:buNone/>
-            </a:pPr>
-            <a:r>
-              <a:rPr/>
-              <a:t>R stops:</a:t>
-            </a:r>
-          </a:p>
-          <a:p>
-            <a:pPr lvl="0" indent="0">
-              <a:buNone/>
-            </a:pPr>
-            <a:r>
-              <a:rPr>
-                <a:latin typeface="Courier"/>
-              </a:rPr>
-              <a:t>Error in `pivot_longer()`:
-! Can't select columns that don't exist.
-✖ Column `date` doesn't exist.</a:t>
-            </a:r>
-          </a:p>
-          <a:p>
-            <a:pPr lvl="0" indent="0" marL="0">
-              <a:buNone/>
-            </a:pPr>
-            <a:r>
-              <a:rPr/>
-              <a:t>The fix — make the row labels a real column first:</a:t>
-            </a:r>
-          </a:p>
-          <a:p>
-            <a:pPr lvl="0" indent="0">
-              <a:buNone/>
-            </a:pPr>
-            <a:r>
-              <a:rPr>
-                <a:solidFill>
-                  <a:srgbClr val="003B4F"/>
-                </a:solidFill>
-                <a:latin typeface="Courier"/>
-              </a:rPr>
-              <a:t>ice_raw &lt;- ice_raw </a:t>
-            </a:r>
-            <a:r>
-              <a:rPr>
-                <a:solidFill>
-                  <a:srgbClr val="5E5E5E"/>
-                </a:solidFill>
-                <a:latin typeface="Courier"/>
-              </a:rPr>
-              <a:t>%&gt;%</a:t>
-            </a:r>
-            <a:r>
-              <a:rPr>
-                <a:solidFill>
-                  <a:srgbClr val="003B4F"/>
-                </a:solidFill>
-                <a:latin typeface="Courier"/>
-              </a:rPr>
-              <a:t> </a:t>
-            </a:r>
-            <a:r>
-              <a:rPr>
-                <a:solidFill>
-                  <a:srgbClr val="4758AB"/>
-                </a:solidFill>
-                <a:latin typeface="Courier"/>
-              </a:rPr>
-              <a:t>rownames_to_column</a:t>
-            </a:r>
-            <a:r>
-              <a:rPr>
-                <a:solidFill>
-                  <a:srgbClr val="003B4F"/>
-                </a:solidFill>
-                <a:latin typeface="Courier"/>
-              </a:rPr>
-              <a:t>(</a:t>
-            </a:r>
-            <a:r>
-              <a:rPr>
-                <a:solidFill>
-                  <a:srgbClr val="657422"/>
-                </a:solidFill>
-                <a:latin typeface="Courier"/>
-              </a:rPr>
-              <a:t>var =</a:t>
-            </a:r>
-            <a:r>
-              <a:rPr>
-                <a:solidFill>
-                  <a:srgbClr val="003B4F"/>
-                </a:solidFill>
-                <a:latin typeface="Courier"/>
-              </a:rPr>
-              <a:t> </a:t>
-            </a:r>
-            <a:r>
-              <a:rPr>
-                <a:solidFill>
-                  <a:srgbClr val="20794D"/>
-                </a:solidFill>
-                <a:latin typeface="Courier"/>
-              </a:rPr>
-              <a:t>"date"</a:t>
-            </a:r>
-            <a:r>
-              <a:rPr>
-                <a:solidFill>
-                  <a:srgbClr val="003B4F"/>
-                </a:solidFill>
-                <a:latin typeface="Courier"/>
-              </a:rPr>
-              <a:t>)</a:t>
-            </a:r>
-          </a:p>
-        </p:txBody>
-      </p:sp>
-      <p:sp>
-        <p:nvSpPr>
-          <p:cNvPr id="4" name="Content Placeholder 3"/>
-          <p:cNvSpPr>
-            <a:spLocks noGrp="1"/>
-          </p:cNvSpPr>
-          <p:nvPr>
-            <p:ph idx="2" sz="half"/>
-          </p:nvPr>
-        </p:nvSpPr>
-        <p:spPr/>
-        <p:txBody>
-          <a:bodyPr/>
-          <a:lstStyle/>
-          <a:p>
-            <a:pPr lvl="0" indent="0" marL="1270000">
-              <a:buNone/>
-            </a:pPr>
-            <a:r>
-              <a:rPr sz="2000" b="1"/>
-              <a:t>Tip</a:t>
-            </a:r>
-          </a:p>
-          <a:p>
-            <a:pPr lvl="0" indent="0" marL="1270000">
-              <a:buNone/>
-            </a:pPr>
-            <a:r>
-              <a:rPr sz="2000" b="1"/>
-              <a:t>✅ Why show a broken run?</a:t>
-            </a:r>
-          </a:p>
-          <a:p>
-            <a:pPr lvl="0" indent="0" marL="1270000">
-              <a:buNone/>
-            </a:pPr>
-            <a:r>
-              <a:rPr sz="2000"/>
-              <a:t>“Column </a:t>
-            </a:r>
-            <a:r>
-              <a:rPr sz="2000">
-                <a:latin typeface="Courier"/>
-              </a:rPr>
-              <a:t>date</a:t>
-            </a:r>
-            <a:r>
-              <a:rPr sz="2000"/>
-              <a:t> doesn’t exist” means you referenced a column R can’t see — here because the day labels were still </a:t>
-            </a:r>
-            <a:r>
-              <a:rPr sz="2000" b="1"/>
-              <a:t>row names</a:t>
-            </a:r>
-            <a:r>
-              <a:rPr sz="2000"/>
-              <a:t>, not data. Reading the message points you straight to the fix.</a:t>
-            </a:r>
-          </a:p>
-        </p:txBody>
-      </p:sp>
-    </p:spTree>
-  </p:cSld>
-</p:sld>
-</file>
-
-<file path=ppt/slides/slide15.xml><?xml version="1.0" encoding="utf-8"?>
+<file path=ppt/slides/slide13.xml><?xml version="1.0" encoding="utf-8"?>
 <p:sld xmlns:a="http://schemas.openxmlformats.org/drawingml/2006/main" xmlns:r="http://schemas.openxmlformats.org/officeDocument/2006/relationships" xmlns:p="http://schemas.openxmlformats.org/presentationml/2006/main">
   <p:cSld>
     <p:spTree>
@@ -5337,6 +4818,880 @@
 </p:sld>
 </file>
 
+<file path=ppt/slides/slide14.xml><?xml version="1.0" encoding="utf-8"?>
+<p:sld xmlns:a="http://schemas.openxmlformats.org/drawingml/2006/main" xmlns:r="http://schemas.openxmlformats.org/officeDocument/2006/relationships" xmlns:p="http://schemas.openxmlformats.org/presentationml/2006/main">
+  <p:cSld>
+    <p:spTree>
+      <p:nvGrpSpPr>
+        <p:cNvPr id="1" name=""/>
+        <p:cNvGrpSpPr/>
+        <p:nvPr/>
+      </p:nvGrpSpPr>
+      <p:grpSpPr>
+        <a:xfrm>
+          <a:off x="0" y="0"/>
+          <a:ext cx="0" cy="0"/>
+          <a:chOff x="0" y="0"/>
+          <a:chExt cx="0" cy="0"/>
+        </a:xfrm>
+      </p:grpSpPr>
+      <p:sp>
+        <p:nvSpPr>
+          <p:cNvPr id="2" name="Title 1"/>
+          <p:cNvSpPr>
+            <a:spLocks noGrp="1"/>
+          </p:cNvSpPr>
+          <p:nvPr>
+            <p:ph type="title"/>
+          </p:nvPr>
+        </p:nvSpPr>
+        <p:spPr>
+          <a:xfrm>
+            <a:off x="0" y="0"/>
+            <a:ext cx="9144000" cy="602780"/>
+          </a:xfrm>
+          <a:solidFill>
+            <a:srgbClr val="1A1A2E"/>
+          </a:solidFill>
+        </p:spPr>
+        <p:txBody>
+          <a:bodyPr/>
+          <a:lstStyle/>
+          <a:p>
+            <a:pPr lvl="0" indent="0" marL="0">
+              <a:buNone/>
+            </a:pPr>
+            <a:r>
+              <a:rPr/>
+              <a:t>A Tricky Real-World Wrinkle: Winters Cross the New Year</a:t>
+            </a:r>
+          </a:p>
+        </p:txBody>
+      </p:sp>
+      <p:sp>
+        <p:nvSpPr>
+          <p:cNvPr id="3" name="Content Placeholder 2"/>
+          <p:cNvSpPr>
+            <a:spLocks noGrp="1"/>
+          </p:cNvSpPr>
+          <p:nvPr>
+            <p:ph idx="1" sz="half"/>
+          </p:nvPr>
+        </p:nvSpPr>
+        <p:spPr/>
+        <p:txBody>
+          <a:bodyPr/>
+          <a:lstStyle/>
+          <a:p>
+            <a:pPr lvl="0" indent="0" marL="0">
+              <a:buNone/>
+            </a:pPr>
+            <a:r>
+              <a:rPr b="1"/>
+              <a:t>The problem:</a:t>
+            </a:r>
+            <a:r>
+              <a:rPr/>
+              <a:t> a season runs </a:t>
+            </a:r>
+            <a:r>
+              <a:rPr b="1"/>
+              <a:t>Nov → May</a:t>
+            </a:r>
+            <a:r>
+              <a:rPr/>
+              <a:t>, but NOAA labels it by the year winter </a:t>
+            </a:r>
+            <a:r>
+              <a:rPr b="1"/>
+              <a:t>ends</a:t>
+            </a:r>
+            <a:r>
+              <a:rPr/>
+              <a:t> in — so </a:t>
+            </a:r>
+            <a:r>
+              <a:rPr>
+                <a:latin typeface="Courier"/>
+              </a:rPr>
+              <a:t>Nov-10</a:t>
+            </a:r>
+            <a:r>
+              <a:rPr/>
+              <a:t> under </a:t>
+            </a:r>
+            <a:r>
+              <a:rPr>
+                <a:latin typeface="Courier"/>
+              </a:rPr>
+              <a:t>1974</a:t>
+            </a:r>
+            <a:r>
+              <a:rPr/>
+              <a:t> really happened in </a:t>
+            </a:r>
+            <a:r>
+              <a:rPr b="1"/>
+              <a:t>November 1973</a:t>
+            </a:r>
+            <a:r>
+              <a:rPr/>
+              <a:t>.</a:t>
+            </a:r>
+          </a:p>
+          <a:p>
+            <a:pPr lvl="0" indent="0">
+              <a:buNone/>
+            </a:pPr>
+            <a:r>
+              <a:rPr>
+                <a:solidFill>
+                  <a:srgbClr val="5E5E5E"/>
+                </a:solidFill>
+                <a:latin typeface="Courier"/>
+              </a:rPr>
+              <a:t># Assign Nov/Dec to the PREVIOUS calendar year ----------</a:t>
+            </a:r>
+            <a:br/>
+            <a:r>
+              <a:rPr>
+                <a:solidFill>
+                  <a:srgbClr val="003B4F"/>
+                </a:solidFill>
+                <a:latin typeface="Courier"/>
+              </a:rPr>
+              <a:t>ice_clean &lt;- ice_long </a:t>
+            </a:r>
+            <a:r>
+              <a:rPr>
+                <a:solidFill>
+                  <a:srgbClr val="5E5E5E"/>
+                </a:solidFill>
+                <a:latin typeface="Courier"/>
+              </a:rPr>
+              <a:t>%&gt;%</a:t>
+            </a:r>
+            <a:br/>
+            <a:r>
+              <a:rPr>
+                <a:solidFill>
+                  <a:srgbClr val="003B4F"/>
+                </a:solidFill>
+                <a:latin typeface="Courier"/>
+              </a:rPr>
+              <a:t>  </a:t>
+            </a:r>
+            <a:r>
+              <a:rPr>
+                <a:solidFill>
+                  <a:srgbClr val="4758AB"/>
+                </a:solidFill>
+                <a:latin typeface="Courier"/>
+              </a:rPr>
+              <a:t>mutate</a:t>
+            </a:r>
+            <a:r>
+              <a:rPr>
+                <a:solidFill>
+                  <a:srgbClr val="003B4F"/>
+                </a:solidFill>
+                <a:latin typeface="Courier"/>
+              </a:rPr>
+              <a:t>(</a:t>
+            </a:r>
+            <a:br/>
+            <a:r>
+              <a:rPr>
+                <a:solidFill>
+                  <a:srgbClr val="003B4F"/>
+                </a:solidFill>
+                <a:latin typeface="Courier"/>
+              </a:rPr>
+              <a:t>    </a:t>
+            </a:r>
+            <a:r>
+              <a:rPr>
+                <a:solidFill>
+                  <a:srgbClr val="657422"/>
+                </a:solidFill>
+                <a:latin typeface="Courier"/>
+              </a:rPr>
+              <a:t>year =</a:t>
+            </a:r>
+            <a:r>
+              <a:rPr>
+                <a:solidFill>
+                  <a:srgbClr val="003B4F"/>
+                </a:solidFill>
+                <a:latin typeface="Courier"/>
+              </a:rPr>
+              <a:t> </a:t>
+            </a:r>
+            <a:r>
+              <a:rPr>
+                <a:solidFill>
+                  <a:srgbClr val="4758AB"/>
+                </a:solidFill>
+                <a:latin typeface="Courier"/>
+              </a:rPr>
+              <a:t>as.numeric</a:t>
+            </a:r>
+            <a:r>
+              <a:rPr>
+                <a:solidFill>
+                  <a:srgbClr val="003B4F"/>
+                </a:solidFill>
+                <a:latin typeface="Courier"/>
+              </a:rPr>
+              <a:t>(year),</a:t>
+            </a:r>
+            <a:br/>
+            <a:r>
+              <a:rPr>
+                <a:solidFill>
+                  <a:srgbClr val="003B4F"/>
+                </a:solidFill>
+                <a:latin typeface="Courier"/>
+              </a:rPr>
+              <a:t>    </a:t>
+            </a:r>
+            <a:r>
+              <a:rPr>
+                <a:solidFill>
+                  <a:srgbClr val="657422"/>
+                </a:solidFill>
+                <a:latin typeface="Courier"/>
+              </a:rPr>
+              <a:t>calendar_year =</a:t>
+            </a:r>
+            <a:r>
+              <a:rPr>
+                <a:solidFill>
+                  <a:srgbClr val="003B4F"/>
+                </a:solidFill>
+                <a:latin typeface="Courier"/>
+              </a:rPr>
+              <a:t> </a:t>
+            </a:r>
+            <a:r>
+              <a:rPr>
+                <a:solidFill>
+                  <a:srgbClr val="4758AB"/>
+                </a:solidFill>
+                <a:latin typeface="Courier"/>
+              </a:rPr>
+              <a:t>if_else</a:t>
+            </a:r>
+            <a:r>
+              <a:rPr>
+                <a:solidFill>
+                  <a:srgbClr val="003B4F"/>
+                </a:solidFill>
+                <a:latin typeface="Courier"/>
+              </a:rPr>
+              <a:t>(</a:t>
+            </a:r>
+            <a:br/>
+            <a:r>
+              <a:rPr>
+                <a:solidFill>
+                  <a:srgbClr val="003B4F"/>
+                </a:solidFill>
+                <a:latin typeface="Courier"/>
+              </a:rPr>
+              <a:t>      </a:t>
+            </a:r>
+            <a:r>
+              <a:rPr>
+                <a:solidFill>
+                  <a:srgbClr val="4758AB"/>
+                </a:solidFill>
+                <a:latin typeface="Courier"/>
+              </a:rPr>
+              <a:t>str_starts</a:t>
+            </a:r>
+            <a:r>
+              <a:rPr>
+                <a:solidFill>
+                  <a:srgbClr val="003B4F"/>
+                </a:solidFill>
+                <a:latin typeface="Courier"/>
+              </a:rPr>
+              <a:t>(date, </a:t>
+            </a:r>
+            <a:r>
+              <a:rPr>
+                <a:solidFill>
+                  <a:srgbClr val="20794D"/>
+                </a:solidFill>
+                <a:latin typeface="Courier"/>
+              </a:rPr>
+              <a:t>"Nov|Dec"</a:t>
+            </a:r>
+            <a:r>
+              <a:rPr>
+                <a:solidFill>
+                  <a:srgbClr val="003B4F"/>
+                </a:solidFill>
+                <a:latin typeface="Courier"/>
+              </a:rPr>
+              <a:t>),</a:t>
+            </a:r>
+            <a:br/>
+            <a:r>
+              <a:rPr>
+                <a:solidFill>
+                  <a:srgbClr val="003B4F"/>
+                </a:solidFill>
+                <a:latin typeface="Courier"/>
+              </a:rPr>
+              <a:t>      year </a:t>
+            </a:r>
+            <a:r>
+              <a:rPr>
+                <a:solidFill>
+                  <a:srgbClr val="5E5E5E"/>
+                </a:solidFill>
+                <a:latin typeface="Courier"/>
+              </a:rPr>
+              <a:t>-</a:t>
+            </a:r>
+            <a:r>
+              <a:rPr>
+                <a:solidFill>
+                  <a:srgbClr val="003B4F"/>
+                </a:solidFill>
+                <a:latin typeface="Courier"/>
+              </a:rPr>
+              <a:t> </a:t>
+            </a:r>
+            <a:r>
+              <a:rPr>
+                <a:solidFill>
+                  <a:srgbClr val="AD0000"/>
+                </a:solidFill>
+                <a:latin typeface="Courier"/>
+              </a:rPr>
+              <a:t>1</a:t>
+            </a:r>
+            <a:r>
+              <a:rPr>
+                <a:solidFill>
+                  <a:srgbClr val="003B4F"/>
+                </a:solidFill>
+                <a:latin typeface="Courier"/>
+              </a:rPr>
+              <a:t>,</a:t>
+            </a:r>
+            <a:br/>
+            <a:r>
+              <a:rPr>
+                <a:solidFill>
+                  <a:srgbClr val="003B4F"/>
+                </a:solidFill>
+                <a:latin typeface="Courier"/>
+              </a:rPr>
+              <a:t>      year</a:t>
+            </a:r>
+            <a:br/>
+            <a:r>
+              <a:rPr>
+                <a:solidFill>
+                  <a:srgbClr val="003B4F"/>
+                </a:solidFill>
+                <a:latin typeface="Courier"/>
+              </a:rPr>
+              <a:t>    ),</a:t>
+            </a:r>
+            <a:br/>
+            <a:r>
+              <a:rPr>
+                <a:solidFill>
+                  <a:srgbClr val="003B4F"/>
+                </a:solidFill>
+                <a:latin typeface="Courier"/>
+              </a:rPr>
+              <a:t>    </a:t>
+            </a:r>
+            <a:r>
+              <a:rPr>
+                <a:solidFill>
+                  <a:srgbClr val="657422"/>
+                </a:solidFill>
+                <a:latin typeface="Courier"/>
+              </a:rPr>
+              <a:t>full_date =</a:t>
+            </a:r>
+            <a:r>
+              <a:rPr>
+                <a:solidFill>
+                  <a:srgbClr val="003B4F"/>
+                </a:solidFill>
+                <a:latin typeface="Courier"/>
+              </a:rPr>
+              <a:t> </a:t>
+            </a:r>
+            <a:r>
+              <a:rPr>
+                <a:solidFill>
+                  <a:srgbClr val="4758AB"/>
+                </a:solidFill>
+                <a:latin typeface="Courier"/>
+              </a:rPr>
+              <a:t>ymd</a:t>
+            </a:r>
+            <a:r>
+              <a:rPr>
+                <a:solidFill>
+                  <a:srgbClr val="003B4F"/>
+                </a:solidFill>
+                <a:latin typeface="Courier"/>
+              </a:rPr>
+              <a:t>(</a:t>
+            </a:r>
+            <a:r>
+              <a:rPr>
+                <a:solidFill>
+                  <a:srgbClr val="4758AB"/>
+                </a:solidFill>
+                <a:latin typeface="Courier"/>
+              </a:rPr>
+              <a:t>paste</a:t>
+            </a:r>
+            <a:r>
+              <a:rPr>
+                <a:solidFill>
+                  <a:srgbClr val="003B4F"/>
+                </a:solidFill>
+                <a:latin typeface="Courier"/>
+              </a:rPr>
+              <a:t>(calendar_year, date, </a:t>
+            </a:r>
+            <a:r>
+              <a:rPr>
+                <a:solidFill>
+                  <a:srgbClr val="657422"/>
+                </a:solidFill>
+                <a:latin typeface="Courier"/>
+              </a:rPr>
+              <a:t>sep =</a:t>
+            </a:r>
+            <a:r>
+              <a:rPr>
+                <a:solidFill>
+                  <a:srgbClr val="003B4F"/>
+                </a:solidFill>
+                <a:latin typeface="Courier"/>
+              </a:rPr>
+              <a:t> </a:t>
+            </a:r>
+            <a:r>
+              <a:rPr>
+                <a:solidFill>
+                  <a:srgbClr val="20794D"/>
+                </a:solidFill>
+                <a:latin typeface="Courier"/>
+              </a:rPr>
+              <a:t>"-"</a:t>
+            </a:r>
+            <a:r>
+              <a:rPr>
+                <a:solidFill>
+                  <a:srgbClr val="003B4F"/>
+                </a:solidFill>
+                <a:latin typeface="Courier"/>
+              </a:rPr>
+              <a:t>)),</a:t>
+            </a:r>
+            <a:br/>
+            <a:r>
+              <a:rPr>
+                <a:solidFill>
+                  <a:srgbClr val="003B4F"/>
+                </a:solidFill>
+                <a:latin typeface="Courier"/>
+              </a:rPr>
+              <a:t>    </a:t>
+            </a:r>
+            <a:r>
+              <a:rPr>
+                <a:solidFill>
+                  <a:srgbClr val="657422"/>
+                </a:solidFill>
+                <a:latin typeface="Courier"/>
+              </a:rPr>
+              <a:t>month =</a:t>
+            </a:r>
+            <a:r>
+              <a:rPr>
+                <a:solidFill>
+                  <a:srgbClr val="003B4F"/>
+                </a:solidFill>
+                <a:latin typeface="Courier"/>
+              </a:rPr>
+              <a:t> </a:t>
+            </a:r>
+            <a:r>
+              <a:rPr>
+                <a:solidFill>
+                  <a:srgbClr val="4758AB"/>
+                </a:solidFill>
+                <a:latin typeface="Courier"/>
+              </a:rPr>
+              <a:t>month</a:t>
+            </a:r>
+            <a:r>
+              <a:rPr>
+                <a:solidFill>
+                  <a:srgbClr val="003B4F"/>
+                </a:solidFill>
+                <a:latin typeface="Courier"/>
+              </a:rPr>
+              <a:t>(full_date, </a:t>
+            </a:r>
+            <a:r>
+              <a:rPr>
+                <a:solidFill>
+                  <a:srgbClr val="657422"/>
+                </a:solidFill>
+                <a:latin typeface="Courier"/>
+              </a:rPr>
+              <a:t>label =</a:t>
+            </a:r>
+            <a:r>
+              <a:rPr>
+                <a:solidFill>
+                  <a:srgbClr val="003B4F"/>
+                </a:solidFill>
+                <a:latin typeface="Courier"/>
+              </a:rPr>
+              <a:t> </a:t>
+            </a:r>
+            <a:r>
+              <a:rPr>
+                <a:solidFill>
+                  <a:srgbClr val="8F5902"/>
+                </a:solidFill>
+                <a:latin typeface="Courier"/>
+              </a:rPr>
+              <a:t>TRUE</a:t>
+            </a:r>
+            <a:r>
+              <a:rPr>
+                <a:solidFill>
+                  <a:srgbClr val="003B4F"/>
+                </a:solidFill>
+                <a:latin typeface="Courier"/>
+              </a:rPr>
+              <a:t>)</a:t>
+            </a:r>
+            <a:br/>
+            <a:r>
+              <a:rPr>
+                <a:solidFill>
+                  <a:srgbClr val="003B4F"/>
+                </a:solidFill>
+                <a:latin typeface="Courier"/>
+              </a:rPr>
+              <a:t>  ) </a:t>
+            </a:r>
+            <a:r>
+              <a:rPr>
+                <a:solidFill>
+                  <a:srgbClr val="5E5E5E"/>
+                </a:solidFill>
+                <a:latin typeface="Courier"/>
+              </a:rPr>
+              <a:t>%&gt;%</a:t>
+            </a:r>
+            <a:br/>
+            <a:r>
+              <a:rPr>
+                <a:solidFill>
+                  <a:srgbClr val="003B4F"/>
+                </a:solidFill>
+                <a:latin typeface="Courier"/>
+              </a:rPr>
+              <a:t>  </a:t>
+            </a:r>
+            <a:r>
+              <a:rPr>
+                <a:solidFill>
+                  <a:srgbClr val="4758AB"/>
+                </a:solidFill>
+                <a:latin typeface="Courier"/>
+              </a:rPr>
+              <a:t>drop_na</a:t>
+            </a:r>
+            <a:r>
+              <a:rPr>
+                <a:solidFill>
+                  <a:srgbClr val="003B4F"/>
+                </a:solidFill>
+                <a:latin typeface="Courier"/>
+              </a:rPr>
+              <a:t>(ice_cover, full_date)</a:t>
+            </a:r>
+            <a:br/>
+            <a:br/>
+            <a:r>
+              <a:rPr>
+                <a:solidFill>
+                  <a:srgbClr val="4758AB"/>
+                </a:solidFill>
+                <a:latin typeface="Courier"/>
+              </a:rPr>
+              <a:t>head</a:t>
+            </a:r>
+            <a:r>
+              <a:rPr>
+                <a:solidFill>
+                  <a:srgbClr val="003B4F"/>
+                </a:solidFill>
+                <a:latin typeface="Courier"/>
+              </a:rPr>
+              <a:t>(ice_clean)</a:t>
+            </a:r>
+          </a:p>
+          <a:p>
+            <a:pPr lvl="0" indent="0">
+              <a:buNone/>
+            </a:pPr>
+            <a:r>
+              <a:rPr>
+                <a:latin typeface="Courier"/>
+              </a:rPr>
+              <a:t># A tibble: 6 × 6
+  date    year ice_cover calendar_year full_date  month
+  &lt;chr&gt;  &lt;dbl&gt;     &lt;dbl&gt;         &lt;dbl&gt; &lt;date&gt;     &lt;ord&gt;
+1 Apr-01  1973       3            1973 1973-04-01 Apr  
+2 Apr-02  1973       2.7          1973 1973-04-02 Apr  
+3 Apr-03  1973       2.4          1973 1973-04-03 Apr  
+4 Apr-04  1973       2            1973 1973-04-04 Apr  
+5 Apr-05  1973       1.7          1973 1973-04-05 Apr  
+6 Apr-06  1973       1.4          1973 1973-04-06 Apr  </a:t>
+            </a:r>
+          </a:p>
+        </p:txBody>
+      </p:sp>
+      <p:sp>
+        <p:nvSpPr>
+          <p:cNvPr id="4" name="Content Placeholder 3"/>
+          <p:cNvSpPr>
+            <a:spLocks noGrp="1"/>
+          </p:cNvSpPr>
+          <p:nvPr>
+            <p:ph idx="2" sz="half"/>
+          </p:nvPr>
+        </p:nvSpPr>
+        <p:spPr/>
+        <p:txBody>
+          <a:bodyPr/>
+          <a:lstStyle/>
+          <a:p>
+            <a:pPr lvl="0" indent="0" marL="0">
+              <a:buNone/>
+            </a:pPr>
+            <a:r>
+              <a:rPr b="1"/>
+              <a:t>Reading the logic:</a:t>
+            </a:r>
+          </a:p>
+          <a:p>
+            <a:pPr lvl="0"/>
+            <a:r>
+              <a:rPr>
+                <a:latin typeface="Courier"/>
+              </a:rPr>
+              <a:t>str_starts(date, "Nov|Dec")</a:t>
+            </a:r>
+            <a:r>
+              <a:rPr/>
+              <a:t> — does this row’s day-of-winter text start with “Nov” or “Dec”?</a:t>
+            </a:r>
+          </a:p>
+          <a:p>
+            <a:pPr lvl="0"/>
+            <a:r>
+              <a:rPr/>
+              <a:t>If yes, subtract 1 from </a:t>
+            </a:r>
+            <a:r>
+              <a:rPr>
+                <a:latin typeface="Courier"/>
+              </a:rPr>
+              <a:t>year</a:t>
+            </a:r>
+            <a:r>
+              <a:rPr/>
+              <a:t> to get the real calendar year</a:t>
+            </a:r>
+          </a:p>
+          <a:p>
+            <a:pPr lvl="0"/>
+            <a:r>
+              <a:rPr>
+                <a:latin typeface="Courier"/>
+              </a:rPr>
+              <a:t>ymd()</a:t>
+            </a:r>
+            <a:r>
+              <a:rPr/>
+              <a:t> (from </a:t>
+            </a:r>
+            <a:r>
+              <a:rPr>
+                <a:latin typeface="Courier"/>
+              </a:rPr>
+              <a:t>lubridate</a:t>
+            </a:r>
+            <a:r>
+              <a:rPr/>
+              <a:t>) glues the pieces into one real R </a:t>
+            </a:r>
+            <a:r>
+              <a:rPr>
+                <a:latin typeface="Courier"/>
+              </a:rPr>
+              <a:t>Date</a:t>
+            </a:r>
+          </a:p>
+          <a:p>
+            <a:pPr lvl="0"/>
+            <a:r>
+              <a:rPr>
+                <a:latin typeface="Courier"/>
+              </a:rPr>
+              <a:t>drop_na()</a:t>
+            </a:r>
+            <a:r>
+              <a:rPr/>
+              <a:t> removes rows with no real date or no ice reading</a:t>
+            </a:r>
+          </a:p>
+          <a:p>
+            <a:pPr lvl="0" indent="0" marL="0">
+              <a:buNone/>
+            </a:pPr>
+            <a:r>
+              <a:rPr/>
+              <a:t>📖 R4DS Ch. 17 — working with dates and times</a:t>
+            </a:r>
+          </a:p>
+        </p:txBody>
+      </p:sp>
+    </p:spTree>
+  </p:cSld>
+</p:sld>
+</file>
+
+<file path=ppt/slides/slide15.xml><?xml version="1.0" encoding="utf-8"?>
+<p:sld xmlns:a="http://schemas.openxmlformats.org/drawingml/2006/main" xmlns:r="http://schemas.openxmlformats.org/officeDocument/2006/relationships" xmlns:p="http://schemas.openxmlformats.org/presentationml/2006/main">
+  <p:cSld>
+    <p:spTree>
+      <p:nvGrpSpPr>
+        <p:cNvPr id="1" name=""/>
+        <p:cNvGrpSpPr/>
+        <p:nvPr/>
+      </p:nvGrpSpPr>
+      <p:grpSpPr>
+        <a:xfrm>
+          <a:off x="0" y="0"/>
+          <a:ext cx="0" cy="0"/>
+          <a:chOff x="0" y="0"/>
+          <a:chExt cx="0" cy="0"/>
+        </a:xfrm>
+      </p:grpSpPr>
+      <p:sp>
+        <p:nvSpPr>
+          <p:cNvPr id="2" name="Title 1"/>
+          <p:cNvSpPr>
+            <a:spLocks noGrp="1"/>
+          </p:cNvSpPr>
+          <p:nvPr>
+            <p:ph type="title"/>
+          </p:nvPr>
+        </p:nvSpPr>
+        <p:spPr>
+          <a:xfrm>
+            <a:off x="0" y="0"/>
+            <a:ext cx="9144000" cy="582780"/>
+          </a:xfrm>
+        </p:spPr>
+        <p:txBody>
+          <a:bodyPr/>
+          <a:lstStyle/>
+          <a:p>
+            <a:pPr lvl="0" indent="0" marL="0">
+              <a:buNone/>
+            </a:pPr>
+            <a:r>
+              <a:rPr/>
+              <a:t>🛑 Pause — Do Activity Parts 3–4 Now</a:t>
+            </a:r>
+          </a:p>
+        </p:txBody>
+      </p:sp>
+      <p:sp>
+        <p:nvSpPr>
+          <p:cNvPr id="3" name="Content Placeholder 2"/>
+          <p:cNvSpPr>
+            <a:spLocks noGrp="1"/>
+          </p:cNvSpPr>
+          <p:nvPr>
+            <p:ph idx="1"/>
+          </p:nvPr>
+        </p:nvSpPr>
+        <p:spPr/>
+        <p:txBody>
+          <a:bodyPr/>
+          <a:lstStyle/>
+          <a:p>
+            <a:pPr lvl="0" indent="0" marL="0">
+              <a:buNone/>
+            </a:pPr>
+            <a:r>
+              <a:rPr/>
+              <a:t>Pivot the data long with </a:t>
+            </a:r>
+            <a:r>
+              <a:rPr>
+                <a:latin typeface="Courier"/>
+              </a:rPr>
+              <a:t>pivot_longer()</a:t>
+            </a:r>
+            <a:r>
+              <a:rPr/>
+              <a:t>, then fix the winters that cross the new year with </a:t>
+            </a:r>
+            <a:r>
+              <a:rPr>
+                <a:latin typeface="Courier"/>
+              </a:rPr>
+              <a:t>if_else()</a:t>
+            </a:r>
+            <a:r>
+              <a:rPr/>
+              <a:t> + </a:t>
+            </a:r>
+            <a:r>
+              <a:rPr>
+                <a:latin typeface="Courier"/>
+              </a:rPr>
+              <a:t>ymd()</a:t>
+            </a:r>
+            <a:r>
+              <a:rPr/>
+              <a:t>. Predict the new shape before you run it.</a:t>
+            </a:r>
+          </a:p>
+        </p:txBody>
+      </p:sp>
+    </p:spTree>
+  </p:cSld>
+</p:sld>
+</file>
+
 <file path=ppt/slides/slide16.xml><?xml version="1.0" encoding="utf-8"?>
 <p:sld xmlns:a="http://schemas.openxmlformats.org/drawingml/2006/main" xmlns:r="http://schemas.openxmlformats.org/officeDocument/2006/relationships" xmlns:p="http://schemas.openxmlformats.org/presentationml/2006/main">
   <p:cSld>
@@ -5367,11 +5722,8 @@
         <p:spPr>
           <a:xfrm>
             <a:off x="0" y="0"/>
-            <a:ext cx="9144000" cy="602780"/>
+            <a:ext cx="9144000" cy="582780"/>
           </a:xfrm>
-          <a:solidFill>
-            <a:srgbClr val="1A1A2E"/>
-          </a:solidFill>
         </p:spPr>
         <p:txBody>
           <a:bodyPr/>
@@ -5382,7 +5734,7 @@
             </a:pPr>
             <a:r>
               <a:rPr/>
-              <a:t>A Tricky Real-World Wrinkle: Winters Cross the New Year</a:t>
+              <a:t>🧩 Chunk 3 of 4 · Summarize &amp; Pivot Back Wider</a:t>
             </a:r>
           </a:p>
         </p:txBody>
@@ -5394,7 +5746,7 @@
             <a:spLocks noGrp="1"/>
           </p:cNvSpPr>
           <p:nvPr>
-            <p:ph idx="1" sz="half"/>
+            <p:ph idx="1"/>
           </p:nvPr>
         </p:nvSpPr>
         <p:spPr/>
@@ -5407,694 +5759,53 @@
             </a:pPr>
             <a:r>
               <a:rPr b="1"/>
-              <a:t>The problem:</a:t>
-            </a:r>
-            <a:r>
-              <a:rPr/>
-              <a:t> a season runs </a:t>
-            </a:r>
-            <a:r>
-              <a:rPr b="1"/>
-              <a:t>Nov → May</a:t>
-            </a:r>
-            <a:r>
-              <a:rPr/>
-              <a:t>, but NOAA labels it by the year winter </a:t>
-            </a:r>
-            <a:r>
-              <a:rPr b="1"/>
-              <a:t>ends</a:t>
-            </a:r>
-            <a:r>
-              <a:rPr/>
-              <a:t> in — so </a:t>
-            </a:r>
-            <a:r>
-              <a:rPr>
-                <a:latin typeface="Courier"/>
-              </a:rPr>
-              <a:t>Nov-10</a:t>
-            </a:r>
-            <a:r>
-              <a:rPr/>
-              <a:t> under </a:t>
-            </a:r>
-            <a:r>
-              <a:rPr>
-                <a:latin typeface="Courier"/>
-              </a:rPr>
-              <a:t>1974</a:t>
-            </a:r>
-            <a:r>
-              <a:rPr/>
-              <a:t> really happened in </a:t>
-            </a:r>
-            <a:r>
-              <a:rPr b="1"/>
-              <a:t>November 1973</a:t>
-            </a:r>
-            <a:r>
-              <a:rPr/>
-              <a:t>.</a:t>
-            </a:r>
-          </a:p>
-          <a:p>
-            <a:pPr lvl="0" indent="0">
+              <a:t>We will cover:</a:t>
+            </a:r>
+            <a:r>
+              <a:rPr/>
+              <a:t> </a:t>
+            </a:r>
+            <a:r>
+              <a:rPr>
+                <a:latin typeface="Courier"/>
+              </a:rPr>
+              <a:t>group_by() %&gt;% summarize()</a:t>
+            </a:r>
+            <a:r>
+              <a:rPr/>
+              <a:t> on the newly-tidy data, and </a:t>
+            </a:r>
+            <a:r>
+              <a:rPr>
+                <a:latin typeface="Courier"/>
+              </a:rPr>
+              <a:t>pivot_wider()</a:t>
+            </a:r>
+            <a:r>
+              <a:rPr/>
+              <a:t> to build a readable year-by-month table.</a:t>
+            </a:r>
+          </a:p>
+          <a:p>
+            <a:pPr lvl="0" indent="0" marL="1270000">
               <a:buNone/>
             </a:pPr>
             <a:r>
-              <a:rPr>
-                <a:solidFill>
-                  <a:srgbClr val="5E5E5E"/>
-                </a:solidFill>
-                <a:latin typeface="Courier"/>
-              </a:rPr>
-              <a:t># Assign Nov/Dec to the PREVIOUS calendar year ----------</a:t>
-            </a:r>
-            <a:br/>
-            <a:r>
-              <a:rPr>
-                <a:solidFill>
-                  <a:srgbClr val="003B4F"/>
-                </a:solidFill>
-                <a:latin typeface="Courier"/>
-              </a:rPr>
-              <a:t>ice_clean &lt;- ice_long </a:t>
-            </a:r>
-            <a:r>
-              <a:rPr>
-                <a:solidFill>
-                  <a:srgbClr val="5E5E5E"/>
-                </a:solidFill>
-                <a:latin typeface="Courier"/>
-              </a:rPr>
-              <a:t>%&gt;%</a:t>
-            </a:r>
-            <a:br/>
-            <a:r>
-              <a:rPr>
-                <a:solidFill>
-                  <a:srgbClr val="003B4F"/>
-                </a:solidFill>
-                <a:latin typeface="Courier"/>
-              </a:rPr>
-              <a:t>  </a:t>
-            </a:r>
-            <a:r>
-              <a:rPr>
-                <a:solidFill>
-                  <a:srgbClr val="4758AB"/>
-                </a:solidFill>
-                <a:latin typeface="Courier"/>
-              </a:rPr>
-              <a:t>mutate</a:t>
-            </a:r>
-            <a:r>
-              <a:rPr>
-                <a:solidFill>
-                  <a:srgbClr val="003B4F"/>
-                </a:solidFill>
-                <a:latin typeface="Courier"/>
-              </a:rPr>
-              <a:t>(</a:t>
-            </a:r>
-            <a:br/>
-            <a:r>
-              <a:rPr>
-                <a:solidFill>
-                  <a:srgbClr val="003B4F"/>
-                </a:solidFill>
-                <a:latin typeface="Courier"/>
-              </a:rPr>
-              <a:t>    </a:t>
-            </a:r>
-            <a:r>
-              <a:rPr>
-                <a:solidFill>
-                  <a:srgbClr val="657422"/>
-                </a:solidFill>
-                <a:latin typeface="Courier"/>
-              </a:rPr>
-              <a:t>year =</a:t>
-            </a:r>
-            <a:r>
-              <a:rPr>
-                <a:solidFill>
-                  <a:srgbClr val="003B4F"/>
-                </a:solidFill>
-                <a:latin typeface="Courier"/>
-              </a:rPr>
-              <a:t> </a:t>
-            </a:r>
-            <a:r>
-              <a:rPr>
-                <a:solidFill>
-                  <a:srgbClr val="4758AB"/>
-                </a:solidFill>
-                <a:latin typeface="Courier"/>
-              </a:rPr>
-              <a:t>as.numeric</a:t>
-            </a:r>
-            <a:r>
-              <a:rPr>
-                <a:solidFill>
-                  <a:srgbClr val="003B4F"/>
-                </a:solidFill>
-                <a:latin typeface="Courier"/>
-              </a:rPr>
-              <a:t>(year),</a:t>
-            </a:r>
-            <a:br/>
-            <a:r>
-              <a:rPr>
-                <a:solidFill>
-                  <a:srgbClr val="003B4F"/>
-                </a:solidFill>
-                <a:latin typeface="Courier"/>
-              </a:rPr>
-              <a:t>    </a:t>
-            </a:r>
-            <a:r>
-              <a:rPr>
-                <a:solidFill>
-                  <a:srgbClr val="657422"/>
-                </a:solidFill>
-                <a:latin typeface="Courier"/>
-              </a:rPr>
-              <a:t>calendar_year =</a:t>
-            </a:r>
-            <a:r>
-              <a:rPr>
-                <a:solidFill>
-                  <a:srgbClr val="003B4F"/>
-                </a:solidFill>
-                <a:latin typeface="Courier"/>
-              </a:rPr>
-              <a:t> </a:t>
-            </a:r>
-            <a:r>
-              <a:rPr>
-                <a:solidFill>
-                  <a:srgbClr val="4758AB"/>
-                </a:solidFill>
-                <a:latin typeface="Courier"/>
-              </a:rPr>
-              <a:t>if_else</a:t>
-            </a:r>
-            <a:r>
-              <a:rPr>
-                <a:solidFill>
-                  <a:srgbClr val="003B4F"/>
-                </a:solidFill>
-                <a:latin typeface="Courier"/>
-              </a:rPr>
-              <a:t>(</a:t>
-            </a:r>
-            <a:br/>
-            <a:r>
-              <a:rPr>
-                <a:solidFill>
-                  <a:srgbClr val="003B4F"/>
-                </a:solidFill>
-                <a:latin typeface="Courier"/>
-              </a:rPr>
-              <a:t>      </a:t>
-            </a:r>
-            <a:r>
-              <a:rPr>
-                <a:solidFill>
-                  <a:srgbClr val="4758AB"/>
-                </a:solidFill>
-                <a:latin typeface="Courier"/>
-              </a:rPr>
-              <a:t>str_starts</a:t>
-            </a:r>
-            <a:r>
-              <a:rPr>
-                <a:solidFill>
-                  <a:srgbClr val="003B4F"/>
-                </a:solidFill>
-                <a:latin typeface="Courier"/>
-              </a:rPr>
-              <a:t>(date, </a:t>
-            </a:r>
-            <a:r>
-              <a:rPr>
-                <a:solidFill>
-                  <a:srgbClr val="20794D"/>
-                </a:solidFill>
-                <a:latin typeface="Courier"/>
-              </a:rPr>
-              <a:t>"Nov|Dec"</a:t>
-            </a:r>
-            <a:r>
-              <a:rPr>
-                <a:solidFill>
-                  <a:srgbClr val="003B4F"/>
-                </a:solidFill>
-                <a:latin typeface="Courier"/>
-              </a:rPr>
-              <a:t>),</a:t>
-            </a:r>
-            <a:br/>
-            <a:r>
-              <a:rPr>
-                <a:solidFill>
-                  <a:srgbClr val="003B4F"/>
-                </a:solidFill>
-                <a:latin typeface="Courier"/>
-              </a:rPr>
-              <a:t>      year </a:t>
-            </a:r>
-            <a:r>
-              <a:rPr>
-                <a:solidFill>
-                  <a:srgbClr val="5E5E5E"/>
-                </a:solidFill>
-                <a:latin typeface="Courier"/>
-              </a:rPr>
-              <a:t>-</a:t>
-            </a:r>
-            <a:r>
-              <a:rPr>
-                <a:solidFill>
-                  <a:srgbClr val="003B4F"/>
-                </a:solidFill>
-                <a:latin typeface="Courier"/>
-              </a:rPr>
-              <a:t> </a:t>
-            </a:r>
-            <a:r>
-              <a:rPr>
-                <a:solidFill>
-                  <a:srgbClr val="AD0000"/>
-                </a:solidFill>
-                <a:latin typeface="Courier"/>
-              </a:rPr>
-              <a:t>1</a:t>
-            </a:r>
-            <a:r>
-              <a:rPr>
-                <a:solidFill>
-                  <a:srgbClr val="003B4F"/>
-                </a:solidFill>
-                <a:latin typeface="Courier"/>
-              </a:rPr>
-              <a:t>,</a:t>
-            </a:r>
-            <a:br/>
-            <a:r>
-              <a:rPr>
-                <a:solidFill>
-                  <a:srgbClr val="003B4F"/>
-                </a:solidFill>
-                <a:latin typeface="Courier"/>
-              </a:rPr>
-              <a:t>      year</a:t>
-            </a:r>
-            <a:br/>
-            <a:r>
-              <a:rPr>
-                <a:solidFill>
-                  <a:srgbClr val="003B4F"/>
-                </a:solidFill>
-                <a:latin typeface="Courier"/>
-              </a:rPr>
-              <a:t>    ),</a:t>
-            </a:r>
-            <a:br/>
-            <a:r>
-              <a:rPr>
-                <a:solidFill>
-                  <a:srgbClr val="003B4F"/>
-                </a:solidFill>
-                <a:latin typeface="Courier"/>
-              </a:rPr>
-              <a:t>    </a:t>
-            </a:r>
-            <a:r>
-              <a:rPr>
-                <a:solidFill>
-                  <a:srgbClr val="657422"/>
-                </a:solidFill>
-                <a:latin typeface="Courier"/>
-              </a:rPr>
-              <a:t>full_date =</a:t>
-            </a:r>
-            <a:r>
-              <a:rPr>
-                <a:solidFill>
-                  <a:srgbClr val="003B4F"/>
-                </a:solidFill>
-                <a:latin typeface="Courier"/>
-              </a:rPr>
-              <a:t> </a:t>
-            </a:r>
-            <a:r>
-              <a:rPr>
-                <a:solidFill>
-                  <a:srgbClr val="4758AB"/>
-                </a:solidFill>
-                <a:latin typeface="Courier"/>
-              </a:rPr>
-              <a:t>ymd</a:t>
-            </a:r>
-            <a:r>
-              <a:rPr>
-                <a:solidFill>
-                  <a:srgbClr val="003B4F"/>
-                </a:solidFill>
-                <a:latin typeface="Courier"/>
-              </a:rPr>
-              <a:t>(</a:t>
-            </a:r>
-            <a:r>
-              <a:rPr>
-                <a:solidFill>
-                  <a:srgbClr val="4758AB"/>
-                </a:solidFill>
-                <a:latin typeface="Courier"/>
-              </a:rPr>
-              <a:t>paste</a:t>
-            </a:r>
-            <a:r>
-              <a:rPr>
-                <a:solidFill>
-                  <a:srgbClr val="003B4F"/>
-                </a:solidFill>
-                <a:latin typeface="Courier"/>
-              </a:rPr>
-              <a:t>(calendar_year, date, </a:t>
-            </a:r>
-            <a:r>
-              <a:rPr>
-                <a:solidFill>
-                  <a:srgbClr val="657422"/>
-                </a:solidFill>
-                <a:latin typeface="Courier"/>
-              </a:rPr>
-              <a:t>sep =</a:t>
-            </a:r>
-            <a:r>
-              <a:rPr>
-                <a:solidFill>
-                  <a:srgbClr val="003B4F"/>
-                </a:solidFill>
-                <a:latin typeface="Courier"/>
-              </a:rPr>
-              <a:t> </a:t>
-            </a:r>
-            <a:r>
-              <a:rPr>
-                <a:solidFill>
-                  <a:srgbClr val="20794D"/>
-                </a:solidFill>
-                <a:latin typeface="Courier"/>
-              </a:rPr>
-              <a:t>"-"</a:t>
-            </a:r>
-            <a:r>
-              <a:rPr>
-                <a:solidFill>
-                  <a:srgbClr val="003B4F"/>
-                </a:solidFill>
-                <a:latin typeface="Courier"/>
-              </a:rPr>
-              <a:t>)),</a:t>
-            </a:r>
-            <a:br/>
-            <a:r>
-              <a:rPr>
-                <a:solidFill>
-                  <a:srgbClr val="003B4F"/>
-                </a:solidFill>
-                <a:latin typeface="Courier"/>
-              </a:rPr>
-              <a:t>    </a:t>
-            </a:r>
-            <a:r>
-              <a:rPr>
-                <a:solidFill>
-                  <a:srgbClr val="657422"/>
-                </a:solidFill>
-                <a:latin typeface="Courier"/>
-              </a:rPr>
-              <a:t>month =</a:t>
-            </a:r>
-            <a:r>
-              <a:rPr>
-                <a:solidFill>
-                  <a:srgbClr val="003B4F"/>
-                </a:solidFill>
-                <a:latin typeface="Courier"/>
-              </a:rPr>
-              <a:t> </a:t>
-            </a:r>
-            <a:r>
-              <a:rPr>
-                <a:solidFill>
-                  <a:srgbClr val="4758AB"/>
-                </a:solidFill>
-                <a:latin typeface="Courier"/>
-              </a:rPr>
-              <a:t>month</a:t>
-            </a:r>
-            <a:r>
-              <a:rPr>
-                <a:solidFill>
-                  <a:srgbClr val="003B4F"/>
-                </a:solidFill>
-                <a:latin typeface="Courier"/>
-              </a:rPr>
-              <a:t>(full_date, </a:t>
-            </a:r>
-            <a:r>
-              <a:rPr>
-                <a:solidFill>
-                  <a:srgbClr val="657422"/>
-                </a:solidFill>
-                <a:latin typeface="Courier"/>
-              </a:rPr>
-              <a:t>label =</a:t>
-            </a:r>
-            <a:r>
-              <a:rPr>
-                <a:solidFill>
-                  <a:srgbClr val="003B4F"/>
-                </a:solidFill>
-                <a:latin typeface="Courier"/>
-              </a:rPr>
-              <a:t> </a:t>
-            </a:r>
-            <a:r>
-              <a:rPr>
-                <a:solidFill>
-                  <a:srgbClr val="8F5902"/>
-                </a:solidFill>
-                <a:latin typeface="Courier"/>
-              </a:rPr>
-              <a:t>TRUE</a:t>
-            </a:r>
-            <a:r>
-              <a:rPr>
-                <a:solidFill>
-                  <a:srgbClr val="003B4F"/>
-                </a:solidFill>
-                <a:latin typeface="Courier"/>
-              </a:rPr>
-              <a:t>)</a:t>
-            </a:r>
-            <a:br/>
-            <a:r>
-              <a:rPr>
-                <a:solidFill>
-                  <a:srgbClr val="003B4F"/>
-                </a:solidFill>
-                <a:latin typeface="Courier"/>
-              </a:rPr>
-              <a:t>  ) </a:t>
-            </a:r>
-            <a:r>
-              <a:rPr>
-                <a:solidFill>
-                  <a:srgbClr val="5E5E5E"/>
-                </a:solidFill>
-                <a:latin typeface="Courier"/>
-              </a:rPr>
-              <a:t>%&gt;%</a:t>
-            </a:r>
-            <a:br/>
-            <a:r>
-              <a:rPr>
-                <a:solidFill>
-                  <a:srgbClr val="003B4F"/>
-                </a:solidFill>
-                <a:latin typeface="Courier"/>
-              </a:rPr>
-              <a:t>  </a:t>
-            </a:r>
-            <a:r>
-              <a:rPr>
-                <a:solidFill>
-                  <a:srgbClr val="4758AB"/>
-                </a:solidFill>
-                <a:latin typeface="Courier"/>
-              </a:rPr>
-              <a:t>drop_na</a:t>
-            </a:r>
-            <a:r>
-              <a:rPr>
-                <a:solidFill>
-                  <a:srgbClr val="003B4F"/>
-                </a:solidFill>
-                <a:latin typeface="Courier"/>
-              </a:rPr>
-              <a:t>(ice_cover, full_date)</a:t>
-            </a:r>
-            <a:br/>
-            <a:br/>
-            <a:r>
-              <a:rPr>
-                <a:solidFill>
-                  <a:srgbClr val="4758AB"/>
-                </a:solidFill>
-                <a:latin typeface="Courier"/>
-              </a:rPr>
-              <a:t>head</a:t>
-            </a:r>
-            <a:r>
-              <a:rPr>
-                <a:solidFill>
-                  <a:srgbClr val="003B4F"/>
-                </a:solidFill>
-                <a:latin typeface="Courier"/>
-              </a:rPr>
-              <a:t>(ice_clean)</a:t>
-            </a:r>
-          </a:p>
-          <a:p>
-            <a:pPr lvl="0" indent="0">
+              <a:rPr sz="2000" b="1"/>
+              <a:t>Tip</a:t>
+            </a:r>
+          </a:p>
+          <a:p>
+            <a:pPr lvl="0" indent="0" marL="1270000">
               <a:buNone/>
             </a:pPr>
             <a:r>
-              <a:rPr>
-                <a:latin typeface="Courier"/>
-              </a:rPr>
-              <a:t># A tibble: 6 × 6
-  date    year ice_cover calendar_year full_date  month
-  &lt;chr&gt;  &lt;dbl&gt;     &lt;dbl&gt;         &lt;dbl&gt; &lt;date&gt;     &lt;ord&gt;
-1 Apr-01  1973       3            1973 1973-04-01 Apr  
-2 Apr-02  1973       2.7          1973 1973-04-02 Apr  
-3 Apr-03  1973       2.4          1973 1973-04-03 Apr  
-4 Apr-04  1973       2            1973 1973-04-04 Apr  
-5 Apr-05  1973       1.7          1973 1973-04-05 Apr  
-6 Apr-06  1973       1.4          1973 1973-04-06 Apr  </a:t>
-            </a:r>
-          </a:p>
-        </p:txBody>
-      </p:sp>
-      <p:sp>
-        <p:nvSpPr>
-          <p:cNvPr id="4" name="Content Placeholder 3"/>
-          <p:cNvSpPr>
-            <a:spLocks noGrp="1"/>
-          </p:cNvSpPr>
-          <p:nvPr>
-            <p:ph idx="2" sz="half"/>
-          </p:nvPr>
-        </p:nvSpPr>
-        <p:spPr/>
-        <p:txBody>
-          <a:bodyPr/>
-          <a:lstStyle/>
-          <a:p>
-            <a:pPr lvl="0" indent="0" marL="0">
-              <a:buNone/>
-            </a:pPr>
-            <a:r>
-              <a:rPr b="1"/>
-              <a:t>Reading the logic:</a:t>
-            </a:r>
-          </a:p>
-          <a:p>
-            <a:pPr lvl="0"/>
-            <a:r>
-              <a:rPr>
-                <a:latin typeface="Courier"/>
-              </a:rPr>
-              <a:t>str_starts(date, "Nov|Dec")</a:t>
-            </a:r>
-            <a:r>
-              <a:rPr/>
-              <a:t> — does this row’s day-of-winter text start with “Nov” or “Dec”?</a:t>
-            </a:r>
-          </a:p>
-          <a:p>
-            <a:pPr lvl="0"/>
-            <a:r>
-              <a:rPr/>
-              <a:t>If yes, subtract 1 from </a:t>
-            </a:r>
-            <a:r>
-              <a:rPr>
-                <a:latin typeface="Courier"/>
-              </a:rPr>
-              <a:t>year</a:t>
-            </a:r>
-            <a:r>
-              <a:rPr/>
-              <a:t> to get the real calendar year</a:t>
-            </a:r>
-          </a:p>
-          <a:p>
-            <a:pPr lvl="0"/>
-            <a:r>
-              <a:rPr>
-                <a:latin typeface="Courier"/>
-              </a:rPr>
-              <a:t>ymd()</a:t>
-            </a:r>
-            <a:r>
-              <a:rPr/>
-              <a:t> (from </a:t>
-            </a:r>
-            <a:r>
-              <a:rPr>
-                <a:latin typeface="Courier"/>
-              </a:rPr>
-              <a:t>lubridate</a:t>
-            </a:r>
-            <a:r>
-              <a:rPr/>
-              <a:t>) glues the pieces into one real R </a:t>
-            </a:r>
-            <a:r>
-              <a:rPr>
-                <a:latin typeface="Courier"/>
-              </a:rPr>
-              <a:t>Date</a:t>
-            </a:r>
-          </a:p>
-          <a:p>
-            <a:pPr lvl="0"/>
-            <a:r>
-              <a:rPr>
-                <a:latin typeface="Courier"/>
-              </a:rPr>
-              <a:t>drop_na()</a:t>
-            </a:r>
-            <a:r>
-              <a:rPr/>
-              <a:t> removes rows with no real date or no ice reading</a:t>
-            </a:r>
-          </a:p>
-          <a:p>
-            <a:pPr lvl="0" indent="0" marL="0">
-              <a:buNone/>
-            </a:pPr>
-            <a:r>
-              <a:rPr/>
-              <a:t>📖 R4DS Ch. 17 — working with dates and times</a:t>
+              <a:rPr sz="2000" b="1"/>
+              <a:t>🖐 After this chunk: Activity Parts 5–6</a:t>
+            </a:r>
+            <a:r>
+              <a:rPr sz="2000"/>
+              <a:t> (summarize by month, then make a pivot table).</a:t>
             </a:r>
           </a:p>
         </p:txBody>
@@ -6134,8 +5845,11 @@
         <p:spPr>
           <a:xfrm>
             <a:off x="0" y="0"/>
-            <a:ext cx="9144000" cy="582780"/>
+            <a:ext cx="9144000" cy="602780"/>
           </a:xfrm>
+          <a:solidFill>
+            <a:srgbClr val="1A1A2E"/>
+          </a:solidFill>
         </p:spPr>
         <p:txBody>
           <a:bodyPr/>
@@ -6146,7 +5860,7 @@
             </a:pPr>
             <a:r>
               <a:rPr/>
-              <a:t>🛑 Pause — Do Activity Parts 3–4 Now</a:t>
+              <a:t>Summarize Now That We’re Long</a:t>
             </a:r>
           </a:p>
         </p:txBody>
@@ -6158,7 +5872,7 @@
             <a:spLocks noGrp="1"/>
           </p:cNvSpPr>
           <p:nvPr>
-            <p:ph idx="1"/>
+            <p:ph idx="1" sz="half"/>
           </p:nvPr>
         </p:nvSpPr>
         <p:spPr/>
@@ -6166,42 +5880,519 @@
           <a:bodyPr/>
           <a:lstStyle/>
           <a:p>
+            <a:pPr lvl="0" indent="0">
+              <a:buNone/>
+            </a:pPr>
+            <a:r>
+              <a:rPr>
+                <a:solidFill>
+                  <a:srgbClr val="5E5E5E"/>
+                </a:solidFill>
+                <a:latin typeface="Courier"/>
+              </a:rPr>
+              <a:t># Mean ice cover per year-month --------------------------</a:t>
+            </a:r>
+            <a:br/>
+            <a:r>
+              <a:rPr>
+                <a:solidFill>
+                  <a:srgbClr val="003B4F"/>
+                </a:solidFill>
+                <a:latin typeface="Courier"/>
+              </a:rPr>
+              <a:t>monthly_avg &lt;- ice_clean </a:t>
+            </a:r>
+            <a:r>
+              <a:rPr>
+                <a:solidFill>
+                  <a:srgbClr val="5E5E5E"/>
+                </a:solidFill>
+                <a:latin typeface="Courier"/>
+              </a:rPr>
+              <a:t>%&gt;%</a:t>
+            </a:r>
+            <a:br/>
+            <a:r>
+              <a:rPr>
+                <a:solidFill>
+                  <a:srgbClr val="003B4F"/>
+                </a:solidFill>
+                <a:latin typeface="Courier"/>
+              </a:rPr>
+              <a:t>  </a:t>
+            </a:r>
+            <a:r>
+              <a:rPr>
+                <a:solidFill>
+                  <a:srgbClr val="4758AB"/>
+                </a:solidFill>
+                <a:latin typeface="Courier"/>
+              </a:rPr>
+              <a:t>group_by</a:t>
+            </a:r>
+            <a:r>
+              <a:rPr>
+                <a:solidFill>
+                  <a:srgbClr val="003B4F"/>
+                </a:solidFill>
+                <a:latin typeface="Courier"/>
+              </a:rPr>
+              <a:t>(year, month) </a:t>
+            </a:r>
+            <a:r>
+              <a:rPr>
+                <a:solidFill>
+                  <a:srgbClr val="5E5E5E"/>
+                </a:solidFill>
+                <a:latin typeface="Courier"/>
+              </a:rPr>
+              <a:t>%&gt;%</a:t>
+            </a:r>
+            <a:br/>
+            <a:r>
+              <a:rPr>
+                <a:solidFill>
+                  <a:srgbClr val="003B4F"/>
+                </a:solidFill>
+                <a:latin typeface="Courier"/>
+              </a:rPr>
+              <a:t>  </a:t>
+            </a:r>
+            <a:r>
+              <a:rPr>
+                <a:solidFill>
+                  <a:srgbClr val="4758AB"/>
+                </a:solidFill>
+                <a:latin typeface="Courier"/>
+              </a:rPr>
+              <a:t>summarize</a:t>
+            </a:r>
+            <a:r>
+              <a:rPr>
+                <a:solidFill>
+                  <a:srgbClr val="003B4F"/>
+                </a:solidFill>
+                <a:latin typeface="Courier"/>
+              </a:rPr>
+              <a:t>(</a:t>
+            </a:r>
+            <a:br/>
+            <a:r>
+              <a:rPr>
+                <a:solidFill>
+                  <a:srgbClr val="003B4F"/>
+                </a:solidFill>
+                <a:latin typeface="Courier"/>
+              </a:rPr>
+              <a:t>    </a:t>
+            </a:r>
+            <a:r>
+              <a:rPr>
+                <a:solidFill>
+                  <a:srgbClr val="657422"/>
+                </a:solidFill>
+                <a:latin typeface="Courier"/>
+              </a:rPr>
+              <a:t>mean_ice =</a:t>
+            </a:r>
+            <a:r>
+              <a:rPr>
+                <a:solidFill>
+                  <a:srgbClr val="003B4F"/>
+                </a:solidFill>
+                <a:latin typeface="Courier"/>
+              </a:rPr>
+              <a:t> </a:t>
+            </a:r>
+            <a:r>
+              <a:rPr>
+                <a:solidFill>
+                  <a:srgbClr val="4758AB"/>
+                </a:solidFill>
+                <a:latin typeface="Courier"/>
+              </a:rPr>
+              <a:t>mean</a:t>
+            </a:r>
+            <a:r>
+              <a:rPr>
+                <a:solidFill>
+                  <a:srgbClr val="003B4F"/>
+                </a:solidFill>
+                <a:latin typeface="Courier"/>
+              </a:rPr>
+              <a:t>(ice_cover, </a:t>
+            </a:r>
+            <a:r>
+              <a:rPr>
+                <a:solidFill>
+                  <a:srgbClr val="657422"/>
+                </a:solidFill>
+                <a:latin typeface="Courier"/>
+              </a:rPr>
+              <a:t>na.rm =</a:t>
+            </a:r>
+            <a:r>
+              <a:rPr>
+                <a:solidFill>
+                  <a:srgbClr val="003B4F"/>
+                </a:solidFill>
+                <a:latin typeface="Courier"/>
+              </a:rPr>
+              <a:t> </a:t>
+            </a:r>
+            <a:r>
+              <a:rPr>
+                <a:solidFill>
+                  <a:srgbClr val="8F5902"/>
+                </a:solidFill>
+                <a:latin typeface="Courier"/>
+              </a:rPr>
+              <a:t>TRUE</a:t>
+            </a:r>
+            <a:r>
+              <a:rPr>
+                <a:solidFill>
+                  <a:srgbClr val="003B4F"/>
+                </a:solidFill>
+                <a:latin typeface="Courier"/>
+              </a:rPr>
+              <a:t>),</a:t>
+            </a:r>
+            <a:br/>
+            <a:r>
+              <a:rPr>
+                <a:solidFill>
+                  <a:srgbClr val="003B4F"/>
+                </a:solidFill>
+                <a:latin typeface="Courier"/>
+              </a:rPr>
+              <a:t>    </a:t>
+            </a:r>
+            <a:r>
+              <a:rPr>
+                <a:solidFill>
+                  <a:srgbClr val="657422"/>
+                </a:solidFill>
+                <a:latin typeface="Courier"/>
+              </a:rPr>
+              <a:t>.groups =</a:t>
+            </a:r>
+            <a:r>
+              <a:rPr>
+                <a:solidFill>
+                  <a:srgbClr val="003B4F"/>
+                </a:solidFill>
+                <a:latin typeface="Courier"/>
+              </a:rPr>
+              <a:t> </a:t>
+            </a:r>
+            <a:r>
+              <a:rPr>
+                <a:solidFill>
+                  <a:srgbClr val="20794D"/>
+                </a:solidFill>
+                <a:latin typeface="Courier"/>
+              </a:rPr>
+              <a:t>"drop"</a:t>
+            </a:r>
+            <a:br/>
+            <a:r>
+              <a:rPr>
+                <a:solidFill>
+                  <a:srgbClr val="003B4F"/>
+                </a:solidFill>
+                <a:latin typeface="Courier"/>
+              </a:rPr>
+              <a:t>  )</a:t>
+            </a:r>
+            <a:br/>
+            <a:br/>
+            <a:r>
+              <a:rPr>
+                <a:solidFill>
+                  <a:srgbClr val="003B4F"/>
+                </a:solidFill>
+                <a:latin typeface="Courier"/>
+              </a:rPr>
+              <a:t>monthly_avg &lt;- monthly_avg </a:t>
+            </a:r>
+            <a:r>
+              <a:rPr>
+                <a:solidFill>
+                  <a:srgbClr val="5E5E5E"/>
+                </a:solidFill>
+                <a:latin typeface="Courier"/>
+              </a:rPr>
+              <a:t>%&gt;%</a:t>
+            </a:r>
+            <a:br/>
+            <a:r>
+              <a:rPr>
+                <a:solidFill>
+                  <a:srgbClr val="003B4F"/>
+                </a:solidFill>
+                <a:latin typeface="Courier"/>
+              </a:rPr>
+              <a:t>  </a:t>
+            </a:r>
+            <a:r>
+              <a:rPr>
+                <a:solidFill>
+                  <a:srgbClr val="4758AB"/>
+                </a:solidFill>
+                <a:latin typeface="Courier"/>
+              </a:rPr>
+              <a:t>mutate</a:t>
+            </a:r>
+            <a:r>
+              <a:rPr>
+                <a:solidFill>
+                  <a:srgbClr val="003B4F"/>
+                </a:solidFill>
+                <a:latin typeface="Courier"/>
+              </a:rPr>
+              <a:t>(</a:t>
+            </a:r>
+            <a:r>
+              <a:rPr>
+                <a:solidFill>
+                  <a:srgbClr val="657422"/>
+                </a:solidFill>
+                <a:latin typeface="Courier"/>
+              </a:rPr>
+              <a:t>month_date =</a:t>
+            </a:r>
+            <a:r>
+              <a:rPr>
+                <a:solidFill>
+                  <a:srgbClr val="003B4F"/>
+                </a:solidFill>
+                <a:latin typeface="Courier"/>
+              </a:rPr>
+              <a:t> </a:t>
+            </a:r>
+            <a:r>
+              <a:rPr>
+                <a:solidFill>
+                  <a:srgbClr val="4758AB"/>
+                </a:solidFill>
+                <a:latin typeface="Courier"/>
+              </a:rPr>
+              <a:t>ymd</a:t>
+            </a:r>
+            <a:r>
+              <a:rPr>
+                <a:solidFill>
+                  <a:srgbClr val="003B4F"/>
+                </a:solidFill>
+                <a:latin typeface="Courier"/>
+              </a:rPr>
+              <a:t>(</a:t>
+            </a:r>
+            <a:r>
+              <a:rPr>
+                <a:solidFill>
+                  <a:srgbClr val="4758AB"/>
+                </a:solidFill>
+                <a:latin typeface="Courier"/>
+              </a:rPr>
+              <a:t>paste</a:t>
+            </a:r>
+            <a:r>
+              <a:rPr>
+                <a:solidFill>
+                  <a:srgbClr val="003B4F"/>
+                </a:solidFill>
+                <a:latin typeface="Courier"/>
+              </a:rPr>
+              <a:t>(year, month, </a:t>
+            </a:r>
+            <a:r>
+              <a:rPr>
+                <a:solidFill>
+                  <a:srgbClr val="20794D"/>
+                </a:solidFill>
+                <a:latin typeface="Courier"/>
+              </a:rPr>
+              <a:t>"01"</a:t>
+            </a:r>
+            <a:r>
+              <a:rPr>
+                <a:solidFill>
+                  <a:srgbClr val="003B4F"/>
+                </a:solidFill>
+                <a:latin typeface="Courier"/>
+              </a:rPr>
+              <a:t>, </a:t>
+            </a:r>
+            <a:r>
+              <a:rPr>
+                <a:solidFill>
+                  <a:srgbClr val="657422"/>
+                </a:solidFill>
+                <a:latin typeface="Courier"/>
+              </a:rPr>
+              <a:t>sep =</a:t>
+            </a:r>
+            <a:r>
+              <a:rPr>
+                <a:solidFill>
+                  <a:srgbClr val="003B4F"/>
+                </a:solidFill>
+                <a:latin typeface="Courier"/>
+              </a:rPr>
+              <a:t> </a:t>
+            </a:r>
+            <a:r>
+              <a:rPr>
+                <a:solidFill>
+                  <a:srgbClr val="20794D"/>
+                </a:solidFill>
+                <a:latin typeface="Courier"/>
+              </a:rPr>
+              <a:t>"-"</a:t>
+            </a:r>
+            <a:r>
+              <a:rPr>
+                <a:solidFill>
+                  <a:srgbClr val="003B4F"/>
+                </a:solidFill>
+                <a:latin typeface="Courier"/>
+              </a:rPr>
+              <a:t>)))</a:t>
+            </a:r>
+            <a:br/>
+            <a:br/>
+            <a:r>
+              <a:rPr>
+                <a:solidFill>
+                  <a:srgbClr val="4758AB"/>
+                </a:solidFill>
+                <a:latin typeface="Courier"/>
+              </a:rPr>
+              <a:t>head</a:t>
+            </a:r>
+            <a:r>
+              <a:rPr>
+                <a:solidFill>
+                  <a:srgbClr val="003B4F"/>
+                </a:solidFill>
+                <a:latin typeface="Courier"/>
+              </a:rPr>
+              <a:t>(monthly_avg)</a:t>
+            </a:r>
+          </a:p>
+          <a:p>
+            <a:pPr lvl="0" indent="0">
+              <a:buNone/>
+            </a:pPr>
+            <a:r>
+              <a:rPr>
+                <a:latin typeface="Courier"/>
+              </a:rPr>
+              <a:t># A tibble: 6 × 4
+   year month mean_ice month_date
+  &lt;dbl&gt; &lt;ord&gt;    &lt;dbl&gt; &lt;date&gt;    
+1  1973 Jan       18.1 1973-01-01
+2  1973 Feb       32.8 1973-02-01
+3  1973 Mar       28.2 1973-03-01
+4  1973 Apr        2.2 1973-04-01
+5  1973 Dec       12.0 1973-12-01
+6  1974 Jan       24.1 1974-01-01</a:t>
+            </a:r>
+          </a:p>
+        </p:txBody>
+      </p:sp>
+      <p:sp>
+        <p:nvSpPr>
+          <p:cNvPr id="4" name="Content Placeholder 3"/>
+          <p:cNvSpPr>
+            <a:spLocks noGrp="1"/>
+          </p:cNvSpPr>
+          <p:nvPr>
+            <p:ph idx="2" sz="half"/>
+          </p:nvPr>
+        </p:nvSpPr>
+        <p:spPr/>
+        <p:txBody>
+          <a:bodyPr/>
+          <a:lstStyle/>
+          <a:p>
             <a:pPr lvl="0" indent="0" marL="0">
               <a:buNone/>
             </a:pPr>
             <a:r>
-              <a:rPr/>
-              <a:t>Pivot the data long with </a:t>
-            </a:r>
-            <a:r>
-              <a:rPr>
-                <a:latin typeface="Courier"/>
-              </a:rPr>
-              <a:t>pivot_longer()</a:t>
-            </a:r>
-            <a:r>
-              <a:rPr/>
-              <a:t>, then fix the winters that cross the new year with </a:t>
-            </a:r>
-            <a:r>
-              <a:rPr>
-                <a:latin typeface="Courier"/>
-              </a:rPr>
-              <a:t>if_else()</a:t>
-            </a:r>
-            <a:r>
-              <a:rPr/>
-              <a:t> + </a:t>
-            </a:r>
-            <a:r>
-              <a:rPr>
-                <a:latin typeface="Courier"/>
-              </a:rPr>
-              <a:t>ymd()</a:t>
-            </a:r>
-            <a:r>
-              <a:rPr/>
-              <a:t>. Predict the new shape before you run it.</a:t>
+              <a:rPr b="1"/>
+              <a:t>This should look familiar.</a:t>
+            </a:r>
+          </a:p>
+          <a:p>
+            <a:pPr lvl="0"/>
+            <a:r>
+              <a:rPr/>
+              <a:t>Exactly the same </a:t>
+            </a:r>
+            <a:r>
+              <a:rPr>
+                <a:latin typeface="Courier"/>
+              </a:rPr>
+              <a:t>group_by() %&gt;% summarize()</a:t>
+            </a:r>
+            <a:r>
+              <a:rPr/>
+              <a:t> pattern from Lecture 12’s Duluth weather data</a:t>
+            </a:r>
+          </a:p>
+          <a:p>
+            <a:pPr lvl="0"/>
+            <a:r>
+              <a:rPr/>
+              <a:t>We could </a:t>
+            </a:r>
+            <a:r>
+              <a:rPr b="1"/>
+              <a:t>not</a:t>
+            </a:r>
+            <a:r>
+              <a:rPr/>
+              <a:t> have written this on the wide data — there was no </a:t>
+            </a:r>
+            <a:r>
+              <a:rPr>
+                <a:latin typeface="Courier"/>
+              </a:rPr>
+              <a:t>year</a:t>
+            </a:r>
+            <a:r>
+              <a:rPr/>
+              <a:t> or </a:t>
+            </a:r>
+            <a:r>
+              <a:rPr>
+                <a:latin typeface="Courier"/>
+              </a:rPr>
+              <a:t>month</a:t>
+            </a:r>
+            <a:r>
+              <a:rPr/>
+              <a:t> column to group by until we pivoted</a:t>
+            </a:r>
+          </a:p>
+          <a:p>
+            <a:pPr lvl="0" indent="0" marL="0">
+              <a:buNone/>
+            </a:pPr>
+            <a:r>
+              <a:rPr/>
+              <a:t>The reshape wasn’t just cosmetic — it </a:t>
+            </a:r>
+            <a:r>
+              <a:rPr b="1"/>
+              <a:t>unlocked</a:t>
+            </a:r>
+            <a:r>
+              <a:rPr/>
+              <a:t> every tidyverse tool we already know.</a:t>
             </a:r>
           </a:p>
         </p:txBody>
@@ -6241,900 +6432,6 @@
         <p:spPr>
           <a:xfrm>
             <a:off x="0" y="0"/>
-            <a:ext cx="9144000" cy="582780"/>
-          </a:xfrm>
-        </p:spPr>
-        <p:txBody>
-          <a:bodyPr/>
-          <a:lstStyle/>
-          <a:p>
-            <a:pPr lvl="0" indent="0" marL="0">
-              <a:buNone/>
-            </a:pPr>
-            <a:r>
-              <a:rPr/>
-              <a:t>🧩 Chunk 3 of 4 · Summarize &amp; Pivot Back Wider</a:t>
-            </a:r>
-          </a:p>
-        </p:txBody>
-      </p:sp>
-      <p:sp>
-        <p:nvSpPr>
-          <p:cNvPr id="3" name="Content Placeholder 2"/>
-          <p:cNvSpPr>
-            <a:spLocks noGrp="1"/>
-          </p:cNvSpPr>
-          <p:nvPr>
-            <p:ph idx="1"/>
-          </p:nvPr>
-        </p:nvSpPr>
-        <p:spPr/>
-        <p:txBody>
-          <a:bodyPr/>
-          <a:lstStyle/>
-          <a:p>
-            <a:pPr lvl="0" indent="0" marL="0">
-              <a:buNone/>
-            </a:pPr>
-            <a:r>
-              <a:rPr b="1"/>
-              <a:t>We will cover:</a:t>
-            </a:r>
-            <a:r>
-              <a:rPr/>
-              <a:t> </a:t>
-            </a:r>
-            <a:r>
-              <a:rPr>
-                <a:latin typeface="Courier"/>
-              </a:rPr>
-              <a:t>group_by() %&gt;% summarize()</a:t>
-            </a:r>
-            <a:r>
-              <a:rPr/>
-              <a:t> on the newly-tidy data, and </a:t>
-            </a:r>
-            <a:r>
-              <a:rPr>
-                <a:latin typeface="Courier"/>
-              </a:rPr>
-              <a:t>pivot_wider()</a:t>
-            </a:r>
-            <a:r>
-              <a:rPr/>
-              <a:t> to build a readable year-by-month table.</a:t>
-            </a:r>
-          </a:p>
-          <a:p>
-            <a:pPr lvl="0" indent="0" marL="1270000">
-              <a:buNone/>
-            </a:pPr>
-            <a:r>
-              <a:rPr sz="2000" b="1"/>
-              <a:t>Tip</a:t>
-            </a:r>
-          </a:p>
-          <a:p>
-            <a:pPr lvl="0" indent="0" marL="1270000">
-              <a:buNone/>
-            </a:pPr>
-            <a:r>
-              <a:rPr sz="2000" b="1"/>
-              <a:t>🖐 After this chunk: Activity Parts 5–6</a:t>
-            </a:r>
-            <a:r>
-              <a:rPr sz="2000"/>
-              <a:t> (summarize by month, then make a pivot table).</a:t>
-            </a:r>
-          </a:p>
-        </p:txBody>
-      </p:sp>
-    </p:spTree>
-  </p:cSld>
-</p:sld>
-</file>
-
-<file path=ppt/slides/slide19.xml><?xml version="1.0" encoding="utf-8"?>
-<p:sld xmlns:a="http://schemas.openxmlformats.org/drawingml/2006/main" xmlns:r="http://schemas.openxmlformats.org/officeDocument/2006/relationships" xmlns:p="http://schemas.openxmlformats.org/presentationml/2006/main">
-  <p:cSld>
-    <p:spTree>
-      <p:nvGrpSpPr>
-        <p:cNvPr id="1" name=""/>
-        <p:cNvGrpSpPr/>
-        <p:nvPr/>
-      </p:nvGrpSpPr>
-      <p:grpSpPr>
-        <a:xfrm>
-          <a:off x="0" y="0"/>
-          <a:ext cx="0" cy="0"/>
-          <a:chOff x="0" y="0"/>
-          <a:chExt cx="0" cy="0"/>
-        </a:xfrm>
-      </p:grpSpPr>
-      <p:sp>
-        <p:nvSpPr>
-          <p:cNvPr id="2" name="Title 1"/>
-          <p:cNvSpPr>
-            <a:spLocks noGrp="1"/>
-          </p:cNvSpPr>
-          <p:nvPr>
-            <p:ph type="title"/>
-          </p:nvPr>
-        </p:nvSpPr>
-        <p:spPr>
-          <a:xfrm>
-            <a:off x="0" y="0"/>
-            <a:ext cx="9144000" cy="602780"/>
-          </a:xfrm>
-          <a:solidFill>
-            <a:srgbClr val="1A1A2E"/>
-          </a:solidFill>
-        </p:spPr>
-        <p:txBody>
-          <a:bodyPr/>
-          <a:lstStyle/>
-          <a:p>
-            <a:pPr lvl="0" indent="0" marL="0">
-              <a:buNone/>
-            </a:pPr>
-            <a:r>
-              <a:rPr/>
-              <a:t>Summarize Now That We’re Long</a:t>
-            </a:r>
-          </a:p>
-        </p:txBody>
-      </p:sp>
-      <p:sp>
-        <p:nvSpPr>
-          <p:cNvPr id="3" name="Content Placeholder 2"/>
-          <p:cNvSpPr>
-            <a:spLocks noGrp="1"/>
-          </p:cNvSpPr>
-          <p:nvPr>
-            <p:ph idx="1" sz="half"/>
-          </p:nvPr>
-        </p:nvSpPr>
-        <p:spPr/>
-        <p:txBody>
-          <a:bodyPr/>
-          <a:lstStyle/>
-          <a:p>
-            <a:pPr lvl="0" indent="0">
-              <a:buNone/>
-            </a:pPr>
-            <a:r>
-              <a:rPr>
-                <a:solidFill>
-                  <a:srgbClr val="5E5E5E"/>
-                </a:solidFill>
-                <a:latin typeface="Courier"/>
-              </a:rPr>
-              <a:t># Mean ice cover per year-month --------------------------</a:t>
-            </a:r>
-            <a:br/>
-            <a:r>
-              <a:rPr>
-                <a:solidFill>
-                  <a:srgbClr val="003B4F"/>
-                </a:solidFill>
-                <a:latin typeface="Courier"/>
-              </a:rPr>
-              <a:t>monthly_avg &lt;- ice_clean </a:t>
-            </a:r>
-            <a:r>
-              <a:rPr>
-                <a:solidFill>
-                  <a:srgbClr val="5E5E5E"/>
-                </a:solidFill>
-                <a:latin typeface="Courier"/>
-              </a:rPr>
-              <a:t>%&gt;%</a:t>
-            </a:r>
-            <a:br/>
-            <a:r>
-              <a:rPr>
-                <a:solidFill>
-                  <a:srgbClr val="003B4F"/>
-                </a:solidFill>
-                <a:latin typeface="Courier"/>
-              </a:rPr>
-              <a:t>  </a:t>
-            </a:r>
-            <a:r>
-              <a:rPr>
-                <a:solidFill>
-                  <a:srgbClr val="4758AB"/>
-                </a:solidFill>
-                <a:latin typeface="Courier"/>
-              </a:rPr>
-              <a:t>group_by</a:t>
-            </a:r>
-            <a:r>
-              <a:rPr>
-                <a:solidFill>
-                  <a:srgbClr val="003B4F"/>
-                </a:solidFill>
-                <a:latin typeface="Courier"/>
-              </a:rPr>
-              <a:t>(year, month) </a:t>
-            </a:r>
-            <a:r>
-              <a:rPr>
-                <a:solidFill>
-                  <a:srgbClr val="5E5E5E"/>
-                </a:solidFill>
-                <a:latin typeface="Courier"/>
-              </a:rPr>
-              <a:t>%&gt;%</a:t>
-            </a:r>
-            <a:br/>
-            <a:r>
-              <a:rPr>
-                <a:solidFill>
-                  <a:srgbClr val="003B4F"/>
-                </a:solidFill>
-                <a:latin typeface="Courier"/>
-              </a:rPr>
-              <a:t>  </a:t>
-            </a:r>
-            <a:r>
-              <a:rPr>
-                <a:solidFill>
-                  <a:srgbClr val="4758AB"/>
-                </a:solidFill>
-                <a:latin typeface="Courier"/>
-              </a:rPr>
-              <a:t>summarize</a:t>
-            </a:r>
-            <a:r>
-              <a:rPr>
-                <a:solidFill>
-                  <a:srgbClr val="003B4F"/>
-                </a:solidFill>
-                <a:latin typeface="Courier"/>
-              </a:rPr>
-              <a:t>(</a:t>
-            </a:r>
-            <a:br/>
-            <a:r>
-              <a:rPr>
-                <a:solidFill>
-                  <a:srgbClr val="003B4F"/>
-                </a:solidFill>
-                <a:latin typeface="Courier"/>
-              </a:rPr>
-              <a:t>    </a:t>
-            </a:r>
-            <a:r>
-              <a:rPr>
-                <a:solidFill>
-                  <a:srgbClr val="657422"/>
-                </a:solidFill>
-                <a:latin typeface="Courier"/>
-              </a:rPr>
-              <a:t>mean_ice =</a:t>
-            </a:r>
-            <a:r>
-              <a:rPr>
-                <a:solidFill>
-                  <a:srgbClr val="003B4F"/>
-                </a:solidFill>
-                <a:latin typeface="Courier"/>
-              </a:rPr>
-              <a:t> </a:t>
-            </a:r>
-            <a:r>
-              <a:rPr>
-                <a:solidFill>
-                  <a:srgbClr val="4758AB"/>
-                </a:solidFill>
-                <a:latin typeface="Courier"/>
-              </a:rPr>
-              <a:t>mean</a:t>
-            </a:r>
-            <a:r>
-              <a:rPr>
-                <a:solidFill>
-                  <a:srgbClr val="003B4F"/>
-                </a:solidFill>
-                <a:latin typeface="Courier"/>
-              </a:rPr>
-              <a:t>(ice_cover, </a:t>
-            </a:r>
-            <a:r>
-              <a:rPr>
-                <a:solidFill>
-                  <a:srgbClr val="657422"/>
-                </a:solidFill>
-                <a:latin typeface="Courier"/>
-              </a:rPr>
-              <a:t>na.rm =</a:t>
-            </a:r>
-            <a:r>
-              <a:rPr>
-                <a:solidFill>
-                  <a:srgbClr val="003B4F"/>
-                </a:solidFill>
-                <a:latin typeface="Courier"/>
-              </a:rPr>
-              <a:t> </a:t>
-            </a:r>
-            <a:r>
-              <a:rPr>
-                <a:solidFill>
-                  <a:srgbClr val="8F5902"/>
-                </a:solidFill>
-                <a:latin typeface="Courier"/>
-              </a:rPr>
-              <a:t>TRUE</a:t>
-            </a:r>
-            <a:r>
-              <a:rPr>
-                <a:solidFill>
-                  <a:srgbClr val="003B4F"/>
-                </a:solidFill>
-                <a:latin typeface="Courier"/>
-              </a:rPr>
-              <a:t>),</a:t>
-            </a:r>
-            <a:br/>
-            <a:r>
-              <a:rPr>
-                <a:solidFill>
-                  <a:srgbClr val="003B4F"/>
-                </a:solidFill>
-                <a:latin typeface="Courier"/>
-              </a:rPr>
-              <a:t>    </a:t>
-            </a:r>
-            <a:r>
-              <a:rPr>
-                <a:solidFill>
-                  <a:srgbClr val="657422"/>
-                </a:solidFill>
-                <a:latin typeface="Courier"/>
-              </a:rPr>
-              <a:t>.groups =</a:t>
-            </a:r>
-            <a:r>
-              <a:rPr>
-                <a:solidFill>
-                  <a:srgbClr val="003B4F"/>
-                </a:solidFill>
-                <a:latin typeface="Courier"/>
-              </a:rPr>
-              <a:t> </a:t>
-            </a:r>
-            <a:r>
-              <a:rPr>
-                <a:solidFill>
-                  <a:srgbClr val="20794D"/>
-                </a:solidFill>
-                <a:latin typeface="Courier"/>
-              </a:rPr>
-              <a:t>"drop"</a:t>
-            </a:r>
-            <a:br/>
-            <a:r>
-              <a:rPr>
-                <a:solidFill>
-                  <a:srgbClr val="003B4F"/>
-                </a:solidFill>
-                <a:latin typeface="Courier"/>
-              </a:rPr>
-              <a:t>  )</a:t>
-            </a:r>
-            <a:br/>
-            <a:br/>
-            <a:r>
-              <a:rPr>
-                <a:solidFill>
-                  <a:srgbClr val="003B4F"/>
-                </a:solidFill>
-                <a:latin typeface="Courier"/>
-              </a:rPr>
-              <a:t>monthly_avg &lt;- monthly_avg </a:t>
-            </a:r>
-            <a:r>
-              <a:rPr>
-                <a:solidFill>
-                  <a:srgbClr val="5E5E5E"/>
-                </a:solidFill>
-                <a:latin typeface="Courier"/>
-              </a:rPr>
-              <a:t>%&gt;%</a:t>
-            </a:r>
-            <a:br/>
-            <a:r>
-              <a:rPr>
-                <a:solidFill>
-                  <a:srgbClr val="003B4F"/>
-                </a:solidFill>
-                <a:latin typeface="Courier"/>
-              </a:rPr>
-              <a:t>  </a:t>
-            </a:r>
-            <a:r>
-              <a:rPr>
-                <a:solidFill>
-                  <a:srgbClr val="4758AB"/>
-                </a:solidFill>
-                <a:latin typeface="Courier"/>
-              </a:rPr>
-              <a:t>mutate</a:t>
-            </a:r>
-            <a:r>
-              <a:rPr>
-                <a:solidFill>
-                  <a:srgbClr val="003B4F"/>
-                </a:solidFill>
-                <a:latin typeface="Courier"/>
-              </a:rPr>
-              <a:t>(</a:t>
-            </a:r>
-            <a:r>
-              <a:rPr>
-                <a:solidFill>
-                  <a:srgbClr val="657422"/>
-                </a:solidFill>
-                <a:latin typeface="Courier"/>
-              </a:rPr>
-              <a:t>month_date =</a:t>
-            </a:r>
-            <a:r>
-              <a:rPr>
-                <a:solidFill>
-                  <a:srgbClr val="003B4F"/>
-                </a:solidFill>
-                <a:latin typeface="Courier"/>
-              </a:rPr>
-              <a:t> </a:t>
-            </a:r>
-            <a:r>
-              <a:rPr>
-                <a:solidFill>
-                  <a:srgbClr val="4758AB"/>
-                </a:solidFill>
-                <a:latin typeface="Courier"/>
-              </a:rPr>
-              <a:t>ymd</a:t>
-            </a:r>
-            <a:r>
-              <a:rPr>
-                <a:solidFill>
-                  <a:srgbClr val="003B4F"/>
-                </a:solidFill>
-                <a:latin typeface="Courier"/>
-              </a:rPr>
-              <a:t>(</a:t>
-            </a:r>
-            <a:r>
-              <a:rPr>
-                <a:solidFill>
-                  <a:srgbClr val="4758AB"/>
-                </a:solidFill>
-                <a:latin typeface="Courier"/>
-              </a:rPr>
-              <a:t>paste</a:t>
-            </a:r>
-            <a:r>
-              <a:rPr>
-                <a:solidFill>
-                  <a:srgbClr val="003B4F"/>
-                </a:solidFill>
-                <a:latin typeface="Courier"/>
-              </a:rPr>
-              <a:t>(year, month, </a:t>
-            </a:r>
-            <a:r>
-              <a:rPr>
-                <a:solidFill>
-                  <a:srgbClr val="20794D"/>
-                </a:solidFill>
-                <a:latin typeface="Courier"/>
-              </a:rPr>
-              <a:t>"01"</a:t>
-            </a:r>
-            <a:r>
-              <a:rPr>
-                <a:solidFill>
-                  <a:srgbClr val="003B4F"/>
-                </a:solidFill>
-                <a:latin typeface="Courier"/>
-              </a:rPr>
-              <a:t>, </a:t>
-            </a:r>
-            <a:r>
-              <a:rPr>
-                <a:solidFill>
-                  <a:srgbClr val="657422"/>
-                </a:solidFill>
-                <a:latin typeface="Courier"/>
-              </a:rPr>
-              <a:t>sep =</a:t>
-            </a:r>
-            <a:r>
-              <a:rPr>
-                <a:solidFill>
-                  <a:srgbClr val="003B4F"/>
-                </a:solidFill>
-                <a:latin typeface="Courier"/>
-              </a:rPr>
-              <a:t> </a:t>
-            </a:r>
-            <a:r>
-              <a:rPr>
-                <a:solidFill>
-                  <a:srgbClr val="20794D"/>
-                </a:solidFill>
-                <a:latin typeface="Courier"/>
-              </a:rPr>
-              <a:t>"-"</a:t>
-            </a:r>
-            <a:r>
-              <a:rPr>
-                <a:solidFill>
-                  <a:srgbClr val="003B4F"/>
-                </a:solidFill>
-                <a:latin typeface="Courier"/>
-              </a:rPr>
-              <a:t>)))</a:t>
-            </a:r>
-            <a:br/>
-            <a:br/>
-            <a:r>
-              <a:rPr>
-                <a:solidFill>
-                  <a:srgbClr val="4758AB"/>
-                </a:solidFill>
-                <a:latin typeface="Courier"/>
-              </a:rPr>
-              <a:t>head</a:t>
-            </a:r>
-            <a:r>
-              <a:rPr>
-                <a:solidFill>
-                  <a:srgbClr val="003B4F"/>
-                </a:solidFill>
-                <a:latin typeface="Courier"/>
-              </a:rPr>
-              <a:t>(monthly_avg)</a:t>
-            </a:r>
-          </a:p>
-          <a:p>
-            <a:pPr lvl="0" indent="0">
-              <a:buNone/>
-            </a:pPr>
-            <a:r>
-              <a:rPr>
-                <a:latin typeface="Courier"/>
-              </a:rPr>
-              <a:t># A tibble: 6 × 4
-   year month mean_ice month_date
-  &lt;dbl&gt; &lt;ord&gt;    &lt;dbl&gt; &lt;date&gt;    
-1  1973 Jan       18.1 1973-01-01
-2  1973 Feb       32.8 1973-02-01
-3  1973 Mar       28.2 1973-03-01
-4  1973 Apr        2.2 1973-04-01
-5  1973 Dec       12.0 1973-12-01
-6  1974 Jan       24.1 1974-01-01</a:t>
-            </a:r>
-          </a:p>
-        </p:txBody>
-      </p:sp>
-      <p:sp>
-        <p:nvSpPr>
-          <p:cNvPr id="4" name="Content Placeholder 3"/>
-          <p:cNvSpPr>
-            <a:spLocks noGrp="1"/>
-          </p:cNvSpPr>
-          <p:nvPr>
-            <p:ph idx="2" sz="half"/>
-          </p:nvPr>
-        </p:nvSpPr>
-        <p:spPr/>
-        <p:txBody>
-          <a:bodyPr/>
-          <a:lstStyle/>
-          <a:p>
-            <a:pPr lvl="0" indent="0" marL="0">
-              <a:buNone/>
-            </a:pPr>
-            <a:r>
-              <a:rPr b="1"/>
-              <a:t>This should look familiar.</a:t>
-            </a:r>
-          </a:p>
-          <a:p>
-            <a:pPr lvl="0"/>
-            <a:r>
-              <a:rPr/>
-              <a:t>Exactly the same </a:t>
-            </a:r>
-            <a:r>
-              <a:rPr>
-                <a:latin typeface="Courier"/>
-              </a:rPr>
-              <a:t>group_by() %&gt;% summarize()</a:t>
-            </a:r>
-            <a:r>
-              <a:rPr/>
-              <a:t> pattern from Lecture 12’s Duluth weather data</a:t>
-            </a:r>
-          </a:p>
-          <a:p>
-            <a:pPr lvl="0"/>
-            <a:r>
-              <a:rPr/>
-              <a:t>We could </a:t>
-            </a:r>
-            <a:r>
-              <a:rPr b="1"/>
-              <a:t>not</a:t>
-            </a:r>
-            <a:r>
-              <a:rPr/>
-              <a:t> have written this on the wide data — there was no </a:t>
-            </a:r>
-            <a:r>
-              <a:rPr>
-                <a:latin typeface="Courier"/>
-              </a:rPr>
-              <a:t>year</a:t>
-            </a:r>
-            <a:r>
-              <a:rPr/>
-              <a:t> or </a:t>
-            </a:r>
-            <a:r>
-              <a:rPr>
-                <a:latin typeface="Courier"/>
-              </a:rPr>
-              <a:t>month</a:t>
-            </a:r>
-            <a:r>
-              <a:rPr/>
-              <a:t> column to group by until we pivoted</a:t>
-            </a:r>
-          </a:p>
-          <a:p>
-            <a:pPr lvl="0" indent="0" marL="0">
-              <a:buNone/>
-            </a:pPr>
-            <a:r>
-              <a:rPr/>
-              <a:t>The reshape wasn’t just cosmetic — it </a:t>
-            </a:r>
-            <a:r>
-              <a:rPr b="1"/>
-              <a:t>unlocked</a:t>
-            </a:r>
-            <a:r>
-              <a:rPr/>
-              <a:t> every tidyverse tool we already know.</a:t>
-            </a:r>
-          </a:p>
-        </p:txBody>
-      </p:sp>
-    </p:spTree>
-  </p:cSld>
-</p:sld>
-</file>
-
-<file path=ppt/slides/slide2.xml><?xml version="1.0" encoding="utf-8"?>
-<p:sld xmlns:a="http://schemas.openxmlformats.org/drawingml/2006/main" xmlns:r="http://schemas.openxmlformats.org/officeDocument/2006/relationships" xmlns:p="http://schemas.openxmlformats.org/presentationml/2006/main">
-  <p:cSld>
-    <p:spTree>
-      <p:nvGrpSpPr>
-        <p:cNvPr id="1" name=""/>
-        <p:cNvGrpSpPr/>
-        <p:nvPr/>
-      </p:nvGrpSpPr>
-      <p:grpSpPr>
-        <a:xfrm>
-          <a:off x="0" y="0"/>
-          <a:ext cx="0" cy="0"/>
-          <a:chOff x="0" y="0"/>
-          <a:chExt cx="0" cy="0"/>
-        </a:xfrm>
-      </p:grpSpPr>
-      <p:sp>
-        <p:nvSpPr>
-          <p:cNvPr id="2" name="Title 1"/>
-          <p:cNvSpPr>
-            <a:spLocks noGrp="1"/>
-          </p:cNvSpPr>
-          <p:nvPr>
-            <p:ph type="title"/>
-          </p:nvPr>
-        </p:nvSpPr>
-        <p:spPr>
-          <a:xfrm>
-            <a:off x="0" y="0"/>
-            <a:ext cx="9144000" cy="582780"/>
-          </a:xfrm>
-        </p:spPr>
-        <p:txBody>
-          <a:bodyPr/>
-          <a:lstStyle/>
-          <a:p>
-            <a:pPr lvl="0" indent="0" marL="0">
-              <a:buNone/>
-            </a:pPr>
-            <a:r>
-              <a:rPr/>
-              <a:t>Where We Left Off (Lecture 14)</a:t>
-            </a:r>
-          </a:p>
-        </p:txBody>
-      </p:sp>
-      <p:sp>
-        <p:nvSpPr>
-          <p:cNvPr id="3" name="Content Placeholder 2"/>
-          <p:cNvSpPr>
-            <a:spLocks noGrp="1"/>
-          </p:cNvSpPr>
-          <p:nvPr>
-            <p:ph idx="1"/>
-          </p:nvPr>
-        </p:nvSpPr>
-        <p:spPr/>
-        <p:txBody>
-          <a:bodyPr/>
-          <a:lstStyle/>
-          <a:p>
-            <a:pPr lvl="0"/>
-            <a:r>
-              <a:rPr b="1"/>
-              <a:t>Started the final project</a:t>
-            </a:r>
-            <a:r>
-              <a:rPr/>
-              <a:t> — claimed a topic and a candidate dataset</a:t>
-            </a:r>
-          </a:p>
-          <a:p>
-            <a:pPr lvl="0"/>
-            <a:r>
-              <a:rPr/>
-              <a:t>Sized up a new dataset in R with </a:t>
-            </a:r>
-            <a:r>
-              <a:rPr>
-                <a:latin typeface="Courier"/>
-              </a:rPr>
-              <a:t>read_csv()</a:t>
-            </a:r>
-            <a:r>
-              <a:rPr/>
-              <a:t>, </a:t>
-            </a:r>
-            <a:r>
-              <a:rPr>
-                <a:latin typeface="Courier"/>
-              </a:rPr>
-              <a:t>glimpse()</a:t>
-            </a:r>
-            <a:r>
-              <a:rPr/>
-              <a:t>, </a:t>
-            </a:r>
-            <a:r>
-              <a:rPr>
-                <a:latin typeface="Courier"/>
-              </a:rPr>
-              <a:t>dim()</a:t>
-            </a:r>
-            <a:r>
-              <a:rPr/>
-              <a:t>, </a:t>
-            </a:r>
-            <a:r>
-              <a:rPr>
-                <a:latin typeface="Courier"/>
-              </a:rPr>
-              <a:t>head()</a:t>
-            </a:r>
-          </a:p>
-          <a:p>
-            <a:pPr lvl="0"/>
-            <a:r>
-              <a:rPr/>
-              <a:t>Wrote H₀ and Hₐ for a question you chose yourself</a:t>
-            </a:r>
-          </a:p>
-          <a:p>
-            <a:pPr lvl="0" indent="0" marL="1270000">
-              <a:buNone/>
-            </a:pPr>
-            <a:r>
-              <a:rPr sz="2000" b="1"/>
-              <a:t>Note</a:t>
-            </a:r>
-          </a:p>
-          <a:p>
-            <a:pPr lvl="0" indent="0" marL="1270000">
-              <a:buNone/>
-            </a:pPr>
-            <a:r>
-              <a:rPr sz="2000" b="1"/>
-              <a:t>✅ Transition</a:t>
-            </a:r>
-          </a:p>
-          <a:p>
-            <a:pPr lvl="0"/>
-            <a:r>
-              <a:rPr sz="2000"/>
-              <a:t>Every dataset we’ve analyzed so far came to us </a:t>
-            </a:r>
-            <a:r>
-              <a:rPr sz="2000" b="1"/>
-              <a:t>already tidy</a:t>
-            </a:r>
-            <a:r>
-              <a:rPr sz="2000"/>
-              <a:t> — one row per observation, one column per variable.</a:t>
-            </a:r>
-          </a:p>
-          <a:p>
-            <a:pPr lvl="0"/>
-            <a:r>
-              <a:rPr sz="2000"/>
-              <a:t>Today’s dataset will </a:t>
-            </a:r>
-            <a:r>
-              <a:rPr sz="2000" b="1"/>
-              <a:t>not</a:t>
-            </a:r>
-            <a:r>
-              <a:rPr sz="2000"/>
-              <a:t> be tidy.</a:t>
-            </a:r>
-          </a:p>
-          <a:p>
-            <a:pPr lvl="0"/>
-            <a:r>
-              <a:rPr sz="2000"/>
-              <a:t>We’ll learn how to fix that.</a:t>
-            </a:r>
-          </a:p>
-        </p:txBody>
-      </p:sp>
-    </p:spTree>
-  </p:cSld>
-</p:sld>
-</file>
-
-<file path=ppt/slides/slide20.xml><?xml version="1.0" encoding="utf-8"?>
-<p:sld xmlns:a="http://schemas.openxmlformats.org/drawingml/2006/main" xmlns:r="http://schemas.openxmlformats.org/officeDocument/2006/relationships" xmlns:p="http://schemas.openxmlformats.org/presentationml/2006/main">
-  <p:cSld>
-    <p:spTree>
-      <p:nvGrpSpPr>
-        <p:cNvPr id="1" name=""/>
-        <p:cNvGrpSpPr/>
-        <p:nvPr/>
-      </p:nvGrpSpPr>
-      <p:grpSpPr>
-        <a:xfrm>
-          <a:off x="0" y="0"/>
-          <a:ext cx="0" cy="0"/>
-          <a:chOff x="0" y="0"/>
-          <a:chExt cx="0" cy="0"/>
-        </a:xfrm>
-      </p:grpSpPr>
-      <p:sp>
-        <p:nvSpPr>
-          <p:cNvPr id="2" name="Title 1"/>
-          <p:cNvSpPr>
-            <a:spLocks noGrp="1"/>
-          </p:cNvSpPr>
-          <p:nvPr>
-            <p:ph type="title"/>
-          </p:nvPr>
-        </p:nvSpPr>
-        <p:spPr>
-          <a:xfrm>
-            <a:off x="0" y="0"/>
             <a:ext cx="9144000" cy="602780"/>
           </a:xfrm>
           <a:solidFill>
@@ -7526,7 +6823,7 @@
 </p:sld>
 </file>
 
-<file path=ppt/slides/slide21.xml><?xml version="1.0" encoding="utf-8"?>
+<file path=ppt/slides/slide19.xml><?xml version="1.0" encoding="utf-8"?>
 <p:sld xmlns:a="http://schemas.openxmlformats.org/drawingml/2006/main" xmlns:r="http://schemas.openxmlformats.org/officeDocument/2006/relationships" xmlns:p="http://schemas.openxmlformats.org/presentationml/2006/main">
   <p:cSld>
     <p:spTree>
@@ -7783,7 +7080,7 @@
 </p:sld>
 </file>
 
-<file path=ppt/slides/slide22.xml><?xml version="1.0" encoding="utf-8"?>
+<file path=ppt/slides/slide2.xml><?xml version="1.0" encoding="utf-8"?>
 <p:sld xmlns:a="http://schemas.openxmlformats.org/drawingml/2006/main" xmlns:r="http://schemas.openxmlformats.org/officeDocument/2006/relationships" xmlns:p="http://schemas.openxmlformats.org/presentationml/2006/main">
   <p:cSld>
     <p:spTree>
@@ -7825,7 +7122,7 @@
             </a:pPr>
             <a:r>
               <a:rPr/>
-              <a:t>🛑 Pause — Do Activity Parts 5–6 Now</a:t>
+              <a:t>Where We Left Off (Lecture 14)</a:t>
             </a:r>
           </a:p>
         </p:txBody>
@@ -7845,22 +7142,119 @@
           <a:bodyPr/>
           <a:lstStyle/>
           <a:p>
-            <a:pPr lvl="0" indent="0" marL="0">
+            <a:pPr lvl="0"/>
+            <a:r>
+              <a:rPr b="1"/>
+              <a:t>Started the final project</a:t>
+            </a:r>
+            <a:r>
+              <a:rPr/>
+              <a:t> — claimed a topic and a candidate dataset</a:t>
+            </a:r>
+          </a:p>
+          <a:p>
+            <a:pPr lvl="0"/>
+            <a:r>
+              <a:rPr/>
+              <a:t>Sized up a new dataset in R with </a:t>
+            </a:r>
+            <a:r>
+              <a:rPr>
+                <a:latin typeface="Courier"/>
+              </a:rPr>
+              <a:t>read_csv()</a:t>
+            </a:r>
+            <a:r>
+              <a:rPr/>
+              <a:t>, </a:t>
+            </a:r>
+            <a:r>
+              <a:rPr>
+                <a:latin typeface="Courier"/>
+              </a:rPr>
+              <a:t>glimpse()</a:t>
+            </a:r>
+            <a:r>
+              <a:rPr/>
+              <a:t>, </a:t>
+            </a:r>
+            <a:r>
+              <a:rPr>
+                <a:latin typeface="Courier"/>
+              </a:rPr>
+              <a:t>dim()</a:t>
+            </a:r>
+            <a:r>
+              <a:rPr/>
+              <a:t>, </a:t>
+            </a:r>
+            <a:r>
+              <a:rPr>
+                <a:latin typeface="Courier"/>
+              </a:rPr>
+              <a:t>head()</a:t>
+            </a:r>
+          </a:p>
+          <a:p>
+            <a:pPr lvl="0"/>
+            <a:r>
+              <a:rPr/>
+              <a:t>Wrote H₀ and Hₐ for a question you chose yourself</a:t>
+            </a:r>
+          </a:p>
+          <a:p>
+            <a:pPr lvl="0" indent="0" marL="1270000">
               <a:buNone/>
             </a:pPr>
             <a:r>
-              <a:rPr/>
-              <a:t>Summarize mean ice cover by year-month, then use </a:t>
-            </a:r>
-            <a:r>
-              <a:rPr>
-                <a:latin typeface="Courier"/>
-              </a:rPr>
-              <a:t>pivot_wider()</a:t>
-            </a:r>
-            <a:r>
-              <a:rPr/>
-              <a:t> to build the Excel-style table. Predict how many rows and columns the wide table will have.</a:t>
+              <a:rPr sz="2000" b="1"/>
+              <a:t>Note</a:t>
+            </a:r>
+          </a:p>
+          <a:p>
+            <a:pPr lvl="0" indent="0" marL="1270000">
+              <a:buNone/>
+            </a:pPr>
+            <a:r>
+              <a:rPr sz="2000" b="1"/>
+              <a:t>✅ Transition</a:t>
+            </a:r>
+          </a:p>
+          <a:p>
+            <a:pPr lvl="0"/>
+            <a:r>
+              <a:rPr sz="2000"/>
+              <a:t>Every dataset we’ve analyzed so far came to us </a:t>
+            </a:r>
+            <a:r>
+              <a:rPr sz="2000" b="1"/>
+              <a:t>already tidy</a:t>
+            </a:r>
+            <a:r>
+              <a:rPr sz="2000"/>
+              <a:t> — one row per observation, one column per variable.</a:t>
+            </a:r>
+          </a:p>
+          <a:p>
+            <a:pPr lvl="0"/>
+            <a:r>
+              <a:rPr sz="2000"/>
+              <a:t>Today’s dataset will </a:t>
+            </a:r>
+            <a:r>
+              <a:rPr sz="2000" b="1"/>
+              <a:t>not</a:t>
+            </a:r>
+            <a:r>
+              <a:rPr sz="2000"/>
+              <a:t> be tidy.</a:t>
+            </a:r>
+          </a:p>
+          <a:p>
+            <a:pPr lvl="0"/>
+            <a:r>
+              <a:rPr sz="2000"/>
+              <a:t>We’ll learn how to fix that.</a:t>
             </a:r>
           </a:p>
         </p:txBody>
@@ -7870,7 +7264,7 @@
 </p:sld>
 </file>
 
-<file path=ppt/slides/slide23.xml><?xml version="1.0" encoding="utf-8"?>
+<file path=ppt/slides/slide20.xml><?xml version="1.0" encoding="utf-8"?>
 <p:sld xmlns:a="http://schemas.openxmlformats.org/drawingml/2006/main" xmlns:r="http://schemas.openxmlformats.org/officeDocument/2006/relationships" xmlns:p="http://schemas.openxmlformats.org/presentationml/2006/main">
   <p:cSld>
     <p:spTree>
@@ -7912,7 +7306,7 @@
             </a:pPr>
             <a:r>
               <a:rPr/>
-              <a:t>🧩 Chunk 4 of 4 · Visualize &amp; Model the Trend</a:t>
+              <a:t>🛑 Pause — Do Activity Parts 5–6 Now</a:t>
             </a:r>
           </a:p>
         </p:txBody>
@@ -7936,44 +7330,18 @@
               <a:buNone/>
             </a:pPr>
             <a:r>
-              <a:rPr b="1"/>
-              <a:t>We will cover:</a:t>
-            </a:r>
-            <a:r>
-              <a:rPr/>
-              <a:t> rebuilding NOAA’s spaghetti plot, pulling each year’s peak ice with </a:t>
-            </a:r>
-            <a:r>
-              <a:rPr>
-                <a:latin typeface="Courier"/>
-              </a:rPr>
-              <a:t>slice_max()</a:t>
-            </a:r>
-            <a:r>
-              <a:rPr/>
-              <a:t>, and modeling whether maximum ice cover is declining.</a:t>
-            </a:r>
-          </a:p>
-          <a:p>
-            <a:pPr lvl="0" indent="0" marL="1270000">
-              <a:buNone/>
-            </a:pPr>
-            <a:r>
-              <a:rPr sz="2000" b="1"/>
-              <a:t>Tip</a:t>
-            </a:r>
-          </a:p>
-          <a:p>
-            <a:pPr lvl="0" indent="0" marL="1270000">
-              <a:buNone/>
-            </a:pPr>
-            <a:r>
-              <a:rPr sz="2000" b="1"/>
-              <a:t>🖐 After this chunk: Activity Parts 7–9</a:t>
-            </a:r>
-            <a:r>
-              <a:rPr sz="2000"/>
-              <a:t> (spaghetti plot, yearly maximum, trend model).</a:t>
+              <a:rPr/>
+              <a:t>Summarize mean ice cover by year-month, then use </a:t>
+            </a:r>
+            <a:r>
+              <a:rPr>
+                <a:latin typeface="Courier"/>
+              </a:rPr>
+              <a:t>pivot_wider()</a:t>
+            </a:r>
+            <a:r>
+              <a:rPr/>
+              <a:t> to build the Excel-style table. Predict how many rows and columns the wide table will have.</a:t>
             </a:r>
           </a:p>
         </p:txBody>
@@ -7983,7 +7351,120 @@
 </p:sld>
 </file>
 
-<file path=ppt/slides/slide24.xml><?xml version="1.0" encoding="utf-8"?>
+<file path=ppt/slides/slide21.xml><?xml version="1.0" encoding="utf-8"?>
+<p:sld xmlns:a="http://schemas.openxmlformats.org/drawingml/2006/main" xmlns:r="http://schemas.openxmlformats.org/officeDocument/2006/relationships" xmlns:p="http://schemas.openxmlformats.org/presentationml/2006/main">
+  <p:cSld>
+    <p:spTree>
+      <p:nvGrpSpPr>
+        <p:cNvPr id="1" name=""/>
+        <p:cNvGrpSpPr/>
+        <p:nvPr/>
+      </p:nvGrpSpPr>
+      <p:grpSpPr>
+        <a:xfrm>
+          <a:off x="0" y="0"/>
+          <a:ext cx="0" cy="0"/>
+          <a:chOff x="0" y="0"/>
+          <a:chExt cx="0" cy="0"/>
+        </a:xfrm>
+      </p:grpSpPr>
+      <p:sp>
+        <p:nvSpPr>
+          <p:cNvPr id="2" name="Title 1"/>
+          <p:cNvSpPr>
+            <a:spLocks noGrp="1"/>
+          </p:cNvSpPr>
+          <p:nvPr>
+            <p:ph type="title"/>
+          </p:nvPr>
+        </p:nvSpPr>
+        <p:spPr>
+          <a:xfrm>
+            <a:off x="0" y="0"/>
+            <a:ext cx="9144000" cy="582780"/>
+          </a:xfrm>
+        </p:spPr>
+        <p:txBody>
+          <a:bodyPr/>
+          <a:lstStyle/>
+          <a:p>
+            <a:pPr lvl="0" indent="0" marL="0">
+              <a:buNone/>
+            </a:pPr>
+            <a:r>
+              <a:rPr/>
+              <a:t>🧩 Chunk 4 of 4 · Visualize &amp; Model the Trend</a:t>
+            </a:r>
+          </a:p>
+        </p:txBody>
+      </p:sp>
+      <p:sp>
+        <p:nvSpPr>
+          <p:cNvPr id="3" name="Content Placeholder 2"/>
+          <p:cNvSpPr>
+            <a:spLocks noGrp="1"/>
+          </p:cNvSpPr>
+          <p:nvPr>
+            <p:ph idx="1"/>
+          </p:nvPr>
+        </p:nvSpPr>
+        <p:spPr/>
+        <p:txBody>
+          <a:bodyPr/>
+          <a:lstStyle/>
+          <a:p>
+            <a:pPr lvl="0" indent="0" marL="0">
+              <a:buNone/>
+            </a:pPr>
+            <a:r>
+              <a:rPr b="1"/>
+              <a:t>We will cover:</a:t>
+            </a:r>
+            <a:r>
+              <a:rPr/>
+              <a:t> rebuilding NOAA’s spaghetti plot, pulling each year’s peak ice with </a:t>
+            </a:r>
+            <a:r>
+              <a:rPr>
+                <a:latin typeface="Courier"/>
+              </a:rPr>
+              <a:t>slice_max()</a:t>
+            </a:r>
+            <a:r>
+              <a:rPr/>
+              <a:t>, and modeling whether maximum ice cover is declining.</a:t>
+            </a:r>
+          </a:p>
+          <a:p>
+            <a:pPr lvl="0" indent="0" marL="1270000">
+              <a:buNone/>
+            </a:pPr>
+            <a:r>
+              <a:rPr sz="2000" b="1"/>
+              <a:t>Tip</a:t>
+            </a:r>
+          </a:p>
+          <a:p>
+            <a:pPr lvl="0" indent="0" marL="1270000">
+              <a:buNone/>
+            </a:pPr>
+            <a:r>
+              <a:rPr sz="2000" b="1"/>
+              <a:t>🖐 After this chunk: Activity Parts 7–9</a:t>
+            </a:r>
+            <a:r>
+              <a:rPr sz="2000"/>
+              <a:t> (spaghetti plot, yearly maximum, trend model).</a:t>
+            </a:r>
+          </a:p>
+        </p:txBody>
+      </p:sp>
+    </p:spTree>
+  </p:cSld>
+</p:sld>
+</file>
+
+<file path=ppt/slides/slide22.xml><?xml version="1.0" encoding="utf-8"?>
 <p:sld xmlns:a="http://schemas.openxmlformats.org/drawingml/2006/main" xmlns:r="http://schemas.openxmlformats.org/officeDocument/2006/relationships" xmlns:p="http://schemas.openxmlformats.org/presentationml/2006/main">
   <p:cSld>
     <p:spTree>
@@ -8242,7 +7723,7 @@
 </p:sld>
 </file>
 
-<file path=ppt/slides/slide25.xml><?xml version="1.0" encoding="utf-8"?>
+<file path=ppt/slides/slide23.xml><?xml version="1.0" encoding="utf-8"?>
 <p:sld xmlns:a="http://schemas.openxmlformats.org/drawingml/2006/main" xmlns:r="http://schemas.openxmlformats.org/officeDocument/2006/relationships" xmlns:p="http://schemas.openxmlformats.org/presentationml/2006/main">
   <p:cSld>
     <p:spTree>
@@ -9028,7 +8509,7 @@
 </p:sld>
 </file>
 
-<file path=ppt/slides/slide26.xml><?xml version="1.0" encoding="utf-8"?>
+<file path=ppt/slides/slide24.xml><?xml version="1.0" encoding="utf-8"?>
 <p:sld xmlns:a="http://schemas.openxmlformats.org/drawingml/2006/main" xmlns:r="http://schemas.openxmlformats.org/officeDocument/2006/relationships" xmlns:p="http://schemas.openxmlformats.org/presentationml/2006/main">
   <p:cSld>
     <p:spTree>
@@ -10332,6 +9813,502 @@
 </p:sld>
 </file>
 
+<file path=ppt/slides/slide25.xml><?xml version="1.0" encoding="utf-8"?>
+<p:sld xmlns:a="http://schemas.openxmlformats.org/drawingml/2006/main" xmlns:r="http://schemas.openxmlformats.org/officeDocument/2006/relationships" xmlns:p="http://schemas.openxmlformats.org/presentationml/2006/main">
+  <p:cSld>
+    <p:spTree>
+      <p:nvGrpSpPr>
+        <p:cNvPr id="1" name=""/>
+        <p:cNvGrpSpPr/>
+        <p:nvPr/>
+      </p:nvGrpSpPr>
+      <p:grpSpPr>
+        <a:xfrm>
+          <a:off x="0" y="0"/>
+          <a:ext cx="0" cy="0"/>
+          <a:chOff x="0" y="0"/>
+          <a:chExt cx="0" cy="0"/>
+        </a:xfrm>
+      </p:grpSpPr>
+      <p:sp>
+        <p:nvSpPr>
+          <p:cNvPr id="2" name="Title 1"/>
+          <p:cNvSpPr>
+            <a:spLocks noGrp="1"/>
+          </p:cNvSpPr>
+          <p:nvPr>
+            <p:ph type="title"/>
+          </p:nvPr>
+        </p:nvSpPr>
+        <p:spPr>
+          <a:xfrm>
+            <a:off x="0" y="0"/>
+            <a:ext cx="9144000" cy="582780"/>
+          </a:xfrm>
+        </p:spPr>
+        <p:txBody>
+          <a:bodyPr/>
+          <a:lstStyle/>
+          <a:p>
+            <a:pPr lvl="0" indent="0" marL="0">
+              <a:buNone/>
+            </a:pPr>
+            <a:r>
+              <a:rPr/>
+              <a:t>A New Question: Is Maximum Ice Cover Changing?</a:t>
+            </a:r>
+          </a:p>
+        </p:txBody>
+      </p:sp>
+      <p:sp>
+        <p:nvSpPr>
+          <p:cNvPr id="3" name="Content Placeholder 2"/>
+          <p:cNvSpPr>
+            <a:spLocks noGrp="1"/>
+          </p:cNvSpPr>
+          <p:nvPr>
+            <p:ph idx="1"/>
+          </p:nvPr>
+        </p:nvSpPr>
+        <p:spPr/>
+        <p:txBody>
+          <a:bodyPr/>
+          <a:lstStyle/>
+          <a:p>
+            <a:pPr lvl="0" indent="0" marL="1270000">
+              <a:buNone/>
+            </a:pPr>
+            <a:r>
+              <a:rPr sz="2000" b="1"/>
+              <a:t>Note</a:t>
+            </a:r>
+          </a:p>
+          <a:p>
+            <a:pPr lvl="0" indent="0" marL="1270000">
+              <a:buNone/>
+            </a:pPr>
+            <a:r>
+              <a:rPr sz="2000" b="1"/>
+              <a:t>🔮 Predict first:</a:t>
+            </a:r>
+            <a:r>
+              <a:rPr sz="2000"/>
+              <a:t> Over 50+ years, is Lake Superior’s </a:t>
+            </a:r>
+            <a:r>
+              <a:rPr sz="2000" i="1"/>
+              <a:t>maximum</a:t>
+            </a:r>
+            <a:r>
+              <a:rPr sz="2000"/>
+              <a:t> winter ice cover </a:t>
+            </a:r>
+            <a:r>
+              <a:rPr sz="2000" b="1"/>
+              <a:t>declining, flat, or rising</a:t>
+            </a:r>
+            <a:r>
+              <a:rPr sz="2000"/>
+              <a:t>?</a:t>
+            </a:r>
+          </a:p>
+        </p:txBody>
+      </p:sp>
+    </p:spTree>
+  </p:cSld>
+</p:sld>
+</file>
+
+<file path=ppt/slides/slide26.xml><?xml version="1.0" encoding="utf-8"?>
+<p:sld xmlns:a="http://schemas.openxmlformats.org/drawingml/2006/main" xmlns:r="http://schemas.openxmlformats.org/officeDocument/2006/relationships" xmlns:p="http://schemas.openxmlformats.org/presentationml/2006/main">
+  <p:cSld>
+    <p:spTree>
+      <p:nvGrpSpPr>
+        <p:cNvPr id="1" name=""/>
+        <p:cNvGrpSpPr/>
+        <p:nvPr/>
+      </p:nvGrpSpPr>
+      <p:grpSpPr>
+        <a:xfrm>
+          <a:off x="0" y="0"/>
+          <a:ext cx="0" cy="0"/>
+          <a:chOff x="0" y="0"/>
+          <a:chExt cx="0" cy="0"/>
+        </a:xfrm>
+      </p:grpSpPr>
+      <p:sp>
+        <p:nvSpPr>
+          <p:cNvPr id="3" name="Content Placeholder 2"/>
+          <p:cNvSpPr>
+            <a:spLocks noGrp="1"/>
+          </p:cNvSpPr>
+          <p:nvPr>
+            <p:ph idx="1" sz="half"/>
+          </p:nvPr>
+        </p:nvSpPr>
+        <p:spPr/>
+        <p:txBody>
+          <a:bodyPr/>
+          <a:lstStyle/>
+          <a:p>
+            <a:pPr lvl="0"/>
+            <a:r>
+              <a:rPr b="1"/>
+              <a:t>New question:</a:t>
+            </a:r>
+            <a:r>
+              <a:rPr/>
+              <a:t> has each winter’s </a:t>
+            </a:r>
+            <a:r>
+              <a:rPr b="1"/>
+              <a:t>peak</a:t>
+            </a:r>
+            <a:r>
+              <a:rPr/>
+              <a:t> ice cover changed over 50 years?</a:t>
+            </a:r>
+          </a:p>
+          <a:p>
+            <a:pPr lvl="0" indent="0">
+              <a:buNone/>
+            </a:pPr>
+            <a:r>
+              <a:rPr>
+                <a:solidFill>
+                  <a:srgbClr val="5E5E5E"/>
+                </a:solidFill>
+                <a:latin typeface="Courier"/>
+              </a:rPr>
+              <a:t># Find the single highest ice-cover day each year --------</a:t>
+            </a:r>
+            <a:br/>
+            <a:r>
+              <a:rPr>
+                <a:solidFill>
+                  <a:srgbClr val="003B4F"/>
+                </a:solidFill>
+                <a:latin typeface="Courier"/>
+              </a:rPr>
+              <a:t>max_ice_per_year &lt;- ice_clean </a:t>
+            </a:r>
+            <a:r>
+              <a:rPr>
+                <a:solidFill>
+                  <a:srgbClr val="5E5E5E"/>
+                </a:solidFill>
+                <a:latin typeface="Courier"/>
+              </a:rPr>
+              <a:t>%&gt;%</a:t>
+            </a:r>
+            <a:br/>
+            <a:r>
+              <a:rPr>
+                <a:solidFill>
+                  <a:srgbClr val="003B4F"/>
+                </a:solidFill>
+                <a:latin typeface="Courier"/>
+              </a:rPr>
+              <a:t>  </a:t>
+            </a:r>
+            <a:r>
+              <a:rPr>
+                <a:solidFill>
+                  <a:srgbClr val="4758AB"/>
+                </a:solidFill>
+                <a:latin typeface="Courier"/>
+              </a:rPr>
+              <a:t>group_by</a:t>
+            </a:r>
+            <a:r>
+              <a:rPr>
+                <a:solidFill>
+                  <a:srgbClr val="003B4F"/>
+                </a:solidFill>
+                <a:latin typeface="Courier"/>
+              </a:rPr>
+              <a:t>(year) </a:t>
+            </a:r>
+            <a:r>
+              <a:rPr>
+                <a:solidFill>
+                  <a:srgbClr val="5E5E5E"/>
+                </a:solidFill>
+                <a:latin typeface="Courier"/>
+              </a:rPr>
+              <a:t>%&gt;%</a:t>
+            </a:r>
+            <a:br/>
+            <a:r>
+              <a:rPr>
+                <a:solidFill>
+                  <a:srgbClr val="003B4F"/>
+                </a:solidFill>
+                <a:latin typeface="Courier"/>
+              </a:rPr>
+              <a:t>  </a:t>
+            </a:r>
+            <a:r>
+              <a:rPr>
+                <a:solidFill>
+                  <a:srgbClr val="4758AB"/>
+                </a:solidFill>
+                <a:latin typeface="Courier"/>
+              </a:rPr>
+              <a:t>slice_max</a:t>
+            </a:r>
+            <a:r>
+              <a:rPr>
+                <a:solidFill>
+                  <a:srgbClr val="003B4F"/>
+                </a:solidFill>
+                <a:latin typeface="Courier"/>
+              </a:rPr>
+              <a:t>(</a:t>
+            </a:r>
+            <a:r>
+              <a:rPr>
+                <a:solidFill>
+                  <a:srgbClr val="657422"/>
+                </a:solidFill>
+                <a:latin typeface="Courier"/>
+              </a:rPr>
+              <a:t>order_by =</a:t>
+            </a:r>
+            <a:r>
+              <a:rPr>
+                <a:solidFill>
+                  <a:srgbClr val="003B4F"/>
+                </a:solidFill>
+                <a:latin typeface="Courier"/>
+              </a:rPr>
+              <a:t> ice_cover, </a:t>
+            </a:r>
+            <a:r>
+              <a:rPr>
+                <a:solidFill>
+                  <a:srgbClr val="657422"/>
+                </a:solidFill>
+                <a:latin typeface="Courier"/>
+              </a:rPr>
+              <a:t>n =</a:t>
+            </a:r>
+            <a:r>
+              <a:rPr>
+                <a:solidFill>
+                  <a:srgbClr val="003B4F"/>
+                </a:solidFill>
+                <a:latin typeface="Courier"/>
+              </a:rPr>
+              <a:t> </a:t>
+            </a:r>
+            <a:r>
+              <a:rPr>
+                <a:solidFill>
+                  <a:srgbClr val="AD0000"/>
+                </a:solidFill>
+                <a:latin typeface="Courier"/>
+              </a:rPr>
+              <a:t>1</a:t>
+            </a:r>
+            <a:r>
+              <a:rPr>
+                <a:solidFill>
+                  <a:srgbClr val="003B4F"/>
+                </a:solidFill>
+                <a:latin typeface="Courier"/>
+              </a:rPr>
+              <a:t>, </a:t>
+            </a:r>
+            <a:r>
+              <a:rPr>
+                <a:solidFill>
+                  <a:srgbClr val="657422"/>
+                </a:solidFill>
+                <a:latin typeface="Courier"/>
+              </a:rPr>
+              <a:t>with_ties =</a:t>
+            </a:r>
+            <a:r>
+              <a:rPr>
+                <a:solidFill>
+                  <a:srgbClr val="003B4F"/>
+                </a:solidFill>
+                <a:latin typeface="Courier"/>
+              </a:rPr>
+              <a:t> </a:t>
+            </a:r>
+            <a:r>
+              <a:rPr>
+                <a:solidFill>
+                  <a:srgbClr val="8F5902"/>
+                </a:solidFill>
+                <a:latin typeface="Courier"/>
+              </a:rPr>
+              <a:t>FALSE</a:t>
+            </a:r>
+            <a:r>
+              <a:rPr>
+                <a:solidFill>
+                  <a:srgbClr val="003B4F"/>
+                </a:solidFill>
+                <a:latin typeface="Courier"/>
+              </a:rPr>
+              <a:t>)</a:t>
+            </a:r>
+            <a:br/>
+            <a:br/>
+            <a:r>
+              <a:rPr>
+                <a:solidFill>
+                  <a:srgbClr val="4758AB"/>
+                </a:solidFill>
+                <a:latin typeface="Courier"/>
+              </a:rPr>
+              <a:t>head</a:t>
+            </a:r>
+            <a:r>
+              <a:rPr>
+                <a:solidFill>
+                  <a:srgbClr val="003B4F"/>
+                </a:solidFill>
+                <a:latin typeface="Courier"/>
+              </a:rPr>
+              <a:t>(max_ice_per_year </a:t>
+            </a:r>
+            <a:r>
+              <a:rPr>
+                <a:solidFill>
+                  <a:srgbClr val="5E5E5E"/>
+                </a:solidFill>
+                <a:latin typeface="Courier"/>
+              </a:rPr>
+              <a:t>%&gt;%</a:t>
+            </a:r>
+            <a:r>
+              <a:rPr>
+                <a:solidFill>
+                  <a:srgbClr val="003B4F"/>
+                </a:solidFill>
+                <a:latin typeface="Courier"/>
+              </a:rPr>
+              <a:t> </a:t>
+            </a:r>
+            <a:r>
+              <a:rPr>
+                <a:solidFill>
+                  <a:srgbClr val="4758AB"/>
+                </a:solidFill>
+                <a:latin typeface="Courier"/>
+              </a:rPr>
+              <a:t>arrange</a:t>
+            </a:r>
+            <a:r>
+              <a:rPr>
+                <a:solidFill>
+                  <a:srgbClr val="003B4F"/>
+                </a:solidFill>
+                <a:latin typeface="Courier"/>
+              </a:rPr>
+              <a:t>(ice_cover))</a:t>
+            </a:r>
+          </a:p>
+          <a:p>
+            <a:pPr lvl="0" indent="0">
+              <a:buNone/>
+            </a:pPr>
+            <a:r>
+              <a:rPr>
+                <a:latin typeface="Courier"/>
+              </a:rPr>
+              <a:t># A tibble: 6 × 6
+# Groups:   year [6]
+  date    year ice_cover calendar_year full_date  month
+  &lt;chr&gt;  &lt;dbl&gt;     &lt;dbl&gt;         &lt;dbl&gt; &lt;date&gt;     &lt;ord&gt;
+1 Jan-22  2012       8.2          2012 2012-01-22 Jan  
+2 Mar-17  2002      10.3          2002 2002-03-17 Mar  
+3 Jan-16  1998      11.1          1998 1998-01-16 Jan  
+4 Feb-19  2024      12            2024 2024-02-19 Feb  
+5 Jan-25  1987      14.5          1987 1987-01-25 Jan  
+6 Mar-02  2006      16.7          2006 2006-03-02 Mar  </a:t>
+            </a:r>
+          </a:p>
+          <a:p>
+            <a:pPr lvl="0" indent="0" marL="0">
+              <a:buNone/>
+            </a:pPr>
+            <a:r>
+              <a:rPr>
+                <a:latin typeface="Courier"/>
+              </a:rPr>
+              <a:t>slice_max()</a:t>
+            </a:r>
+            <a:r>
+              <a:rPr/>
+              <a:t> keeps only the single row with the highest value in each group — here, one row per year: the date and value of that winter’s ice peak.</a:t>
+            </a:r>
+          </a:p>
+        </p:txBody>
+      </p:sp>
+      <p:sp>
+        <p:nvSpPr>
+          <p:cNvPr id="4" name="Content Placeholder 3"/>
+          <p:cNvSpPr>
+            <a:spLocks noGrp="1"/>
+          </p:cNvSpPr>
+          <p:nvPr>
+            <p:ph idx="2" sz="half"/>
+          </p:nvPr>
+        </p:nvSpPr>
+        <p:spPr/>
+        <p:txBody>
+          <a:bodyPr/>
+          <a:lstStyle/>
+          <a:p>
+            <a:pPr lvl="0" indent="0" marL="0">
+              <a:buNone/>
+            </a:pPr>
+            <a:r>
+              <a:rPr b="1"/>
+              <a:t>This also gives us the “ice-on/ice-off” story:</a:t>
+            </a:r>
+          </a:p>
+          <a:p>
+            <a:pPr lvl="0"/>
+            <a:r>
+              <a:rPr/>
+              <a:t>The </a:t>
+            </a:r>
+            <a:r>
+              <a:rPr b="1"/>
+              <a:t>date</a:t>
+            </a:r>
+            <a:r>
+              <a:rPr/>
+              <a:t> of each year’s maximum is itself meaningful — an early peak (Jan) vs. a late peak (Mar/Apr) tells you something about how long the ice season lasted</a:t>
+            </a:r>
+          </a:p>
+          <a:p>
+            <a:pPr lvl="0"/>
+            <a:r>
+              <a:rPr/>
+              <a:t>1998’s max ice cover was only ~11%, on Jan 16 — a nearly ice-free winter</a:t>
+            </a:r>
+          </a:p>
+          <a:p>
+            <a:pPr lvl="0"/>
+            <a:r>
+              <a:rPr/>
+              <a:t>1979’s max was ~97%, on Feb 25 — almost total coverage</a:t>
+            </a:r>
+          </a:p>
+        </p:txBody>
+      </p:sp>
+    </p:spTree>
+  </p:cSld>
+</p:sld>
+</file>
+
 <file path=ppt/slides/slide27.xml><?xml version="1.0" encoding="utf-8"?>
 <p:sld xmlns:a="http://schemas.openxmlformats.org/drawingml/2006/main" xmlns:r="http://schemas.openxmlformats.org/officeDocument/2006/relationships" xmlns:p="http://schemas.openxmlformats.org/presentationml/2006/main">
   <p:cSld>
@@ -10374,7 +10351,7 @@
             </a:pPr>
             <a:r>
               <a:rPr/>
-              <a:t>A New Question: Is Maximum Ice Cover Changing?</a:t>
+              <a:t>Model the Trend in Maximum Ice Cover</a:t>
             </a:r>
           </a:p>
         </p:txBody>
@@ -10412,23 +10389,25 @@
             </a:r>
             <a:r>
               <a:rPr sz="2000"/>
-              <a:t> Over 50+ years, is Lake Superior’s </a:t>
-            </a:r>
-            <a:r>
-              <a:rPr sz="2000" i="1"/>
-              <a:t>maximum</a:t>
+              <a:t> Given the huge year-to-year scatter in Great Lakes ice, do you expect the slope’s p-value to be </a:t>
+            </a:r>
+            <a:r>
+              <a:rPr sz="2000" b="1"/>
+              <a:t>below or above 0.05</a:t>
             </a:r>
             <a:r>
               <a:rPr sz="2000"/>
-              <a:t> winter ice cover </a:t>
-            </a:r>
-            <a:r>
-              <a:rPr sz="2000" b="1"/>
-              <a:t>declining, flat, or rising</a:t>
+              <a:t>? Predict before you read </a:t>
+            </a:r>
+            <a:r>
+              <a:rPr sz="2000">
+                <a:latin typeface="Courier"/>
+              </a:rPr>
+              <a:t>summary()</a:t>
             </a:r>
             <a:r>
               <a:rPr sz="2000"/>
-              <a:t>?</a:t>
+              <a:t>.</a:t>
             </a:r>
           </a:p>
         </p:txBody>
@@ -10470,790 +10449,6 @@
           <a:bodyPr/>
           <a:lstStyle/>
           <a:p>
-            <a:pPr lvl="0"/>
-            <a:r>
-              <a:rPr b="1"/>
-              <a:t>New question:</a:t>
-            </a:r>
-            <a:r>
-              <a:rPr/>
-              <a:t> has each winter’s </a:t>
-            </a:r>
-            <a:r>
-              <a:rPr b="1"/>
-              <a:t>peak</a:t>
-            </a:r>
-            <a:r>
-              <a:rPr/>
-              <a:t> ice cover changed over 50 years?</a:t>
-            </a:r>
-          </a:p>
-          <a:p>
-            <a:pPr lvl="0" indent="0">
-              <a:buNone/>
-            </a:pPr>
-            <a:r>
-              <a:rPr>
-                <a:solidFill>
-                  <a:srgbClr val="5E5E5E"/>
-                </a:solidFill>
-                <a:latin typeface="Courier"/>
-              </a:rPr>
-              <a:t># Find the single highest ice-cover day each year --------</a:t>
-            </a:r>
-            <a:br/>
-            <a:r>
-              <a:rPr>
-                <a:solidFill>
-                  <a:srgbClr val="003B4F"/>
-                </a:solidFill>
-                <a:latin typeface="Courier"/>
-              </a:rPr>
-              <a:t>max_ice_per_year &lt;- ice_clean </a:t>
-            </a:r>
-            <a:r>
-              <a:rPr>
-                <a:solidFill>
-                  <a:srgbClr val="5E5E5E"/>
-                </a:solidFill>
-                <a:latin typeface="Courier"/>
-              </a:rPr>
-              <a:t>%&gt;%</a:t>
-            </a:r>
-            <a:br/>
-            <a:r>
-              <a:rPr>
-                <a:solidFill>
-                  <a:srgbClr val="003B4F"/>
-                </a:solidFill>
-                <a:latin typeface="Courier"/>
-              </a:rPr>
-              <a:t>  </a:t>
-            </a:r>
-            <a:r>
-              <a:rPr>
-                <a:solidFill>
-                  <a:srgbClr val="4758AB"/>
-                </a:solidFill>
-                <a:latin typeface="Courier"/>
-              </a:rPr>
-              <a:t>group_by</a:t>
-            </a:r>
-            <a:r>
-              <a:rPr>
-                <a:solidFill>
-                  <a:srgbClr val="003B4F"/>
-                </a:solidFill>
-                <a:latin typeface="Courier"/>
-              </a:rPr>
-              <a:t>(year) </a:t>
-            </a:r>
-            <a:r>
-              <a:rPr>
-                <a:solidFill>
-                  <a:srgbClr val="5E5E5E"/>
-                </a:solidFill>
-                <a:latin typeface="Courier"/>
-              </a:rPr>
-              <a:t>%&gt;%</a:t>
-            </a:r>
-            <a:br/>
-            <a:r>
-              <a:rPr>
-                <a:solidFill>
-                  <a:srgbClr val="003B4F"/>
-                </a:solidFill>
-                <a:latin typeface="Courier"/>
-              </a:rPr>
-              <a:t>  </a:t>
-            </a:r>
-            <a:r>
-              <a:rPr>
-                <a:solidFill>
-                  <a:srgbClr val="4758AB"/>
-                </a:solidFill>
-                <a:latin typeface="Courier"/>
-              </a:rPr>
-              <a:t>slice_max</a:t>
-            </a:r>
-            <a:r>
-              <a:rPr>
-                <a:solidFill>
-                  <a:srgbClr val="003B4F"/>
-                </a:solidFill>
-                <a:latin typeface="Courier"/>
-              </a:rPr>
-              <a:t>(</a:t>
-            </a:r>
-            <a:r>
-              <a:rPr>
-                <a:solidFill>
-                  <a:srgbClr val="657422"/>
-                </a:solidFill>
-                <a:latin typeface="Courier"/>
-              </a:rPr>
-              <a:t>order_by =</a:t>
-            </a:r>
-            <a:r>
-              <a:rPr>
-                <a:solidFill>
-                  <a:srgbClr val="003B4F"/>
-                </a:solidFill>
-                <a:latin typeface="Courier"/>
-              </a:rPr>
-              <a:t> ice_cover, </a:t>
-            </a:r>
-            <a:r>
-              <a:rPr>
-                <a:solidFill>
-                  <a:srgbClr val="657422"/>
-                </a:solidFill>
-                <a:latin typeface="Courier"/>
-              </a:rPr>
-              <a:t>n =</a:t>
-            </a:r>
-            <a:r>
-              <a:rPr>
-                <a:solidFill>
-                  <a:srgbClr val="003B4F"/>
-                </a:solidFill>
-                <a:latin typeface="Courier"/>
-              </a:rPr>
-              <a:t> </a:t>
-            </a:r>
-            <a:r>
-              <a:rPr>
-                <a:solidFill>
-                  <a:srgbClr val="AD0000"/>
-                </a:solidFill>
-                <a:latin typeface="Courier"/>
-              </a:rPr>
-              <a:t>1</a:t>
-            </a:r>
-            <a:r>
-              <a:rPr>
-                <a:solidFill>
-                  <a:srgbClr val="003B4F"/>
-                </a:solidFill>
-                <a:latin typeface="Courier"/>
-              </a:rPr>
-              <a:t>, </a:t>
-            </a:r>
-            <a:r>
-              <a:rPr>
-                <a:solidFill>
-                  <a:srgbClr val="657422"/>
-                </a:solidFill>
-                <a:latin typeface="Courier"/>
-              </a:rPr>
-              <a:t>with_ties =</a:t>
-            </a:r>
-            <a:r>
-              <a:rPr>
-                <a:solidFill>
-                  <a:srgbClr val="003B4F"/>
-                </a:solidFill>
-                <a:latin typeface="Courier"/>
-              </a:rPr>
-              <a:t> </a:t>
-            </a:r>
-            <a:r>
-              <a:rPr>
-                <a:solidFill>
-                  <a:srgbClr val="8F5902"/>
-                </a:solidFill>
-                <a:latin typeface="Courier"/>
-              </a:rPr>
-              <a:t>FALSE</a:t>
-            </a:r>
-            <a:r>
-              <a:rPr>
-                <a:solidFill>
-                  <a:srgbClr val="003B4F"/>
-                </a:solidFill>
-                <a:latin typeface="Courier"/>
-              </a:rPr>
-              <a:t>)</a:t>
-            </a:r>
-            <a:br/>
-            <a:br/>
-            <a:r>
-              <a:rPr>
-                <a:solidFill>
-                  <a:srgbClr val="4758AB"/>
-                </a:solidFill>
-                <a:latin typeface="Courier"/>
-              </a:rPr>
-              <a:t>head</a:t>
-            </a:r>
-            <a:r>
-              <a:rPr>
-                <a:solidFill>
-                  <a:srgbClr val="003B4F"/>
-                </a:solidFill>
-                <a:latin typeface="Courier"/>
-              </a:rPr>
-              <a:t>(max_ice_per_year </a:t>
-            </a:r>
-            <a:r>
-              <a:rPr>
-                <a:solidFill>
-                  <a:srgbClr val="5E5E5E"/>
-                </a:solidFill>
-                <a:latin typeface="Courier"/>
-              </a:rPr>
-              <a:t>%&gt;%</a:t>
-            </a:r>
-            <a:r>
-              <a:rPr>
-                <a:solidFill>
-                  <a:srgbClr val="003B4F"/>
-                </a:solidFill>
-                <a:latin typeface="Courier"/>
-              </a:rPr>
-              <a:t> </a:t>
-            </a:r>
-            <a:r>
-              <a:rPr>
-                <a:solidFill>
-                  <a:srgbClr val="4758AB"/>
-                </a:solidFill>
-                <a:latin typeface="Courier"/>
-              </a:rPr>
-              <a:t>arrange</a:t>
-            </a:r>
-            <a:r>
-              <a:rPr>
-                <a:solidFill>
-                  <a:srgbClr val="003B4F"/>
-                </a:solidFill>
-                <a:latin typeface="Courier"/>
-              </a:rPr>
-              <a:t>(ice_cover))</a:t>
-            </a:r>
-          </a:p>
-          <a:p>
-            <a:pPr lvl="0" indent="0">
-              <a:buNone/>
-            </a:pPr>
-            <a:r>
-              <a:rPr>
-                <a:latin typeface="Courier"/>
-              </a:rPr>
-              <a:t># A tibble: 6 × 6
-# Groups:   year [6]
-  date    year ice_cover calendar_year full_date  month
-  &lt;chr&gt;  &lt;dbl&gt;     &lt;dbl&gt;         &lt;dbl&gt; &lt;date&gt;     &lt;ord&gt;
-1 Jan-22  2012       8.2          2012 2012-01-22 Jan  
-2 Mar-17  2002      10.3          2002 2002-03-17 Mar  
-3 Jan-16  1998      11.1          1998 1998-01-16 Jan  
-4 Feb-19  2024      12            2024 2024-02-19 Feb  
-5 Jan-25  1987      14.5          1987 1987-01-25 Jan  
-6 Mar-02  2006      16.7          2006 2006-03-02 Mar  </a:t>
-            </a:r>
-          </a:p>
-          <a:p>
-            <a:pPr lvl="0" indent="0" marL="0">
-              <a:buNone/>
-            </a:pPr>
-            <a:r>
-              <a:rPr>
-                <a:latin typeface="Courier"/>
-              </a:rPr>
-              <a:t>slice_max()</a:t>
-            </a:r>
-            <a:r>
-              <a:rPr/>
-              <a:t> keeps only the single row with the highest value in each group — here, one row per year: the date and value of that winter’s ice peak.</a:t>
-            </a:r>
-          </a:p>
-        </p:txBody>
-      </p:sp>
-      <p:sp>
-        <p:nvSpPr>
-          <p:cNvPr id="4" name="Content Placeholder 3"/>
-          <p:cNvSpPr>
-            <a:spLocks noGrp="1"/>
-          </p:cNvSpPr>
-          <p:nvPr>
-            <p:ph idx="2" sz="half"/>
-          </p:nvPr>
-        </p:nvSpPr>
-        <p:spPr/>
-        <p:txBody>
-          <a:bodyPr/>
-          <a:lstStyle/>
-          <a:p>
-            <a:pPr lvl="0" indent="0" marL="0">
-              <a:buNone/>
-            </a:pPr>
-            <a:r>
-              <a:rPr b="1"/>
-              <a:t>This also gives us the “ice-on/ice-off” story:</a:t>
-            </a:r>
-          </a:p>
-          <a:p>
-            <a:pPr lvl="0"/>
-            <a:r>
-              <a:rPr/>
-              <a:t>The </a:t>
-            </a:r>
-            <a:r>
-              <a:rPr b="1"/>
-              <a:t>date</a:t>
-            </a:r>
-            <a:r>
-              <a:rPr/>
-              <a:t> of each year’s maximum is itself meaningful — an early peak (Jan) vs. a late peak (Mar/Apr) tells you something about how long the ice season lasted</a:t>
-            </a:r>
-          </a:p>
-          <a:p>
-            <a:pPr lvl="0"/>
-            <a:r>
-              <a:rPr/>
-              <a:t>1998’s max ice cover was only ~11%, on Jan 16 — a nearly ice-free winter</a:t>
-            </a:r>
-          </a:p>
-          <a:p>
-            <a:pPr lvl="0"/>
-            <a:r>
-              <a:rPr/>
-              <a:t>1979’s max was ~97%, on Feb 25 — almost total coverage</a:t>
-            </a:r>
-          </a:p>
-        </p:txBody>
-      </p:sp>
-    </p:spTree>
-  </p:cSld>
-</p:sld>
-</file>
-
-<file path=ppt/slides/slide29.xml><?xml version="1.0" encoding="utf-8"?>
-<p:sld xmlns:a="http://schemas.openxmlformats.org/drawingml/2006/main" xmlns:r="http://schemas.openxmlformats.org/officeDocument/2006/relationships" xmlns:p="http://schemas.openxmlformats.org/presentationml/2006/main">
-  <p:cSld>
-    <p:spTree>
-      <p:nvGrpSpPr>
-        <p:cNvPr id="1" name=""/>
-        <p:cNvGrpSpPr/>
-        <p:nvPr/>
-      </p:nvGrpSpPr>
-      <p:grpSpPr>
-        <a:xfrm>
-          <a:off x="0" y="0"/>
-          <a:ext cx="0" cy="0"/>
-          <a:chOff x="0" y="0"/>
-          <a:chExt cx="0" cy="0"/>
-        </a:xfrm>
-      </p:grpSpPr>
-      <p:sp>
-        <p:nvSpPr>
-          <p:cNvPr id="2" name="Title 1"/>
-          <p:cNvSpPr>
-            <a:spLocks noGrp="1"/>
-          </p:cNvSpPr>
-          <p:nvPr>
-            <p:ph type="title"/>
-          </p:nvPr>
-        </p:nvSpPr>
-        <p:spPr>
-          <a:xfrm>
-            <a:off x="0" y="0"/>
-            <a:ext cx="9144000" cy="582780"/>
-          </a:xfrm>
-        </p:spPr>
-        <p:txBody>
-          <a:bodyPr/>
-          <a:lstStyle/>
-          <a:p>
-            <a:pPr lvl="0" indent="0" marL="0">
-              <a:buNone/>
-            </a:pPr>
-            <a:r>
-              <a:rPr/>
-              <a:t>Model the Trend in Maximum Ice Cover</a:t>
-            </a:r>
-          </a:p>
-        </p:txBody>
-      </p:sp>
-      <p:sp>
-        <p:nvSpPr>
-          <p:cNvPr id="3" name="Content Placeholder 2"/>
-          <p:cNvSpPr>
-            <a:spLocks noGrp="1"/>
-          </p:cNvSpPr>
-          <p:nvPr>
-            <p:ph idx="1"/>
-          </p:nvPr>
-        </p:nvSpPr>
-        <p:spPr/>
-        <p:txBody>
-          <a:bodyPr/>
-          <a:lstStyle/>
-          <a:p>
-            <a:pPr lvl="0" indent="0" marL="1270000">
-              <a:buNone/>
-            </a:pPr>
-            <a:r>
-              <a:rPr sz="2000" b="1"/>
-              <a:t>Note</a:t>
-            </a:r>
-          </a:p>
-          <a:p>
-            <a:pPr lvl="0" indent="0" marL="1270000">
-              <a:buNone/>
-            </a:pPr>
-            <a:r>
-              <a:rPr sz="2000" b="1"/>
-              <a:t>🔮 Predict first:</a:t>
-            </a:r>
-            <a:r>
-              <a:rPr sz="2000"/>
-              <a:t> Given the huge year-to-year scatter in Great Lakes ice, do you expect the slope’s p-value to be </a:t>
-            </a:r>
-            <a:r>
-              <a:rPr sz="2000" b="1"/>
-              <a:t>below or above 0.05</a:t>
-            </a:r>
-            <a:r>
-              <a:rPr sz="2000"/>
-              <a:t>? Predict before you read </a:t>
-            </a:r>
-            <a:r>
-              <a:rPr sz="2000">
-                <a:latin typeface="Courier"/>
-              </a:rPr>
-              <a:t>summary()</a:t>
-            </a:r>
-            <a:r>
-              <a:rPr sz="2000"/>
-              <a:t>.</a:t>
-            </a:r>
-          </a:p>
-        </p:txBody>
-      </p:sp>
-    </p:spTree>
-  </p:cSld>
-</p:sld>
-</file>
-
-<file path=ppt/slides/slide3.xml><?xml version="1.0" encoding="utf-8"?>
-<p:sld xmlns:a="http://schemas.openxmlformats.org/drawingml/2006/main" xmlns:r="http://schemas.openxmlformats.org/officeDocument/2006/relationships" xmlns:p="http://schemas.openxmlformats.org/presentationml/2006/main">
-  <p:cSld>
-    <p:spTree>
-      <p:nvGrpSpPr>
-        <p:cNvPr id="1" name=""/>
-        <p:cNvGrpSpPr/>
-        <p:nvPr/>
-      </p:nvGrpSpPr>
-      <p:grpSpPr>
-        <a:xfrm>
-          <a:off x="0" y="0"/>
-          <a:ext cx="0" cy="0"/>
-          <a:chOff x="0" y="0"/>
-          <a:chExt cx="0" cy="0"/>
-        </a:xfrm>
-      </p:grpSpPr>
-      <p:sp>
-        <p:nvSpPr>
-          <p:cNvPr id="2" name="Title 1"/>
-          <p:cNvSpPr>
-            <a:spLocks noGrp="1"/>
-          </p:cNvSpPr>
-          <p:nvPr>
-            <p:ph type="title"/>
-          </p:nvPr>
-        </p:nvSpPr>
-        <p:spPr>
-          <a:xfrm>
-            <a:off x="0" y="0"/>
-            <a:ext cx="9144000" cy="602780"/>
-          </a:xfrm>
-          <a:solidFill>
-            <a:srgbClr val="1A1A2E"/>
-          </a:solidFill>
-        </p:spPr>
-        <p:txBody>
-          <a:bodyPr/>
-          <a:lstStyle/>
-          <a:p>
-            <a:pPr lvl="0" indent="0" marL="0">
-              <a:buNone/>
-            </a:pPr>
-            <a:r>
-              <a:rPr/>
-              <a:t>Goals for Today</a:t>
-            </a:r>
-          </a:p>
-        </p:txBody>
-      </p:sp>
-      <p:sp>
-        <p:nvSpPr>
-          <p:cNvPr id="3" name="Content Placeholder 2"/>
-          <p:cNvSpPr>
-            <a:spLocks noGrp="1"/>
-          </p:cNvSpPr>
-          <p:nvPr>
-            <p:ph idx="1" sz="half"/>
-          </p:nvPr>
-        </p:nvSpPr>
-        <p:spPr/>
-        <p:txBody>
-          <a:bodyPr/>
-          <a:lstStyle/>
-          <a:p>
-            <a:pPr lvl="0"/>
-            <a:r>
-              <a:rPr/>
-              <a:t>Download a genuinely </a:t>
-            </a:r>
-            <a:r>
-              <a:rPr b="1"/>
-              <a:t>messy, wide</a:t>
-            </a:r>
-            <a:r>
-              <a:rPr/>
-              <a:t> real-world dataset — Lake Superior daily ice cover</a:t>
-            </a:r>
-          </a:p>
-          <a:p>
-            <a:pPr lvl="0"/>
-            <a:r>
-              <a:rPr/>
-              <a:t>Understand </a:t>
-            </a:r>
-            <a:r>
-              <a:rPr b="1"/>
-              <a:t>why</a:t>
-            </a:r>
-            <a:r>
-              <a:rPr/>
-              <a:t> wide data is hard for R (and great for humans)</a:t>
-            </a:r>
-          </a:p>
-          <a:p>
-            <a:pPr lvl="0"/>
-            <a:r>
-              <a:rPr/>
-              <a:t>Learn </a:t>
-            </a:r>
-            <a:r>
-              <a:rPr>
-                <a:latin typeface="Courier"/>
-              </a:rPr>
-              <a:t>pivot_longer()</a:t>
-            </a:r>
-            <a:r>
-              <a:rPr/>
-              <a:t> — turn wide data into tidy long data</a:t>
-            </a:r>
-          </a:p>
-          <a:p>
-            <a:pPr lvl="0"/>
-            <a:r>
-              <a:rPr/>
-              <a:t>Learn </a:t>
-            </a:r>
-            <a:r>
-              <a:rPr>
-                <a:latin typeface="Courier"/>
-              </a:rPr>
-              <a:t>pivot_wider()</a:t>
-            </a:r>
-            <a:r>
-              <a:rPr/>
-              <a:t> — turn long data back into a human-readable summary table</a:t>
-            </a:r>
-          </a:p>
-          <a:p>
-            <a:pPr lvl="0"/>
-            <a:r>
-              <a:rPr/>
-              <a:t>Handle a tricky real-world wrinkle: </a:t>
-            </a:r>
-            <a:r>
-              <a:rPr b="1"/>
-              <a:t>winter seasons that cross the new year</a:t>
-            </a:r>
-          </a:p>
-          <a:p>
-            <a:pPr lvl="0"/>
-            <a:r>
-              <a:rPr/>
-              <a:t>Recreate NOAA’s own “spaghetti plot” comparing every year of ice cover</a:t>
-            </a:r>
-          </a:p>
-          <a:p>
-            <a:pPr lvl="0"/>
-            <a:r>
-              <a:rPr/>
-              <a:t>Ask: is Lake Superior’s </a:t>
-            </a:r>
-            <a:r>
-              <a:rPr b="1"/>
-              <a:t>maximum ice cover</a:t>
-            </a:r>
-            <a:r>
-              <a:rPr/>
-              <a:t> changing over time?</a:t>
-            </a:r>
-          </a:p>
-          <a:p>
-            <a:pPr lvl="0" indent="0" marL="1270000">
-              <a:buNone/>
-            </a:pPr>
-            <a:r>
-              <a:rPr sz="2000" b="1"/>
-              <a:t>Tip</a:t>
-            </a:r>
-          </a:p>
-          <a:p>
-            <a:pPr lvl="0" indent="0" marL="1270000">
-              <a:buNone/>
-            </a:pPr>
-            <a:r>
-              <a:rPr sz="2000" b="1"/>
-              <a:t>🖐 Try it yourself</a:t>
-            </a:r>
-          </a:p>
-          <a:p>
-            <a:pPr lvl="0" indent="0" marL="1270000">
-              <a:buNone/>
-            </a:pPr>
-            <a:r>
-              <a:rPr sz="2000"/>
-              <a:t>By the end you’ll have reshaped real NOAA ice data and built the same kind of plot NOAA scientists publish.</a:t>
-            </a:r>
-          </a:p>
-        </p:txBody>
-      </p:sp>
-      <p:sp>
-        <p:nvSpPr>
-          <p:cNvPr id="4" name="Content Placeholder 3"/>
-          <p:cNvSpPr>
-            <a:spLocks noGrp="1"/>
-          </p:cNvSpPr>
-          <p:nvPr>
-            <p:ph idx="2" sz="half"/>
-          </p:nvPr>
-        </p:nvSpPr>
-        <p:spPr/>
-        <p:txBody>
-          <a:bodyPr/>
-          <a:lstStyle/>
-          <a:p>
-            <a:pPr lvl="0" indent="0" marL="0">
-              <a:buNone/>
-            </a:pPr>
-            <a:r>
-              <a:rPr b="1"/>
-              <a:t>Tools today:</a:t>
-            </a:r>
-          </a:p>
-          <a:p>
-            <a:pPr lvl="0"/>
-            <a:r>
-              <a:rPr>
-                <a:latin typeface="Courier"/>
-              </a:rPr>
-              <a:t>tidyverse</a:t>
-            </a:r>
-            <a:r>
-              <a:rPr/>
-              <a:t>, </a:t>
-            </a:r>
-            <a:r>
-              <a:rPr>
-                <a:latin typeface="Courier"/>
-              </a:rPr>
-              <a:t>janitor</a:t>
-            </a:r>
-          </a:p>
-          <a:p>
-            <a:pPr lvl="0" indent="0" marL="0">
-              <a:buNone/>
-            </a:pPr>
-            <a:r>
-              <a:rPr b="1"/>
-              <a:t>Textbook:</a:t>
-            </a:r>
-          </a:p>
-          <a:p>
-            <a:pPr lvl="0"/>
-            <a:r>
-              <a:rPr/>
-              <a:t>📖 R4DS 2e — Hadley Wickham</a:t>
-            </a:r>
-          </a:p>
-          <a:p>
-            <a:pPr lvl="1"/>
-            <a:r>
-              <a:rPr>
-                <a:hlinkClick r:id="rId2"/>
-              </a:rPr>
-              <a:t>Ch. 5 Data tidying</a:t>
-            </a:r>
-          </a:p>
-          <a:p>
-            <a:pPr lvl="1"/>
-            <a:r>
-              <a:rPr>
-                <a:hlinkClick r:id="rId3"/>
-              </a:rPr>
-              <a:t>Ch. 17 Dates and times</a:t>
-            </a:r>
-          </a:p>
-          <a:p>
-            <a:pPr lvl="0"/>
-            <a:r>
-              <a:rPr/>
-              <a:t>📖 Data Carpentry — </a:t>
-            </a:r>
-            <a:r>
-              <a:rPr>
-                <a:hlinkClick r:id="rId4"/>
-              </a:rPr>
-              <a:t>R for Ecologists</a:t>
-            </a:r>
-          </a:p>
-        </p:txBody>
-      </p:sp>
-    </p:spTree>
-  </p:cSld>
-</p:sld>
-</file>
-
-<file path=ppt/slides/slide30.xml><?xml version="1.0" encoding="utf-8"?>
-<p:sld xmlns:a="http://schemas.openxmlformats.org/drawingml/2006/main" xmlns:r="http://schemas.openxmlformats.org/officeDocument/2006/relationships" xmlns:p="http://schemas.openxmlformats.org/presentationml/2006/main">
-  <p:cSld>
-    <p:spTree>
-      <p:nvGrpSpPr>
-        <p:cNvPr id="1" name=""/>
-        <p:cNvGrpSpPr/>
-        <p:nvPr/>
-      </p:nvGrpSpPr>
-      <p:grpSpPr>
-        <a:xfrm>
-          <a:off x="0" y="0"/>
-          <a:ext cx="0" cy="0"/>
-          <a:chOff x="0" y="0"/>
-          <a:chExt cx="0" cy="0"/>
-        </a:xfrm>
-      </p:grpSpPr>
-      <p:sp>
-        <p:nvSpPr>
-          <p:cNvPr id="3" name="Content Placeholder 2"/>
-          <p:cNvSpPr>
-            <a:spLocks noGrp="1"/>
-          </p:cNvSpPr>
-          <p:nvPr>
-            <p:ph idx="1" sz="half"/>
-          </p:nvPr>
-        </p:nvSpPr>
-        <p:spPr/>
-        <p:txBody>
-          <a:bodyPr/>
-          <a:lstStyle/>
-          <a:p>
             <a:pPr lvl="0" indent="0">
               <a:buNone/>
             </a:pPr>
@@ -11507,7 +10702,7 @@
 </p:sld>
 </file>
 
-<file path=ppt/slides/slide31.xml><?xml version="1.0" encoding="utf-8"?>
+<file path=ppt/slides/slide29.xml><?xml version="1.0" encoding="utf-8"?>
 <p:sld xmlns:a="http://schemas.openxmlformats.org/drawingml/2006/main" xmlns:r="http://schemas.openxmlformats.org/officeDocument/2006/relationships" xmlns:p="http://schemas.openxmlformats.org/presentationml/2006/main">
   <p:cSld>
     <p:spTree>
@@ -12178,7 +11373,7 @@
 </p:sld>
 </file>
 
-<file path=ppt/slides/slide32.xml><?xml version="1.0" encoding="utf-8"?>
+<file path=ppt/slides/slide3.xml><?xml version="1.0" encoding="utf-8"?>
 <p:sld xmlns:a="http://schemas.openxmlformats.org/drawingml/2006/main" xmlns:r="http://schemas.openxmlformats.org/officeDocument/2006/relationships" xmlns:p="http://schemas.openxmlformats.org/presentationml/2006/main">
   <p:cSld>
     <p:spTree>
@@ -12208,8 +11403,11 @@
         <p:spPr>
           <a:xfrm>
             <a:off x="0" y="0"/>
-            <a:ext cx="9144000" cy="582780"/>
+            <a:ext cx="9144000" cy="602780"/>
           </a:xfrm>
+          <a:solidFill>
+            <a:srgbClr val="1A1A2E"/>
+          </a:solidFill>
         </p:spPr>
         <p:txBody>
           <a:bodyPr/>
@@ -12220,7 +11418,7 @@
             </a:pPr>
             <a:r>
               <a:rPr/>
-              <a:t>🛑 Pause — Do Activity Parts 7–9 Now</a:t>
+              <a:t>Goals for Today</a:t>
             </a:r>
           </a:p>
         </p:txBody>
@@ -12232,7 +11430,7 @@
             <a:spLocks noGrp="1"/>
           </p:cNvSpPr>
           <p:nvPr>
-            <p:ph idx="1"/>
+            <p:ph idx="1" sz="half"/>
           </p:nvPr>
         </p:nvSpPr>
         <p:spPr/>
@@ -12240,32 +11438,218 @@
           <a:bodyPr/>
           <a:lstStyle/>
           <a:p>
+            <a:pPr lvl="0"/>
+            <a:r>
+              <a:rPr/>
+              <a:t>Download a genuinely </a:t>
+            </a:r>
+            <a:r>
+              <a:rPr b="1"/>
+              <a:t>messy, wide</a:t>
+            </a:r>
+            <a:r>
+              <a:rPr/>
+              <a:t> real-world dataset — Lake Superior daily ice cover</a:t>
+            </a:r>
+          </a:p>
+          <a:p>
+            <a:pPr lvl="0"/>
+            <a:r>
+              <a:rPr/>
+              <a:t>Understand </a:t>
+            </a:r>
+            <a:r>
+              <a:rPr b="1"/>
+              <a:t>why</a:t>
+            </a:r>
+            <a:r>
+              <a:rPr/>
+              <a:t> wide data is hard for R (and great for humans)</a:t>
+            </a:r>
+          </a:p>
+          <a:p>
+            <a:pPr lvl="0"/>
+            <a:r>
+              <a:rPr/>
+              <a:t>Learn </a:t>
+            </a:r>
+            <a:r>
+              <a:rPr>
+                <a:latin typeface="Courier"/>
+              </a:rPr>
+              <a:t>pivot_longer()</a:t>
+            </a:r>
+            <a:r>
+              <a:rPr/>
+              <a:t> — turn wide data into tidy long data</a:t>
+            </a:r>
+          </a:p>
+          <a:p>
+            <a:pPr lvl="0"/>
+            <a:r>
+              <a:rPr/>
+              <a:t>Learn </a:t>
+            </a:r>
+            <a:r>
+              <a:rPr>
+                <a:latin typeface="Courier"/>
+              </a:rPr>
+              <a:t>pivot_wider()</a:t>
+            </a:r>
+            <a:r>
+              <a:rPr/>
+              <a:t> — turn long data back into a human-readable summary table</a:t>
+            </a:r>
+          </a:p>
+          <a:p>
+            <a:pPr lvl="0"/>
+            <a:r>
+              <a:rPr/>
+              <a:t>Handle a tricky real-world wrinkle: </a:t>
+            </a:r>
+            <a:r>
+              <a:rPr b="1"/>
+              <a:t>winter seasons that cross the new year</a:t>
+            </a:r>
+          </a:p>
+          <a:p>
+            <a:pPr lvl="0"/>
+            <a:r>
+              <a:rPr/>
+              <a:t>Recreate NOAA’s own “spaghetti plot” comparing every year of ice cover</a:t>
+            </a:r>
+          </a:p>
+          <a:p>
+            <a:pPr lvl="0"/>
+            <a:r>
+              <a:rPr/>
+              <a:t>Ask: is Lake Superior’s </a:t>
+            </a:r>
+            <a:r>
+              <a:rPr b="1"/>
+              <a:t>maximum ice cover</a:t>
+            </a:r>
+            <a:r>
+              <a:rPr/>
+              <a:t> changing over time?</a:t>
+            </a:r>
+          </a:p>
+          <a:p>
+            <a:pPr lvl="0" indent="0" marL="1270000">
+              <a:buNone/>
+            </a:pPr>
+            <a:r>
+              <a:rPr sz="2000" b="1"/>
+              <a:t>Tip</a:t>
+            </a:r>
+          </a:p>
+          <a:p>
+            <a:pPr lvl="0" indent="0" marL="1270000">
+              <a:buNone/>
+            </a:pPr>
+            <a:r>
+              <a:rPr sz="2000" b="1"/>
+              <a:t>🖐 Try it yourself</a:t>
+            </a:r>
+          </a:p>
+          <a:p>
+            <a:pPr lvl="0" indent="0" marL="1270000">
+              <a:buNone/>
+            </a:pPr>
+            <a:r>
+              <a:rPr sz="2000"/>
+              <a:t>By the end you’ll have reshaped real NOAA ice data and built the same kind of plot NOAA scientists publish.</a:t>
+            </a:r>
+          </a:p>
+        </p:txBody>
+      </p:sp>
+      <p:sp>
+        <p:nvSpPr>
+          <p:cNvPr id="4" name="Content Placeholder 3"/>
+          <p:cNvSpPr>
+            <a:spLocks noGrp="1"/>
+          </p:cNvSpPr>
+          <p:nvPr>
+            <p:ph idx="2" sz="half"/>
+          </p:nvPr>
+        </p:nvSpPr>
+        <p:spPr/>
+        <p:txBody>
+          <a:bodyPr/>
+          <a:lstStyle/>
+          <a:p>
             <a:pPr lvl="0" indent="0" marL="0">
               <a:buNone/>
             </a:pPr>
             <a:r>
-              <a:rPr/>
-              <a:t>Build the spaghetti plot, pull each winter’s peak with </a:t>
-            </a:r>
-            <a:r>
-              <a:rPr>
-                <a:latin typeface="Courier"/>
-              </a:rPr>
-              <a:t>slice_max()</a:t>
-            </a:r>
-            <a:r>
-              <a:rPr/>
-              <a:t>, and fit </a:t>
-            </a:r>
-            <a:r>
-              <a:rPr>
-                <a:latin typeface="Courier"/>
-              </a:rPr>
-              <a:t>lm(ice_cover ~ year)</a:t>
-            </a:r>
-            <a:r>
-              <a:rPr/>
-              <a:t>. Predict the trend’s direction and significance before you run it.</a:t>
+              <a:rPr b="1"/>
+              <a:t>Tools today:</a:t>
+            </a:r>
+          </a:p>
+          <a:p>
+            <a:pPr lvl="0"/>
+            <a:r>
+              <a:rPr>
+                <a:latin typeface="Courier"/>
+              </a:rPr>
+              <a:t>tidyverse</a:t>
+            </a:r>
+            <a:r>
+              <a:rPr/>
+              <a:t>, </a:t>
+            </a:r>
+            <a:r>
+              <a:rPr>
+                <a:latin typeface="Courier"/>
+              </a:rPr>
+              <a:t>janitor</a:t>
+            </a:r>
+          </a:p>
+          <a:p>
+            <a:pPr lvl="0" indent="0" marL="0">
+              <a:buNone/>
+            </a:pPr>
+            <a:r>
+              <a:rPr b="1"/>
+              <a:t>Textbook:</a:t>
+            </a:r>
+          </a:p>
+          <a:p>
+            <a:pPr lvl="0"/>
+            <a:r>
+              <a:rPr/>
+              <a:t>📖 R4DS 2e — Hadley Wickham</a:t>
+            </a:r>
+          </a:p>
+          <a:p>
+            <a:pPr lvl="1"/>
+            <a:r>
+              <a:rPr>
+                <a:hlinkClick r:id="rId2"/>
+              </a:rPr>
+              <a:t>Ch. 5 Data tidying</a:t>
+            </a:r>
+          </a:p>
+          <a:p>
+            <a:pPr lvl="1"/>
+            <a:r>
+              <a:rPr>
+                <a:hlinkClick r:id="rId3"/>
+              </a:rPr>
+              <a:t>Ch. 17 Dates and times</a:t>
+            </a:r>
+          </a:p>
+          <a:p>
+            <a:pPr lvl="0"/>
+            <a:r>
+              <a:rPr/>
+              <a:t>📖 Data Carpentry — </a:t>
+            </a:r>
+            <a:r>
+              <a:rPr>
+                <a:hlinkClick r:id="rId4"/>
+              </a:rPr>
+              <a:t>R for Ecologists</a:t>
             </a:r>
           </a:p>
         </p:txBody>
@@ -12275,7 +11659,104 @@
 </p:sld>
 </file>
 
-<file path=ppt/slides/slide33.xml><?xml version="1.0" encoding="utf-8"?>
+<file path=ppt/slides/slide30.xml><?xml version="1.0" encoding="utf-8"?>
+<p:sld xmlns:a="http://schemas.openxmlformats.org/drawingml/2006/main" xmlns:r="http://schemas.openxmlformats.org/officeDocument/2006/relationships" xmlns:p="http://schemas.openxmlformats.org/presentationml/2006/main">
+  <p:cSld>
+    <p:spTree>
+      <p:nvGrpSpPr>
+        <p:cNvPr id="1" name=""/>
+        <p:cNvGrpSpPr/>
+        <p:nvPr/>
+      </p:nvGrpSpPr>
+      <p:grpSpPr>
+        <a:xfrm>
+          <a:off x="0" y="0"/>
+          <a:ext cx="0" cy="0"/>
+          <a:chOff x="0" y="0"/>
+          <a:chExt cx="0" cy="0"/>
+        </a:xfrm>
+      </p:grpSpPr>
+      <p:sp>
+        <p:nvSpPr>
+          <p:cNvPr id="2" name="Title 1"/>
+          <p:cNvSpPr>
+            <a:spLocks noGrp="1"/>
+          </p:cNvSpPr>
+          <p:nvPr>
+            <p:ph type="title"/>
+          </p:nvPr>
+        </p:nvSpPr>
+        <p:spPr>
+          <a:xfrm>
+            <a:off x="0" y="0"/>
+            <a:ext cx="9144000" cy="582780"/>
+          </a:xfrm>
+        </p:spPr>
+        <p:txBody>
+          <a:bodyPr/>
+          <a:lstStyle/>
+          <a:p>
+            <a:pPr lvl="0" indent="0" marL="0">
+              <a:buNone/>
+            </a:pPr>
+            <a:r>
+              <a:rPr/>
+              <a:t>🛑 Pause — Do Activity Parts 7–9 Now</a:t>
+            </a:r>
+          </a:p>
+        </p:txBody>
+      </p:sp>
+      <p:sp>
+        <p:nvSpPr>
+          <p:cNvPr id="3" name="Content Placeholder 2"/>
+          <p:cNvSpPr>
+            <a:spLocks noGrp="1"/>
+          </p:cNvSpPr>
+          <p:nvPr>
+            <p:ph idx="1"/>
+          </p:nvPr>
+        </p:nvSpPr>
+        <p:spPr/>
+        <p:txBody>
+          <a:bodyPr/>
+          <a:lstStyle/>
+          <a:p>
+            <a:pPr lvl="0" indent="0" marL="0">
+              <a:buNone/>
+            </a:pPr>
+            <a:r>
+              <a:rPr/>
+              <a:t>Build the spaghetti plot, pull each winter’s peak with </a:t>
+            </a:r>
+            <a:r>
+              <a:rPr>
+                <a:latin typeface="Courier"/>
+              </a:rPr>
+              <a:t>slice_max()</a:t>
+            </a:r>
+            <a:r>
+              <a:rPr/>
+              <a:t>, and fit </a:t>
+            </a:r>
+            <a:r>
+              <a:rPr>
+                <a:latin typeface="Courier"/>
+              </a:rPr>
+              <a:t>lm(ice_cover ~ year)</a:t>
+            </a:r>
+            <a:r>
+              <a:rPr/>
+              <a:t>. Predict the trend’s direction and significance before you run it.</a:t>
+            </a:r>
+          </a:p>
+        </p:txBody>
+      </p:sp>
+    </p:spTree>
+  </p:cSld>
+</p:sld>
+</file>
+
+<file path=ppt/slides/slide31.xml><?xml version="1.0" encoding="utf-8"?>
 <p:sld xmlns:a="http://schemas.openxmlformats.org/drawingml/2006/main" xmlns:r="http://schemas.openxmlformats.org/officeDocument/2006/relationships" xmlns:p="http://schemas.openxmlformats.org/presentationml/2006/main">
   <p:cSld>
     <p:spTree>
@@ -12694,11 +12175,8 @@
         <p:spPr>
           <a:xfrm>
             <a:off x="0" y="0"/>
-            <a:ext cx="9144000" cy="602780"/>
+            <a:ext cx="9144000" cy="582780"/>
           </a:xfrm>
-          <a:solidFill>
-            <a:srgbClr val="1A1A2E"/>
-          </a:solidFill>
         </p:spPr>
         <p:txBody>
           <a:bodyPr/>
@@ -12709,7 +12187,7 @@
             </a:pPr>
             <a:r>
               <a:rPr/>
-              <a:t>How to Use These Slides — Predict · Type · Run</a:t>
+              <a:t>🧩 Chunk 1 of 4 · Why Wide Data Is a Problem</a:t>
             </a:r>
           </a:p>
         </p:txBody>
@@ -12721,7 +12199,7 @@
             <a:spLocks noGrp="1"/>
           </p:cNvSpPr>
           <p:nvPr>
-            <p:ph idx="1" sz="half"/>
+            <p:ph idx="1"/>
           </p:nvPr>
         </p:nvSpPr>
         <p:spPr/>
@@ -12733,197 +12211,34 @@
               <a:buNone/>
             </a:pPr>
             <a:r>
-              <a:rPr/>
-              <a:t>This lecture runs in </a:t>
-            </a:r>
-            <a:r>
               <a:rPr b="1"/>
-              <a:t>four short chunks</a:t>
-            </a:r>
-            <a:r>
-              <a:rPr/>
-              <a:t>. After each chunk you switch to the </a:t>
-            </a:r>
-            <a:r>
-              <a:rPr b="1"/>
-              <a:t>activity</a:t>
-            </a:r>
-            <a:r>
-              <a:rPr/>
-              <a:t> and type the code yourself.</a:t>
-            </a:r>
-          </a:p>
-          <a:p>
-            <a:pPr lvl="0" indent="0" marL="0">
+              <a:t>We will cover:</a:t>
+            </a:r>
+            <a:r>
+              <a:rPr/>
+              <a:t> where the ice data comes from, why “wide” data breaks tidy tools, and reading the messy text file into R.</a:t>
+            </a:r>
+          </a:p>
+          <a:p>
+            <a:pPr lvl="0" indent="0" marL="1270000">
               <a:buNone/>
             </a:pPr>
             <a:r>
-              <a:rPr b="1"/>
-              <a:t>For every code block, do three things:</a:t>
-            </a:r>
-          </a:p>
-          <a:p>
-            <a:pPr lvl="0" indent="-342900" marL="342900">
-              <a:buAutoNum type="arabicPeriod"/>
+              <a:rPr sz="2000" b="1"/>
+              <a:t>Tip</a:t>
+            </a:r>
+          </a:p>
+          <a:p>
+            <a:pPr lvl="0" indent="0" marL="1270000">
+              <a:buNone/>
             </a:pPr>
             <a:r>
-              <a:rPr b="1"/>
-              <a:t>Predict</a:t>
-            </a:r>
-            <a:r>
-              <a:rPr/>
-              <a:t> — before it runs, say what you think the output will be</a:t>
-            </a:r>
-          </a:p>
-          <a:p>
-            <a:pPr lvl="0" indent="-342900" marL="342900">
-              <a:buAutoNum type="arabicPeriod"/>
-            </a:pPr>
-            <a:r>
-              <a:rPr b="1"/>
-              <a:t>Type</a:t>
-            </a:r>
-            <a:r>
-              <a:rPr/>
-              <a:t> it out by hand — do not copy-paste</a:t>
-            </a:r>
-          </a:p>
-          <a:p>
-            <a:pPr lvl="0" indent="-342900" marL="342900">
-              <a:buAutoNum type="arabicPeriod"/>
-            </a:pPr>
-            <a:r>
-              <a:rPr b="1"/>
-              <a:t>Run</a:t>
-            </a:r>
-            <a:r>
-              <a:rPr/>
-              <a:t> it and compare to your prediction</a:t>
-            </a:r>
-          </a:p>
-        </p:txBody>
-      </p:sp>
-      <p:sp>
-        <p:nvSpPr>
-          <p:cNvPr id="4" name="Content Placeholder 3"/>
-          <p:cNvSpPr>
-            <a:spLocks noGrp="1"/>
-          </p:cNvSpPr>
-          <p:nvPr>
-            <p:ph idx="2" sz="half"/>
-          </p:nvPr>
-        </p:nvSpPr>
-        <p:spPr/>
-        <p:txBody>
-          <a:bodyPr/>
-          <a:lstStyle/>
-          <a:p>
-            <a:pPr lvl="0" indent="0" marL="1270000">
-              <a:buNone/>
-            </a:pPr>
-            <a:r>
               <a:rPr sz="2000" b="1"/>
-              <a:t>Note</a:t>
-            </a:r>
-          </a:p>
-          <a:p>
-            <a:pPr lvl="0" indent="0" marL="1270000">
-              <a:buNone/>
-            </a:pPr>
-            <a:r>
-              <a:rPr sz="2000" b="1"/>
-              <a:t>✅ Why bother? (the evidence)</a:t>
-            </a:r>
-          </a:p>
-          <a:p>
-            <a:pPr lvl="0"/>
+              <a:t>🖐 After this chunk: Activity Parts 1–2</a:t>
+            </a:r>
             <a:r>
               <a:rPr sz="2000"/>
-              <a:t>Guessing the shape of </a:t>
-            </a:r>
-            <a:r>
-              <a:rPr sz="2000">
-                <a:latin typeface="Courier"/>
-              </a:rPr>
-              <a:t>ice_long</a:t>
-            </a:r>
-            <a:r>
-              <a:rPr sz="2000"/>
-              <a:t> before you pivot forces you to reason about what </a:t>
-            </a:r>
-            <a:r>
-              <a:rPr sz="2000">
-                <a:latin typeface="Courier"/>
-              </a:rPr>
-              <a:t>pivot_longer()</a:t>
-            </a:r>
-            <a:r>
-              <a:rPr sz="2000"/>
-              <a:t> actually does, instead of just watching it happen.</a:t>
-            </a:r>
-          </a:p>
-          <a:p>
-            <a:pPr lvl="0"/>
-            <a:r>
-              <a:rPr sz="2000"/>
-              <a:t>Typing </a:t>
-            </a:r>
-            <a:r>
-              <a:rPr sz="2000">
-                <a:latin typeface="Courier"/>
-              </a:rPr>
-              <a:t>names_prefix</a:t>
-            </a:r>
-            <a:r>
-              <a:rPr sz="2000"/>
-              <a:t>, </a:t>
-            </a:r>
-            <a:r>
-              <a:rPr sz="2000">
-                <a:latin typeface="Courier"/>
-              </a:rPr>
-              <a:t>names_to</a:t>
-            </a:r>
-            <a:r>
-              <a:rPr sz="2000"/>
-              <a:t>, and </a:t>
-            </a:r>
-            <a:r>
-              <a:rPr sz="2000">
-                <a:latin typeface="Courier"/>
-              </a:rPr>
-              <a:t>values_to</a:t>
-            </a:r>
-            <a:r>
-              <a:rPr sz="2000"/>
-              <a:t> yourself is how you notice which argument does which job — copy-pasting lets you skip right past that.</a:t>
-            </a:r>
-          </a:p>
-          <a:p>
-            <a:pPr lvl="0"/>
-            <a:r>
-              <a:rPr sz="2000"/>
-              <a:t>Reshaping wrong in front of an error message (a missing </a:t>
-            </a:r>
-            <a:r>
-              <a:rPr sz="2000">
-                <a:latin typeface="Courier"/>
-              </a:rPr>
-              <a:t>date</a:t>
-            </a:r>
-            <a:r>
-              <a:rPr sz="2000"/>
-              <a:t> column, a stray </a:t>
-            </a:r>
-            <a:r>
-              <a:rPr sz="2000">
-                <a:latin typeface="Courier"/>
-              </a:rPr>
-              <a:t>X</a:t>
-            </a:r>
-            <a:r>
-              <a:rPr sz="2000"/>
-              <a:t>) teaches you more about tidy data than reshaping right on the first try.</a:t>
+              <a:t> (read the raw file and inspect its wide shape).</a:t>
             </a:r>
           </a:p>
         </p:txBody>
@@ -12934,109 +12249,6 @@
 </file>
 
 <file path=ppt/slides/slide5.xml><?xml version="1.0" encoding="utf-8"?>
-<p:sld xmlns:a="http://schemas.openxmlformats.org/drawingml/2006/main" xmlns:r="http://schemas.openxmlformats.org/officeDocument/2006/relationships" xmlns:p="http://schemas.openxmlformats.org/presentationml/2006/main">
-  <p:cSld>
-    <p:spTree>
-      <p:nvGrpSpPr>
-        <p:cNvPr id="1" name=""/>
-        <p:cNvGrpSpPr/>
-        <p:nvPr/>
-      </p:nvGrpSpPr>
-      <p:grpSpPr>
-        <a:xfrm>
-          <a:off x="0" y="0"/>
-          <a:ext cx="0" cy="0"/>
-          <a:chOff x="0" y="0"/>
-          <a:chExt cx="0" cy="0"/>
-        </a:xfrm>
-      </p:grpSpPr>
-      <p:sp>
-        <p:nvSpPr>
-          <p:cNvPr id="2" name="Title 1"/>
-          <p:cNvSpPr>
-            <a:spLocks noGrp="1"/>
-          </p:cNvSpPr>
-          <p:nvPr>
-            <p:ph type="title"/>
-          </p:nvPr>
-        </p:nvSpPr>
-        <p:spPr>
-          <a:xfrm>
-            <a:off x="0" y="0"/>
-            <a:ext cx="9144000" cy="582780"/>
-          </a:xfrm>
-        </p:spPr>
-        <p:txBody>
-          <a:bodyPr/>
-          <a:lstStyle/>
-          <a:p>
-            <a:pPr lvl="0" indent="0" marL="0">
-              <a:buNone/>
-            </a:pPr>
-            <a:r>
-              <a:rPr/>
-              <a:t>🧩 Chunk 1 of 4 · Why Wide Data Is a Problem</a:t>
-            </a:r>
-          </a:p>
-        </p:txBody>
-      </p:sp>
-      <p:sp>
-        <p:nvSpPr>
-          <p:cNvPr id="3" name="Content Placeholder 2"/>
-          <p:cNvSpPr>
-            <a:spLocks noGrp="1"/>
-          </p:cNvSpPr>
-          <p:nvPr>
-            <p:ph idx="1"/>
-          </p:nvPr>
-        </p:nvSpPr>
-        <p:spPr/>
-        <p:txBody>
-          <a:bodyPr/>
-          <a:lstStyle/>
-          <a:p>
-            <a:pPr lvl="0" indent="0" marL="0">
-              <a:buNone/>
-            </a:pPr>
-            <a:r>
-              <a:rPr b="1"/>
-              <a:t>We will cover:</a:t>
-            </a:r>
-            <a:r>
-              <a:rPr/>
-              <a:t> where the ice data comes from, why “wide” data breaks tidy tools, and reading the messy text file into R.</a:t>
-            </a:r>
-          </a:p>
-          <a:p>
-            <a:pPr lvl="0" indent="0" marL="1270000">
-              <a:buNone/>
-            </a:pPr>
-            <a:r>
-              <a:rPr sz="2000" b="1"/>
-              <a:t>Tip</a:t>
-            </a:r>
-          </a:p>
-          <a:p>
-            <a:pPr lvl="0" indent="0" marL="1270000">
-              <a:buNone/>
-            </a:pPr>
-            <a:r>
-              <a:rPr sz="2000" b="1"/>
-              <a:t>🖐 After this chunk: Activity Parts 1–2</a:t>
-            </a:r>
-            <a:r>
-              <a:rPr sz="2000"/>
-              <a:t> (read the raw file and inspect its wide shape).</a:t>
-            </a:r>
-          </a:p>
-        </p:txBody>
-      </p:sp>
-    </p:spTree>
-  </p:cSld>
-</p:sld>
-</file>
-
-<file path=ppt/slides/slide6.xml><?xml version="1.0" encoding="utf-8"?>
 <p:sld xmlns:a="http://schemas.openxmlformats.org/drawingml/2006/main" xmlns:r="http://schemas.openxmlformats.org/officeDocument/2006/relationships" xmlns:p="http://schemas.openxmlformats.org/presentationml/2006/main">
   <p:cSld>
     <p:spTree>
@@ -13261,7 +12473,7 @@
 </p:sld>
 </file>
 
-<file path=ppt/slides/slide7.xml><?xml version="1.0" encoding="utf-8"?>
+<file path=ppt/slides/slide6.xml><?xml version="1.0" encoding="utf-8"?>
 <p:sld xmlns:a="http://schemas.openxmlformats.org/drawingml/2006/main" xmlns:r="http://schemas.openxmlformats.org/officeDocument/2006/relationships" xmlns:p="http://schemas.openxmlformats.org/presentationml/2006/main">
   <p:cSld>
     <p:spTree>
@@ -13352,6 +12564,225 @@
             <a:r>
               <a:rPr sz="2000"/>
               <a:t> use this shape directly? If not, what has to change first?</a:t>
+            </a:r>
+          </a:p>
+        </p:txBody>
+      </p:sp>
+    </p:spTree>
+  </p:cSld>
+</p:sld>
+</file>
+
+<file path=ppt/slides/slide7.xml><?xml version="1.0" encoding="utf-8"?>
+<p:sld xmlns:a="http://schemas.openxmlformats.org/drawingml/2006/main" xmlns:r="http://schemas.openxmlformats.org/officeDocument/2006/relationships" xmlns:p="http://schemas.openxmlformats.org/presentationml/2006/main">
+  <p:cSld>
+    <p:spTree>
+      <p:nvGrpSpPr>
+        <p:cNvPr id="1" name=""/>
+        <p:cNvGrpSpPr/>
+        <p:nvPr/>
+      </p:nvGrpSpPr>
+      <p:grpSpPr>
+        <a:xfrm>
+          <a:off x="0" y="0"/>
+          <a:ext cx="0" cy="0"/>
+          <a:chOff x="0" y="0"/>
+          <a:chExt cx="0" cy="0"/>
+        </a:xfrm>
+      </p:grpSpPr>
+      <p:sp>
+        <p:nvSpPr>
+          <p:cNvPr id="3" name="Content Placeholder 2"/>
+          <p:cNvSpPr>
+            <a:spLocks noGrp="1"/>
+          </p:cNvSpPr>
+          <p:nvPr>
+            <p:ph idx="1" sz="half"/>
+          </p:nvPr>
+        </p:nvSpPr>
+        <p:spPr/>
+        <p:txBody>
+          <a:bodyPr/>
+          <a:lstStyle/>
+          <a:p>
+            <a:pPr lvl="0" indent="0">
+              <a:buNone/>
+            </a:pPr>
+            <a:r>
+              <a:rPr>
+                <a:latin typeface="Courier"/>
+              </a:rPr>
+              <a:t>        1973 1974 1975 ... 2024 2025
+Nov-10    NA   NA   NA       NA   NA
+Nov-11    NA   NA   NA       NA   NA
+...
+Jan-15   2.1  4.0  1.8      8.2  6.5
+...</a:t>
+            </a:r>
+          </a:p>
+          <a:p>
+            <a:pPr lvl="0"/>
+            <a:r>
+              <a:rPr b="1"/>
+              <a:t>One row</a:t>
+            </a:r>
+            <a:r>
+              <a:rPr/>
+              <a:t> per calendar day-of-winter (Nov 10 → ~May)</a:t>
+            </a:r>
+          </a:p>
+          <a:p>
+            <a:pPr lvl="0"/>
+            <a:r>
+              <a:rPr b="1"/>
+              <a:t>One column per year</a:t>
+            </a:r>
+            <a:r>
+              <a:rPr/>
+              <a:t> — 53 columns, one for each ice season since 1973</a:t>
+            </a:r>
+          </a:p>
+          <a:p>
+            <a:pPr lvl="0"/>
+            <a:r>
+              <a:rPr/>
+              <a:t>Lots of </a:t>
+            </a:r>
+            <a:r>
+              <a:rPr>
+                <a:latin typeface="Courier"/>
+              </a:rPr>
+              <a:t>NA</a:t>
+            </a:r>
+            <a:r>
+              <a:rPr/>
+              <a:t> — many days simply had no ice that year or that month</a:t>
+            </a:r>
+          </a:p>
+          <a:p>
+            <a:pPr lvl="0" indent="0" marL="0">
+              <a:buNone/>
+            </a:pPr>
+            <a:r>
+              <a:rPr/>
+              <a:t>This format is </a:t>
+            </a:r>
+            <a:r>
+              <a:rPr b="1"/>
+              <a:t>perfect for a human</a:t>
+            </a:r>
+            <a:r>
+              <a:rPr/>
+              <a:t> scanning a printed table. It’s </a:t>
+            </a:r>
+            <a:r>
+              <a:rPr b="1"/>
+              <a:t>terrible for R and ggplot</a:t>
+            </a:r>
+            <a:r>
+              <a:rPr/>
+              <a:t>.</a:t>
+            </a:r>
+          </a:p>
+        </p:txBody>
+      </p:sp>
+      <p:sp>
+        <p:nvSpPr>
+          <p:cNvPr id="4" name="Content Placeholder 3"/>
+          <p:cNvSpPr>
+            <a:spLocks noGrp="1"/>
+          </p:cNvSpPr>
+          <p:nvPr>
+            <p:ph idx="2" sz="half"/>
+          </p:nvPr>
+        </p:nvSpPr>
+        <p:spPr/>
+        <p:txBody>
+          <a:bodyPr/>
+          <a:lstStyle/>
+          <a:p>
+            <a:pPr lvl="0" indent="0" marL="0">
+              <a:buNone/>
+            </a:pPr>
+            <a:r>
+              <a:rPr b="1"/>
+              <a:t>Why this breaks tidy tools:</a:t>
+            </a:r>
+          </a:p>
+          <a:p>
+            <a:pPr lvl="0"/>
+            <a:r>
+              <a:rPr>
+                <a:latin typeface="Courier"/>
+              </a:rPr>
+              <a:t>ggplot()</a:t>
+            </a:r>
+            <a:r>
+              <a:rPr/>
+              <a:t> wants one column to map to </a:t>
+            </a:r>
+            <a:r>
+              <a:rPr>
+                <a:latin typeface="Courier"/>
+              </a:rPr>
+              <a:t>x</a:t>
+            </a:r>
+            <a:r>
+              <a:rPr/>
+              <a:t>, one to </a:t>
+            </a:r>
+            <a:r>
+              <a:rPr>
+                <a:latin typeface="Courier"/>
+              </a:rPr>
+              <a:t>y</a:t>
+            </a:r>
+          </a:p>
+          <a:p>
+            <a:pPr lvl="0"/>
+            <a:r>
+              <a:rPr/>
+              <a:t>Here, “year” is hiding as 53 separate </a:t>
+            </a:r>
+            <a:r>
+              <a:rPr b="1"/>
+              <a:t>column names</a:t>
+            </a:r>
+            <a:r>
+              <a:rPr/>
+              <a:t>, not as data values</a:t>
+            </a:r>
+          </a:p>
+          <a:p>
+            <a:pPr lvl="0"/>
+            <a:r>
+              <a:rPr>
+                <a:latin typeface="Courier"/>
+              </a:rPr>
+              <a:t>group_by(year)</a:t>
+            </a:r>
+            <a:r>
+              <a:rPr/>
+              <a:t> is impossible — there’s no </a:t>
+            </a:r>
+            <a:r>
+              <a:rPr>
+                <a:latin typeface="Courier"/>
+              </a:rPr>
+              <a:t>year</a:t>
+            </a:r>
+            <a:r>
+              <a:rPr/>
+              <a:t> column to group by!</a:t>
+            </a:r>
+          </a:p>
+          <a:p>
+            <a:pPr lvl="0" indent="0" marL="0">
+              <a:buNone/>
+            </a:pPr>
+            <a:r>
+              <a:rPr/>
+              <a:t>📖 R4DS Ch. 5.2 — “every value in its own cell”</a:t>
             </a:r>
           </a:p>
         </p:txBody>
@@ -13380,6 +12811,39 @@
       </p:grpSpPr>
       <p:sp>
         <p:nvSpPr>
+          <p:cNvPr id="2" name="Title 1"/>
+          <p:cNvSpPr>
+            <a:spLocks noGrp="1"/>
+          </p:cNvSpPr>
+          <p:nvPr>
+            <p:ph type="title"/>
+          </p:nvPr>
+        </p:nvSpPr>
+        <p:spPr>
+          <a:xfrm>
+            <a:off x="0" y="0"/>
+            <a:ext cx="9144000" cy="602780"/>
+          </a:xfrm>
+          <a:solidFill>
+            <a:srgbClr val="1A1A2E"/>
+          </a:solidFill>
+        </p:spPr>
+        <p:txBody>
+          <a:bodyPr/>
+          <a:lstStyle/>
+          <a:p>
+            <a:pPr lvl="0" indent="0" marL="0">
+              <a:buNone/>
+            </a:pPr>
+            <a:r>
+              <a:rPr/>
+              <a:t>Load Libraries and Read the Raw File</a:t>
+            </a:r>
+          </a:p>
+        </p:txBody>
+      </p:sp>
+      <p:sp>
+        <p:nvSpPr>
           <p:cNvPr id="3" name="Content Placeholder 2"/>
           <p:cNvSpPr>
             <a:spLocks noGrp="1"/>
@@ -13398,78 +12862,557 @@
             </a:pPr>
             <a:r>
               <a:rPr>
-                <a:latin typeface="Courier"/>
-              </a:rPr>
-              <a:t>        1973 1974 1975 ... 2024 2025
-Nov-10    NA   NA   NA       NA   NA
-Nov-11    NA   NA   NA       NA   NA
-...
-Jan-15   2.1  4.0  1.8      8.2  6.5
-...</a:t>
-            </a:r>
-          </a:p>
-          <a:p>
-            <a:pPr lvl="0"/>
-            <a:r>
-              <a:rPr b="1"/>
-              <a:t>One row</a:t>
-            </a:r>
-            <a:r>
-              <a:rPr/>
-              <a:t> per calendar day-of-winter (Nov 10 → ~May)</a:t>
-            </a:r>
-          </a:p>
-          <a:p>
-            <a:pPr lvl="0"/>
-            <a:r>
-              <a:rPr b="1"/>
-              <a:t>One column per year</a:t>
-            </a:r>
-            <a:r>
-              <a:rPr/>
-              <a:t> — 53 columns, one for each ice season since 1973</a:t>
-            </a:r>
-          </a:p>
-          <a:p>
-            <a:pPr lvl="0"/>
-            <a:r>
-              <a:rPr/>
-              <a:t>Lots of </a:t>
-            </a:r>
-            <a:r>
-              <a:rPr>
-                <a:latin typeface="Courier"/>
-              </a:rPr>
-              <a:t>NA</a:t>
-            </a:r>
-            <a:r>
-              <a:rPr/>
-              <a:t> — many days simply had no ice that year or that month</a:t>
-            </a:r>
-          </a:p>
-          <a:p>
-            <a:pPr lvl="0" indent="0" marL="0">
+                <a:solidFill>
+                  <a:srgbClr val="5E5E5E"/>
+                </a:solidFill>
+                <a:latin typeface="Courier"/>
+              </a:rPr>
+              <a:t># Load packages at the top — always -------------------</a:t>
+            </a:r>
+            <a:br/>
+            <a:r>
+              <a:rPr>
+                <a:solidFill>
+                  <a:srgbClr val="4758AB"/>
+                </a:solidFill>
+                <a:latin typeface="Courier"/>
+              </a:rPr>
+              <a:t>library</a:t>
+            </a:r>
+            <a:r>
+              <a:rPr>
+                <a:solidFill>
+                  <a:srgbClr val="003B4F"/>
+                </a:solidFill>
+                <a:latin typeface="Courier"/>
+              </a:rPr>
+              <a:t>(tidyverse) </a:t>
+            </a:r>
+            <a:r>
+              <a:rPr>
+                <a:solidFill>
+                  <a:srgbClr val="5E5E5E"/>
+                </a:solidFill>
+                <a:latin typeface="Courier"/>
+              </a:rPr>
+              <a:t># data manipulation + ggplot2</a:t>
+            </a:r>
+            <a:br/>
+            <a:r>
+              <a:rPr>
+                <a:solidFill>
+                  <a:srgbClr val="4758AB"/>
+                </a:solidFill>
+                <a:latin typeface="Courier"/>
+              </a:rPr>
+              <a:t>library</a:t>
+            </a:r>
+            <a:r>
+              <a:rPr>
+                <a:solidFill>
+                  <a:srgbClr val="003B4F"/>
+                </a:solidFill>
+                <a:latin typeface="Courier"/>
+              </a:rPr>
+              <a:t>(janitor) </a:t>
+            </a:r>
+            <a:r>
+              <a:rPr>
+                <a:solidFill>
+                  <a:srgbClr val="5E5E5E"/>
+                </a:solidFill>
+                <a:latin typeface="Courier"/>
+              </a:rPr>
+              <a:t># clean_names() and friends</a:t>
+            </a:r>
+          </a:p>
+          <a:p>
+            <a:pPr lvl="0" indent="0">
               <a:buNone/>
             </a:pPr>
             <a:r>
-              <a:rPr/>
-              <a:t>This format is </a:t>
-            </a:r>
-            <a:r>
-              <a:rPr b="1"/>
-              <a:t>perfect for a human</a:t>
-            </a:r>
-            <a:r>
-              <a:rPr/>
-              <a:t> scanning a printed table. It’s </a:t>
-            </a:r>
-            <a:r>
-              <a:rPr b="1"/>
-              <a:t>terrible for R and ggplot</a:t>
-            </a:r>
-            <a:r>
-              <a:rPr/>
-              <a:t>.</a:t>
+              <a:rPr>
+                <a:solidFill>
+                  <a:srgbClr val="5E5E5E"/>
+                </a:solidFill>
+                <a:latin typeface="Courier"/>
+              </a:rPr>
+              <a:t># Read the messy text file directly from the web -------</a:t>
+            </a:r>
+            <a:br/>
+            <a:r>
+              <a:rPr>
+                <a:solidFill>
+                  <a:srgbClr val="003B4F"/>
+                </a:solidFill>
+                <a:latin typeface="Courier"/>
+              </a:rPr>
+              <a:t>url &lt;- </a:t>
+            </a:r>
+            <a:r>
+              <a:rPr>
+                <a:solidFill>
+                  <a:srgbClr val="20794D"/>
+                </a:solidFill>
+                <a:latin typeface="Courier"/>
+              </a:rPr>
+              <a:t>"https://www.glerl.noaa.gov/data/ice/glicd/daily/sup.txt"</a:t>
+            </a:r>
+            <a:br/>
+            <a:br/>
+            <a:r>
+              <a:rPr>
+                <a:solidFill>
+                  <a:srgbClr val="003B4F"/>
+                </a:solidFill>
+                <a:latin typeface="Courier"/>
+              </a:rPr>
+              <a:t>ice_raw &lt;- </a:t>
+            </a:r>
+            <a:r>
+              <a:rPr>
+                <a:solidFill>
+                  <a:srgbClr val="4758AB"/>
+                </a:solidFill>
+                <a:latin typeface="Courier"/>
+              </a:rPr>
+              <a:t>read.table</a:t>
+            </a:r>
+            <a:r>
+              <a:rPr>
+                <a:solidFill>
+                  <a:srgbClr val="003B4F"/>
+                </a:solidFill>
+                <a:latin typeface="Courier"/>
+              </a:rPr>
+              <a:t>(</a:t>
+            </a:r>
+            <a:br/>
+            <a:r>
+              <a:rPr>
+                <a:solidFill>
+                  <a:srgbClr val="003B4F"/>
+                </a:solidFill>
+                <a:latin typeface="Courier"/>
+              </a:rPr>
+              <a:t>  url,</a:t>
+            </a:r>
+            <a:br/>
+            <a:r>
+              <a:rPr>
+                <a:solidFill>
+                  <a:srgbClr val="003B4F"/>
+                </a:solidFill>
+                <a:latin typeface="Courier"/>
+              </a:rPr>
+              <a:t>  </a:t>
+            </a:r>
+            <a:r>
+              <a:rPr>
+                <a:solidFill>
+                  <a:srgbClr val="657422"/>
+                </a:solidFill>
+                <a:latin typeface="Courier"/>
+              </a:rPr>
+              <a:t>header =</a:t>
+            </a:r>
+            <a:r>
+              <a:rPr>
+                <a:solidFill>
+                  <a:srgbClr val="003B4F"/>
+                </a:solidFill>
+                <a:latin typeface="Courier"/>
+              </a:rPr>
+              <a:t> </a:t>
+            </a:r>
+            <a:r>
+              <a:rPr>
+                <a:solidFill>
+                  <a:srgbClr val="8F5902"/>
+                </a:solidFill>
+                <a:latin typeface="Courier"/>
+              </a:rPr>
+              <a:t>TRUE</a:t>
+            </a:r>
+            <a:r>
+              <a:rPr>
+                <a:solidFill>
+                  <a:srgbClr val="003B4F"/>
+                </a:solidFill>
+                <a:latin typeface="Courier"/>
+              </a:rPr>
+              <a:t>,</a:t>
+            </a:r>
+            <a:br/>
+            <a:r>
+              <a:rPr>
+                <a:solidFill>
+                  <a:srgbClr val="003B4F"/>
+                </a:solidFill>
+                <a:latin typeface="Courier"/>
+              </a:rPr>
+              <a:t>  </a:t>
+            </a:r>
+            <a:r>
+              <a:rPr>
+                <a:solidFill>
+                  <a:srgbClr val="657422"/>
+                </a:solidFill>
+                <a:latin typeface="Courier"/>
+              </a:rPr>
+              <a:t>na.strings =</a:t>
+            </a:r>
+            <a:r>
+              <a:rPr>
+                <a:solidFill>
+                  <a:srgbClr val="003B4F"/>
+                </a:solidFill>
+                <a:latin typeface="Courier"/>
+              </a:rPr>
+              <a:t> </a:t>
+            </a:r>
+            <a:r>
+              <a:rPr>
+                <a:solidFill>
+                  <a:srgbClr val="4758AB"/>
+                </a:solidFill>
+                <a:latin typeface="Courier"/>
+              </a:rPr>
+              <a:t>c</a:t>
+            </a:r>
+            <a:r>
+              <a:rPr>
+                <a:solidFill>
+                  <a:srgbClr val="003B4F"/>
+                </a:solidFill>
+                <a:latin typeface="Courier"/>
+              </a:rPr>
+              <a:t>(</a:t>
+            </a:r>
+            <a:r>
+              <a:rPr>
+                <a:solidFill>
+                  <a:srgbClr val="20794D"/>
+                </a:solidFill>
+                <a:latin typeface="Courier"/>
+              </a:rPr>
+              <a:t>"-999"</a:t>
+            </a:r>
+            <a:r>
+              <a:rPr>
+                <a:solidFill>
+                  <a:srgbClr val="003B4F"/>
+                </a:solidFill>
+                <a:latin typeface="Courier"/>
+              </a:rPr>
+              <a:t>, </a:t>
+            </a:r>
+            <a:r>
+              <a:rPr>
+                <a:solidFill>
+                  <a:srgbClr val="20794D"/>
+                </a:solidFill>
+                <a:latin typeface="Courier"/>
+              </a:rPr>
+              <a:t>"-99.00"</a:t>
+            </a:r>
+            <a:r>
+              <a:rPr>
+                <a:solidFill>
+                  <a:srgbClr val="003B4F"/>
+                </a:solidFill>
+                <a:latin typeface="Courier"/>
+              </a:rPr>
+              <a:t>, </a:t>
+            </a:r>
+            <a:r>
+              <a:rPr>
+                <a:solidFill>
+                  <a:srgbClr val="20794D"/>
+                </a:solidFill>
+                <a:latin typeface="Courier"/>
+              </a:rPr>
+              <a:t>"NA"</a:t>
+            </a:r>
+            <a:r>
+              <a:rPr>
+                <a:solidFill>
+                  <a:srgbClr val="003B4F"/>
+                </a:solidFill>
+                <a:latin typeface="Courier"/>
+              </a:rPr>
+              <a:t>)</a:t>
+            </a:r>
+            <a:br/>
+            <a:r>
+              <a:rPr>
+                <a:solidFill>
+                  <a:srgbClr val="003B4F"/>
+                </a:solidFill>
+                <a:latin typeface="Courier"/>
+              </a:rPr>
+              <a:t>) </a:t>
+            </a:r>
+            <a:r>
+              <a:rPr>
+                <a:solidFill>
+                  <a:srgbClr val="5E5E5E"/>
+                </a:solidFill>
+                <a:latin typeface="Courier"/>
+              </a:rPr>
+              <a:t>%&gt;%</a:t>
+            </a:r>
+            <a:br/>
+            <a:r>
+              <a:rPr>
+                <a:solidFill>
+                  <a:srgbClr val="003B4F"/>
+                </a:solidFill>
+                <a:latin typeface="Courier"/>
+              </a:rPr>
+              <a:t>  </a:t>
+            </a:r>
+            <a:r>
+              <a:rPr>
+                <a:solidFill>
+                  <a:srgbClr val="4758AB"/>
+                </a:solidFill>
+                <a:latin typeface="Courier"/>
+              </a:rPr>
+              <a:t>rownames_to_column</a:t>
+            </a:r>
+            <a:r>
+              <a:rPr>
+                <a:solidFill>
+                  <a:srgbClr val="003B4F"/>
+                </a:solidFill>
+                <a:latin typeface="Courier"/>
+              </a:rPr>
+              <a:t>(</a:t>
+            </a:r>
+            <a:r>
+              <a:rPr>
+                <a:solidFill>
+                  <a:srgbClr val="657422"/>
+                </a:solidFill>
+                <a:latin typeface="Courier"/>
+              </a:rPr>
+              <a:t>var =</a:t>
+            </a:r>
+            <a:r>
+              <a:rPr>
+                <a:solidFill>
+                  <a:srgbClr val="003B4F"/>
+                </a:solidFill>
+                <a:latin typeface="Courier"/>
+              </a:rPr>
+              <a:t> </a:t>
+            </a:r>
+            <a:r>
+              <a:rPr>
+                <a:solidFill>
+                  <a:srgbClr val="20794D"/>
+                </a:solidFill>
+                <a:latin typeface="Courier"/>
+              </a:rPr>
+              <a:t>"date"</a:t>
+            </a:r>
+            <a:r>
+              <a:rPr>
+                <a:solidFill>
+                  <a:srgbClr val="003B4F"/>
+                </a:solidFill>
+                <a:latin typeface="Courier"/>
+              </a:rPr>
+              <a:t>) </a:t>
+            </a:r>
+            <a:r>
+              <a:rPr>
+                <a:solidFill>
+                  <a:srgbClr val="5E5E5E"/>
+                </a:solidFill>
+                <a:latin typeface="Courier"/>
+              </a:rPr>
+              <a:t>%&gt;%</a:t>
+            </a:r>
+            <a:br/>
+            <a:r>
+              <a:rPr>
+                <a:solidFill>
+                  <a:srgbClr val="003B4F"/>
+                </a:solidFill>
+                <a:latin typeface="Courier"/>
+              </a:rPr>
+              <a:t>  </a:t>
+            </a:r>
+            <a:r>
+              <a:rPr>
+                <a:solidFill>
+                  <a:srgbClr val="4758AB"/>
+                </a:solidFill>
+                <a:latin typeface="Courier"/>
+              </a:rPr>
+              <a:t>as_tibble</a:t>
+            </a:r>
+            <a:r>
+              <a:rPr>
+                <a:solidFill>
+                  <a:srgbClr val="003B4F"/>
+                </a:solidFill>
+                <a:latin typeface="Courier"/>
+              </a:rPr>
+              <a:t>()</a:t>
+            </a:r>
+            <a:br/>
+            <a:br/>
+            <a:r>
+              <a:rPr>
+                <a:solidFill>
+                  <a:srgbClr val="4758AB"/>
+                </a:solidFill>
+                <a:latin typeface="Courier"/>
+              </a:rPr>
+              <a:t>dim</a:t>
+            </a:r>
+            <a:r>
+              <a:rPr>
+                <a:solidFill>
+                  <a:srgbClr val="003B4F"/>
+                </a:solidFill>
+                <a:latin typeface="Courier"/>
+              </a:rPr>
+              <a:t>(ice_raw)       </a:t>
+            </a:r>
+            <a:r>
+              <a:rPr>
+                <a:solidFill>
+                  <a:srgbClr val="5E5E5E"/>
+                </a:solidFill>
+                <a:latin typeface="Courier"/>
+              </a:rPr>
+              <a:t># rows x columns - look how WIDE</a:t>
+            </a:r>
+          </a:p>
+          <a:p>
+            <a:pPr lvl="0" indent="0">
+              <a:buNone/>
+            </a:pPr>
+            <a:r>
+              <a:rPr>
+                <a:latin typeface="Courier"/>
+              </a:rPr>
+              <a:t>[1] 209  55</a:t>
+            </a:r>
+          </a:p>
+          <a:p>
+            <a:pPr lvl="0" indent="0">
+              <a:buNone/>
+            </a:pPr>
+            <a:r>
+              <a:rPr>
+                <a:solidFill>
+                  <a:srgbClr val="003B4F"/>
+                </a:solidFill>
+                <a:latin typeface="Courier"/>
+              </a:rPr>
+              <a:t>ice_raw[</a:t>
+            </a:r>
+            <a:r>
+              <a:rPr>
+                <a:solidFill>
+                  <a:srgbClr val="AD0000"/>
+                </a:solidFill>
+                <a:latin typeface="Courier"/>
+              </a:rPr>
+              <a:t>1</a:t>
+            </a:r>
+            <a:r>
+              <a:rPr>
+                <a:solidFill>
+                  <a:srgbClr val="5E5E5E"/>
+                </a:solidFill>
+                <a:latin typeface="Courier"/>
+              </a:rPr>
+              <a:t>:</a:t>
+            </a:r>
+            <a:r>
+              <a:rPr>
+                <a:solidFill>
+                  <a:srgbClr val="AD0000"/>
+                </a:solidFill>
+                <a:latin typeface="Courier"/>
+              </a:rPr>
+              <a:t>3</a:t>
+            </a:r>
+            <a:r>
+              <a:rPr>
+                <a:solidFill>
+                  <a:srgbClr val="003B4F"/>
+                </a:solidFill>
+                <a:latin typeface="Courier"/>
+              </a:rPr>
+              <a:t>, </a:t>
+            </a:r>
+            <a:r>
+              <a:rPr>
+                <a:solidFill>
+                  <a:srgbClr val="AD0000"/>
+                </a:solidFill>
+                <a:latin typeface="Courier"/>
+              </a:rPr>
+              <a:t>1</a:t>
+            </a:r>
+            <a:r>
+              <a:rPr>
+                <a:solidFill>
+                  <a:srgbClr val="5E5E5E"/>
+                </a:solidFill>
+                <a:latin typeface="Courier"/>
+              </a:rPr>
+              <a:t>:</a:t>
+            </a:r>
+            <a:r>
+              <a:rPr>
+                <a:solidFill>
+                  <a:srgbClr val="AD0000"/>
+                </a:solidFill>
+                <a:latin typeface="Courier"/>
+              </a:rPr>
+              <a:t>5</a:t>
+            </a:r>
+            <a:r>
+              <a:rPr>
+                <a:solidFill>
+                  <a:srgbClr val="003B4F"/>
+                </a:solidFill>
+                <a:latin typeface="Courier"/>
+              </a:rPr>
+              <a:t>]  </a:t>
+            </a:r>
+            <a:r>
+              <a:rPr>
+                <a:solidFill>
+                  <a:srgbClr val="5E5E5E"/>
+                </a:solidFill>
+                <a:latin typeface="Courier"/>
+              </a:rPr>
+              <a:t># just the first few columns</a:t>
+            </a:r>
+          </a:p>
+          <a:p>
+            <a:pPr lvl="0" indent="0">
+              <a:buNone/>
+            </a:pPr>
+            <a:r>
+              <a:rPr>
+                <a:latin typeface="Courier"/>
+              </a:rPr>
+              <a:t># A tibble: 3 × 5
+  date   X1973 X1974 X1975 X1976
+  &lt;chr&gt;  &lt;dbl&gt; &lt;dbl&gt; &lt;dbl&gt; &lt;dbl&gt;
+1 Nov-10    NA    NA    NA    NA
+2 Nov-11    NA    NA    NA    NA
+3 Nov-12    NA    NA    NA    NA</a:t>
             </a:r>
           </a:p>
         </p:txBody>
@@ -13494,7 +13437,7 @@
             </a:pPr>
             <a:r>
               <a:rPr b="1"/>
-              <a:t>Why this breaks tidy tools:</a:t>
+              <a:t>What’s happening here:</a:t>
             </a:r>
           </a:p>
           <a:p>
@@ -13503,74 +13446,117 @@
               <a:rPr>
                 <a:latin typeface="Courier"/>
               </a:rPr>
-              <a:t>ggplot()</a:t>
-            </a:r>
-            <a:r>
-              <a:rPr/>
-              <a:t> wants one column to map to </a:t>
-            </a:r>
-            <a:r>
-              <a:rPr>
-                <a:latin typeface="Courier"/>
-              </a:rPr>
-              <a:t>x</a:t>
-            </a:r>
-            <a:r>
-              <a:rPr/>
-              <a:t>, one to </a:t>
-            </a:r>
-            <a:r>
-              <a:rPr>
-                <a:latin typeface="Courier"/>
-              </a:rPr>
-              <a:t>y</a:t>
+              <a:t>read.table()</a:t>
+            </a:r>
+            <a:r>
+              <a:rPr/>
+              <a:t> beats </a:t>
+            </a:r>
+            <a:r>
+              <a:rPr>
+                <a:latin typeface="Courier"/>
+              </a:rPr>
+              <a:t>read_csv()</a:t>
+            </a:r>
+            <a:r>
+              <a:rPr/>
+              <a:t> here — the file isn’t comma-separated</a:t>
             </a:r>
           </a:p>
           <a:p>
             <a:pPr lvl="0"/>
             <a:r>
-              <a:rPr/>
-              <a:t>Here, “year” is hiding as 53 separate </a:t>
+              <a:rPr>
+                <a:latin typeface="Courier"/>
+              </a:rPr>
+              <a:t>na.strings</a:t>
+            </a:r>
+            <a:r>
+              <a:rPr/>
+              <a:t> says which placeholders really mean “missing”</a:t>
+            </a:r>
+          </a:p>
+          <a:p>
+            <a:pPr lvl="0"/>
+            <a:r>
+              <a:rPr/>
+              <a:t>The day labels (</a:t>
+            </a:r>
+            <a:r>
+              <a:rPr>
+                <a:latin typeface="Courier"/>
+              </a:rPr>
+              <a:t>Nov-10</a:t>
+            </a:r>
+            <a:r>
+              <a:rPr/>
+              <a:t>…) were </a:t>
             </a:r>
             <a:r>
               <a:rPr b="1"/>
-              <a:t>column names</a:t>
-            </a:r>
-            <a:r>
-              <a:rPr/>
-              <a:t>, not as data values</a:t>
-            </a:r>
-          </a:p>
-          <a:p>
-            <a:pPr lvl="0"/>
-            <a:r>
-              <a:rPr>
-                <a:latin typeface="Courier"/>
-              </a:rPr>
-              <a:t>group_by(year)</a:t>
-            </a:r>
-            <a:r>
-              <a:rPr/>
-              <a:t> is impossible — there’s no </a:t>
-            </a:r>
-            <a:r>
-              <a:rPr>
-                <a:latin typeface="Courier"/>
-              </a:rPr>
-              <a:t>year</a:t>
-            </a:r>
-            <a:r>
-              <a:rPr/>
-              <a:t> column to group by!</a:t>
-            </a:r>
-          </a:p>
-          <a:p>
-            <a:pPr lvl="0" indent="0" marL="0">
+              <a:t>row names</a:t>
+            </a:r>
+            <a:r>
+              <a:rPr/>
+              <a:t>, not a column — </a:t>
+            </a:r>
+            <a:r>
+              <a:rPr>
+                <a:latin typeface="Courier"/>
+              </a:rPr>
+              <a:t>rownames_to_column()</a:t>
+            </a:r>
+            <a:r>
+              <a:rPr/>
+              <a:t> fixes that</a:t>
+            </a:r>
+          </a:p>
+          <a:p>
+            <a:pPr lvl="0" indent="0" marL="1270000">
               <a:buNone/>
             </a:pPr>
             <a:r>
-              <a:rPr/>
-              <a:t>📖 R4DS Ch. 5.2 — “every value in its own cell”</a:t>
+              <a:rPr sz="2000" b="1"/>
+              <a:t>Important</a:t>
+            </a:r>
+          </a:p>
+          <a:p>
+            <a:pPr lvl="0" indent="0" marL="1270000">
+              <a:buNone/>
+            </a:pPr>
+            <a:r>
+              <a:rPr sz="2000"/>
+              <a:t>Column names </a:t>
+            </a:r>
+            <a:r>
+              <a:rPr sz="2000">
+                <a:latin typeface="Courier"/>
+              </a:rPr>
+              <a:t>X1973</a:t>
+            </a:r>
+            <a:r>
+              <a:rPr sz="2000"/>
+              <a:t>, </a:t>
+            </a:r>
+            <a:r>
+              <a:rPr sz="2000">
+                <a:latin typeface="Courier"/>
+              </a:rPr>
+              <a:t>X1974</a:t>
+            </a:r>
+            <a:r>
+              <a:rPr sz="2000"/>
+              <a:t>… — R adds an </a:t>
+            </a:r>
+            <a:r>
+              <a:rPr sz="2000">
+                <a:latin typeface="Courier"/>
+              </a:rPr>
+              <a:t>X</a:t>
+            </a:r>
+            <a:r>
+              <a:rPr sz="2000"/>
+              <a:t> because a name can’t start with a number!</a:t>
             </a:r>
           </a:p>
         </p:txBody>
@@ -13610,11 +13596,8 @@
         <p:spPr>
           <a:xfrm>
             <a:off x="0" y="0"/>
-            <a:ext cx="9144000" cy="602780"/>
+            <a:ext cx="9144000" cy="582780"/>
           </a:xfrm>
-          <a:solidFill>
-            <a:srgbClr val="1A1A2E"/>
-          </a:solidFill>
         </p:spPr>
         <p:txBody>
           <a:bodyPr/>
@@ -13625,7 +13608,7 @@
             </a:pPr>
             <a:r>
               <a:rPr/>
-              <a:t>Load Libraries and Read the Raw File</a:t>
+              <a:t>🛑 Pause — Do Activity Parts 1–2 Now</a:t>
             </a:r>
           </a:p>
         </p:txBody>
@@ -13637,7 +13620,7 @@
             <a:spLocks noGrp="1"/>
           </p:cNvSpPr>
           <p:nvPr>
-            <p:ph idx="1" sz="half"/>
+            <p:ph idx="1"/>
           </p:nvPr>
         </p:nvSpPr>
         <p:spPr/>
@@ -13645,591 +13628,23 @@
           <a:bodyPr/>
           <a:lstStyle/>
           <a:p>
-            <a:pPr lvl="0" indent="0">
+            <a:pPr lvl="0" indent="0" marL="0">
               <a:buNone/>
             </a:pPr>
             <a:r>
-              <a:rPr>
-                <a:solidFill>
-                  <a:srgbClr val="5E5E5E"/>
-                </a:solidFill>
-                <a:latin typeface="Courier"/>
-              </a:rPr>
-              <a:t># Load packages at the top — always -------------------</a:t>
-            </a:r>
-            <a:br/>
-            <a:r>
-              <a:rPr>
-                <a:solidFill>
-                  <a:srgbClr val="4758AB"/>
-                </a:solidFill>
-                <a:latin typeface="Courier"/>
-              </a:rPr>
-              <a:t>library</a:t>
-            </a:r>
-            <a:r>
-              <a:rPr>
-                <a:solidFill>
-                  <a:srgbClr val="003B4F"/>
-                </a:solidFill>
-                <a:latin typeface="Courier"/>
-              </a:rPr>
-              <a:t>(tidyverse) </a:t>
-            </a:r>
-            <a:r>
-              <a:rPr>
-                <a:solidFill>
-                  <a:srgbClr val="5E5E5E"/>
-                </a:solidFill>
-                <a:latin typeface="Courier"/>
-              </a:rPr>
-              <a:t># data manipulation + ggplot2</a:t>
-            </a:r>
-            <a:br/>
-            <a:r>
-              <a:rPr>
-                <a:solidFill>
-                  <a:srgbClr val="4758AB"/>
-                </a:solidFill>
-                <a:latin typeface="Courier"/>
-              </a:rPr>
-              <a:t>library</a:t>
-            </a:r>
-            <a:r>
-              <a:rPr>
-                <a:solidFill>
-                  <a:srgbClr val="003B4F"/>
-                </a:solidFill>
-                <a:latin typeface="Courier"/>
-              </a:rPr>
-              <a:t>(janitor) </a:t>
-            </a:r>
-            <a:r>
-              <a:rPr>
-                <a:solidFill>
-                  <a:srgbClr val="5E5E5E"/>
-                </a:solidFill>
-                <a:latin typeface="Courier"/>
-              </a:rPr>
-              <a:t># clean_names() and friends</a:t>
-            </a:r>
-          </a:p>
-          <a:p>
-            <a:pPr lvl="0" indent="0">
-              <a:buNone/>
-            </a:pPr>
-            <a:r>
-              <a:rPr>
-                <a:solidFill>
-                  <a:srgbClr val="5E5E5E"/>
-                </a:solidFill>
-                <a:latin typeface="Courier"/>
-              </a:rPr>
-              <a:t># Read the messy text file directly from the web -------</a:t>
-            </a:r>
-            <a:br/>
-            <a:r>
-              <a:rPr>
-                <a:solidFill>
-                  <a:srgbClr val="003B4F"/>
-                </a:solidFill>
-                <a:latin typeface="Courier"/>
-              </a:rPr>
-              <a:t>url &lt;- </a:t>
-            </a:r>
-            <a:r>
-              <a:rPr>
-                <a:solidFill>
-                  <a:srgbClr val="20794D"/>
-                </a:solidFill>
-                <a:latin typeface="Courier"/>
-              </a:rPr>
-              <a:t>"https://www.glerl.noaa.gov/data/ice/glicd/daily/sup.txt"</a:t>
-            </a:r>
-            <a:br/>
-            <a:br/>
-            <a:r>
-              <a:rPr>
-                <a:solidFill>
-                  <a:srgbClr val="003B4F"/>
-                </a:solidFill>
-                <a:latin typeface="Courier"/>
-              </a:rPr>
-              <a:t>ice_raw &lt;- </a:t>
-            </a:r>
-            <a:r>
-              <a:rPr>
-                <a:solidFill>
-                  <a:srgbClr val="4758AB"/>
-                </a:solidFill>
-                <a:latin typeface="Courier"/>
-              </a:rPr>
-              <a:t>read.table</a:t>
-            </a:r>
-            <a:r>
-              <a:rPr>
-                <a:solidFill>
-                  <a:srgbClr val="003B4F"/>
-                </a:solidFill>
-                <a:latin typeface="Courier"/>
-              </a:rPr>
-              <a:t>(</a:t>
-            </a:r>
-            <a:br/>
-            <a:r>
-              <a:rPr>
-                <a:solidFill>
-                  <a:srgbClr val="003B4F"/>
-                </a:solidFill>
-                <a:latin typeface="Courier"/>
-              </a:rPr>
-              <a:t>  url,</a:t>
-            </a:r>
-            <a:br/>
-            <a:r>
-              <a:rPr>
-                <a:solidFill>
-                  <a:srgbClr val="003B4F"/>
-                </a:solidFill>
-                <a:latin typeface="Courier"/>
-              </a:rPr>
-              <a:t>  </a:t>
-            </a:r>
-            <a:r>
-              <a:rPr>
-                <a:solidFill>
-                  <a:srgbClr val="657422"/>
-                </a:solidFill>
-                <a:latin typeface="Courier"/>
-              </a:rPr>
-              <a:t>header =</a:t>
-            </a:r>
-            <a:r>
-              <a:rPr>
-                <a:solidFill>
-                  <a:srgbClr val="003B4F"/>
-                </a:solidFill>
-                <a:latin typeface="Courier"/>
-              </a:rPr>
-              <a:t> </a:t>
-            </a:r>
-            <a:r>
-              <a:rPr>
-                <a:solidFill>
-                  <a:srgbClr val="8F5902"/>
-                </a:solidFill>
-                <a:latin typeface="Courier"/>
-              </a:rPr>
-              <a:t>TRUE</a:t>
-            </a:r>
-            <a:r>
-              <a:rPr>
-                <a:solidFill>
-                  <a:srgbClr val="003B4F"/>
-                </a:solidFill>
-                <a:latin typeface="Courier"/>
-              </a:rPr>
-              <a:t>,</a:t>
-            </a:r>
-            <a:br/>
-            <a:r>
-              <a:rPr>
-                <a:solidFill>
-                  <a:srgbClr val="003B4F"/>
-                </a:solidFill>
-                <a:latin typeface="Courier"/>
-              </a:rPr>
-              <a:t>  </a:t>
-            </a:r>
-            <a:r>
-              <a:rPr>
-                <a:solidFill>
-                  <a:srgbClr val="657422"/>
-                </a:solidFill>
-                <a:latin typeface="Courier"/>
-              </a:rPr>
-              <a:t>na.strings =</a:t>
-            </a:r>
-            <a:r>
-              <a:rPr>
-                <a:solidFill>
-                  <a:srgbClr val="003B4F"/>
-                </a:solidFill>
-                <a:latin typeface="Courier"/>
-              </a:rPr>
-              <a:t> </a:t>
-            </a:r>
-            <a:r>
-              <a:rPr>
-                <a:solidFill>
-                  <a:srgbClr val="4758AB"/>
-                </a:solidFill>
-                <a:latin typeface="Courier"/>
-              </a:rPr>
-              <a:t>c</a:t>
-            </a:r>
-            <a:r>
-              <a:rPr>
-                <a:solidFill>
-                  <a:srgbClr val="003B4F"/>
-                </a:solidFill>
-                <a:latin typeface="Courier"/>
-              </a:rPr>
-              <a:t>(</a:t>
-            </a:r>
-            <a:r>
-              <a:rPr>
-                <a:solidFill>
-                  <a:srgbClr val="20794D"/>
-                </a:solidFill>
-                <a:latin typeface="Courier"/>
-              </a:rPr>
-              <a:t>"-999"</a:t>
-            </a:r>
-            <a:r>
-              <a:rPr>
-                <a:solidFill>
-                  <a:srgbClr val="003B4F"/>
-                </a:solidFill>
-                <a:latin typeface="Courier"/>
-              </a:rPr>
-              <a:t>, </a:t>
-            </a:r>
-            <a:r>
-              <a:rPr>
-                <a:solidFill>
-                  <a:srgbClr val="20794D"/>
-                </a:solidFill>
-                <a:latin typeface="Courier"/>
-              </a:rPr>
-              <a:t>"-99.00"</a:t>
-            </a:r>
-            <a:r>
-              <a:rPr>
-                <a:solidFill>
-                  <a:srgbClr val="003B4F"/>
-                </a:solidFill>
-                <a:latin typeface="Courier"/>
-              </a:rPr>
-              <a:t>, </a:t>
-            </a:r>
-            <a:r>
-              <a:rPr>
-                <a:solidFill>
-                  <a:srgbClr val="20794D"/>
-                </a:solidFill>
-                <a:latin typeface="Courier"/>
-              </a:rPr>
-              <a:t>"NA"</a:t>
-            </a:r>
-            <a:r>
-              <a:rPr>
-                <a:solidFill>
-                  <a:srgbClr val="003B4F"/>
-                </a:solidFill>
-                <a:latin typeface="Courier"/>
-              </a:rPr>
-              <a:t>)</a:t>
-            </a:r>
-            <a:br/>
-            <a:r>
-              <a:rPr>
-                <a:solidFill>
-                  <a:srgbClr val="003B4F"/>
-                </a:solidFill>
-                <a:latin typeface="Courier"/>
-              </a:rPr>
-              <a:t>) </a:t>
-            </a:r>
-            <a:r>
-              <a:rPr>
-                <a:solidFill>
-                  <a:srgbClr val="5E5E5E"/>
-                </a:solidFill>
-                <a:latin typeface="Courier"/>
-              </a:rPr>
-              <a:t>%&gt;%</a:t>
-            </a:r>
-            <a:br/>
-            <a:r>
-              <a:rPr>
-                <a:solidFill>
-                  <a:srgbClr val="003B4F"/>
-                </a:solidFill>
-                <a:latin typeface="Courier"/>
-              </a:rPr>
-              <a:t>  </a:t>
-            </a:r>
-            <a:r>
-              <a:rPr>
-                <a:solidFill>
-                  <a:srgbClr val="4758AB"/>
-                </a:solidFill>
-                <a:latin typeface="Courier"/>
-              </a:rPr>
-              <a:t>rownames_to_column</a:t>
-            </a:r>
-            <a:r>
-              <a:rPr>
-                <a:solidFill>
-                  <a:srgbClr val="003B4F"/>
-                </a:solidFill>
-                <a:latin typeface="Courier"/>
-              </a:rPr>
-              <a:t>(</a:t>
-            </a:r>
-            <a:r>
-              <a:rPr>
-                <a:solidFill>
-                  <a:srgbClr val="657422"/>
-                </a:solidFill>
-                <a:latin typeface="Courier"/>
-              </a:rPr>
-              <a:t>var =</a:t>
-            </a:r>
-            <a:r>
-              <a:rPr>
-                <a:solidFill>
-                  <a:srgbClr val="003B4F"/>
-                </a:solidFill>
-                <a:latin typeface="Courier"/>
-              </a:rPr>
-              <a:t> </a:t>
-            </a:r>
-            <a:r>
-              <a:rPr>
-                <a:solidFill>
-                  <a:srgbClr val="20794D"/>
-                </a:solidFill>
-                <a:latin typeface="Courier"/>
-              </a:rPr>
-              <a:t>"date"</a:t>
-            </a:r>
-            <a:r>
-              <a:rPr>
-                <a:solidFill>
-                  <a:srgbClr val="003B4F"/>
-                </a:solidFill>
-                <a:latin typeface="Courier"/>
-              </a:rPr>
-              <a:t>) </a:t>
-            </a:r>
-            <a:r>
-              <a:rPr>
-                <a:solidFill>
-                  <a:srgbClr val="5E5E5E"/>
-                </a:solidFill>
-                <a:latin typeface="Courier"/>
-              </a:rPr>
-              <a:t>%&gt;%</a:t>
-            </a:r>
-            <a:br/>
-            <a:r>
-              <a:rPr>
-                <a:solidFill>
-                  <a:srgbClr val="003B4F"/>
-                </a:solidFill>
-                <a:latin typeface="Courier"/>
-              </a:rPr>
-              <a:t>  </a:t>
-            </a:r>
-            <a:r>
-              <a:rPr>
-                <a:solidFill>
-                  <a:srgbClr val="4758AB"/>
-                </a:solidFill>
-                <a:latin typeface="Courier"/>
-              </a:rPr>
-              <a:t>as_tibble</a:t>
-            </a:r>
-            <a:r>
-              <a:rPr>
-                <a:solidFill>
-                  <a:srgbClr val="003B4F"/>
-                </a:solidFill>
-                <a:latin typeface="Courier"/>
-              </a:rPr>
-              <a:t>()</a:t>
-            </a:r>
-            <a:br/>
-            <a:br/>
-            <a:r>
-              <a:rPr>
-                <a:solidFill>
-                  <a:srgbClr val="4758AB"/>
-                </a:solidFill>
-                <a:latin typeface="Courier"/>
-              </a:rPr>
-              <a:t>dim</a:t>
-            </a:r>
-            <a:r>
-              <a:rPr>
-                <a:solidFill>
-                  <a:srgbClr val="003B4F"/>
-                </a:solidFill>
-                <a:latin typeface="Courier"/>
-              </a:rPr>
-              <a:t>(ice_raw)       </a:t>
-            </a:r>
-            <a:r>
-              <a:rPr>
-                <a:solidFill>
-                  <a:srgbClr val="5E5E5E"/>
-                </a:solidFill>
-                <a:latin typeface="Courier"/>
-              </a:rPr>
-              <a:t># rows x columns - look how WIDE</a:t>
-            </a:r>
-          </a:p>
-          <a:p>
-            <a:pPr lvl="0" indent="0">
-              <a:buNone/>
-            </a:pPr>
-            <a:r>
-              <a:rPr>
-                <a:latin typeface="Courier"/>
-              </a:rPr>
-              <a:t>[1] 209  55</a:t>
-            </a:r>
-          </a:p>
-          <a:p>
-            <a:pPr lvl="0" indent="0">
-              <a:buNone/>
-            </a:pPr>
-            <a:r>
-              <a:rPr>
-                <a:solidFill>
-                  <a:srgbClr val="003B4F"/>
-                </a:solidFill>
-                <a:latin typeface="Courier"/>
-              </a:rPr>
-              <a:t>ice_raw[</a:t>
-            </a:r>
-            <a:r>
-              <a:rPr>
-                <a:solidFill>
-                  <a:srgbClr val="AD0000"/>
-                </a:solidFill>
-                <a:latin typeface="Courier"/>
-              </a:rPr>
-              <a:t>1</a:t>
-            </a:r>
-            <a:r>
-              <a:rPr>
-                <a:solidFill>
-                  <a:srgbClr val="5E5E5E"/>
-                </a:solidFill>
-                <a:latin typeface="Courier"/>
-              </a:rPr>
-              <a:t>:</a:t>
-            </a:r>
-            <a:r>
-              <a:rPr>
-                <a:solidFill>
-                  <a:srgbClr val="AD0000"/>
-                </a:solidFill>
-                <a:latin typeface="Courier"/>
-              </a:rPr>
-              <a:t>3</a:t>
-            </a:r>
-            <a:r>
-              <a:rPr>
-                <a:solidFill>
-                  <a:srgbClr val="003B4F"/>
-                </a:solidFill>
-                <a:latin typeface="Courier"/>
-              </a:rPr>
-              <a:t>, </a:t>
-            </a:r>
-            <a:r>
-              <a:rPr>
-                <a:solidFill>
-                  <a:srgbClr val="AD0000"/>
-                </a:solidFill>
-                <a:latin typeface="Courier"/>
-              </a:rPr>
-              <a:t>1</a:t>
-            </a:r>
-            <a:r>
-              <a:rPr>
-                <a:solidFill>
-                  <a:srgbClr val="5E5E5E"/>
-                </a:solidFill>
-                <a:latin typeface="Courier"/>
-              </a:rPr>
-              <a:t>:</a:t>
-            </a:r>
-            <a:r>
-              <a:rPr>
-                <a:solidFill>
-                  <a:srgbClr val="AD0000"/>
-                </a:solidFill>
-                <a:latin typeface="Courier"/>
-              </a:rPr>
-              <a:t>5</a:t>
-            </a:r>
-            <a:r>
-              <a:rPr>
-                <a:solidFill>
-                  <a:srgbClr val="003B4F"/>
-                </a:solidFill>
-                <a:latin typeface="Courier"/>
-              </a:rPr>
-              <a:t>]  </a:t>
-            </a:r>
-            <a:r>
-              <a:rPr>
-                <a:solidFill>
-                  <a:srgbClr val="5E5E5E"/>
-                </a:solidFill>
-                <a:latin typeface="Courier"/>
-              </a:rPr>
-              <a:t># just the first few columns</a:t>
-            </a:r>
-          </a:p>
-          <a:p>
-            <a:pPr lvl="0" indent="0">
-              <a:buNone/>
-            </a:pPr>
-            <a:r>
-              <a:rPr>
-                <a:latin typeface="Courier"/>
-              </a:rPr>
-              <a:t># A tibble: 3 × 5
-  date   X1973 X1974 X1975 X1976
-  &lt;chr&gt;  &lt;dbl&gt; &lt;dbl&gt; &lt;dbl&gt; &lt;dbl&gt;
-1 Nov-10    NA    NA    NA    NA
-2 Nov-11    NA    NA    NA    NA
-3 Nov-12    NA    NA    NA    NA</a:t>
-            </a:r>
-          </a:p>
-        </p:txBody>
-      </p:sp>
-      <p:sp>
-        <p:nvSpPr>
-          <p:cNvPr id="4" name="Content Placeholder 3"/>
-          <p:cNvSpPr>
-            <a:spLocks noGrp="1"/>
-          </p:cNvSpPr>
-          <p:nvPr>
-            <p:ph idx="2" sz="half"/>
-          </p:nvPr>
-        </p:nvSpPr>
-        <p:spPr/>
-        <p:txBody>
-          <a:bodyPr/>
-          <a:lstStyle/>
-          <a:p>
-            <a:pPr lvl="0" indent="0" marL="0">
-              <a:buNone/>
-            </a:pPr>
-            <a:r>
-              <a:rPr b="1"/>
-              <a:t>What’s happening here:</a:t>
-            </a:r>
-          </a:p>
-          <a:p>
-            <a:pPr lvl="0"/>
+              <a:rPr/>
+              <a:t>Read </a:t>
+            </a:r>
+            <a:r>
+              <a:rPr>
+                <a:latin typeface="Courier"/>
+              </a:rPr>
+              <a:t>sup.txt</a:t>
+            </a:r>
+            <a:r>
+              <a:rPr/>
+              <a:t> straight from the web with </a:t>
+            </a:r>
             <a:r>
               <a:rPr>
                 <a:latin typeface="Courier"/>
@@ -14238,113 +13653,17 @@
             </a:r>
             <a:r>
               <a:rPr/>
-              <a:t> beats </a:t>
-            </a:r>
-            <a:r>
-              <a:rPr>
-                <a:latin typeface="Courier"/>
-              </a:rPr>
-              <a:t>read_csv()</a:t>
-            </a:r>
-            <a:r>
-              <a:rPr/>
-              <a:t> here — the file isn’t comma-separated</a:t>
-            </a:r>
-          </a:p>
-          <a:p>
-            <a:pPr lvl="0"/>
-            <a:r>
-              <a:rPr>
-                <a:latin typeface="Courier"/>
-              </a:rPr>
-              <a:t>na.strings</a:t>
-            </a:r>
-            <a:r>
-              <a:rPr/>
-              <a:t> says which placeholders really mean “missing”</a:t>
-            </a:r>
-          </a:p>
-          <a:p>
-            <a:pPr lvl="0"/>
-            <a:r>
-              <a:rPr/>
-              <a:t>The day labels (</a:t>
-            </a:r>
-            <a:r>
-              <a:rPr>
-                <a:latin typeface="Courier"/>
-              </a:rPr>
-              <a:t>Nov-10</a:t>
-            </a:r>
-            <a:r>
-              <a:rPr/>
-              <a:t>…) were </a:t>
-            </a:r>
-            <a:r>
-              <a:rPr b="1"/>
-              <a:t>row names</a:t>
-            </a:r>
-            <a:r>
-              <a:rPr/>
-              <a:t>, not a column — </a:t>
-            </a:r>
-            <a:r>
-              <a:rPr>
-                <a:latin typeface="Courier"/>
-              </a:rPr>
-              <a:t>rownames_to_column()</a:t>
-            </a:r>
-            <a:r>
-              <a:rPr/>
-              <a:t> fixes that</a:t>
-            </a:r>
-          </a:p>
-          <a:p>
-            <a:pPr lvl="0" indent="0" marL="1270000">
-              <a:buNone/>
-            </a:pPr>
-            <a:r>
-              <a:rPr sz="2000" b="1"/>
-              <a:t>Important</a:t>
-            </a:r>
-          </a:p>
-          <a:p>
-            <a:pPr lvl="0" indent="0" marL="1270000">
-              <a:buNone/>
-            </a:pPr>
-            <a:r>
-              <a:rPr sz="2000"/>
-              <a:t>Column names </a:t>
-            </a:r>
-            <a:r>
-              <a:rPr sz="2000">
-                <a:latin typeface="Courier"/>
-              </a:rPr>
-              <a:t>X1973</a:t>
-            </a:r>
-            <a:r>
-              <a:rPr sz="2000"/>
-              <a:t>, </a:t>
-            </a:r>
-            <a:r>
-              <a:rPr sz="2000">
-                <a:latin typeface="Courier"/>
-              </a:rPr>
-              <a:t>X1974</a:t>
-            </a:r>
-            <a:r>
-              <a:rPr sz="2000"/>
-              <a:t>… — R adds an </a:t>
-            </a:r>
-            <a:r>
-              <a:rPr sz="2000">
-                <a:latin typeface="Courier"/>
-              </a:rPr>
-              <a:t>X</a:t>
-            </a:r>
-            <a:r>
-              <a:rPr sz="2000"/>
-              <a:t> because a name can’t start with a number!</a:t>
+              <a:t>, turn the row labels into a real </a:t>
+            </a:r>
+            <a:r>
+              <a:rPr>
+                <a:latin typeface="Courier"/>
+              </a:rPr>
+              <a:t>date</a:t>
+            </a:r>
+            <a:r>
+              <a:rPr/>
+              <a:t> column, and look at the wide shape. Predict how many columns it has before you run it.</a:t>
             </a:r>
           </a:p>
         </p:txBody>

--- a/docs/content/pivoting/pivoting_lecture.pptx
+++ b/docs/content/pivoting/pivoting_lecture.pptx
@@ -3370,7 +3370,7 @@
             </a:pPr>
             <a:r>
               <a:rPr/>
-              <a:t>2026-10-19</a:t>
+              <a:t>2026-10-22</a:t>
             </a:r>
           </a:p>
         </p:txBody>
